--- a/assets/readme/examples/maven-banner.pptx
+++ b/assets/readme/examples/maven-banner.pptx
@@ -7080,7 +7080,7 @@
               <a:defRPr/>
             </a:pPr>
             <a:r>
-              <a:rPr lang="en-US" sz="1000" b="true" i="false" u="none" strike="noStrike" kern="0">
+              <a:rPr lang="en-US" sz="1000" b="false" i="false" u="none" strike="noStrike" kern="0">
                 <a:solidFill>
                   <a:srgbClr val="CED4E6"/>
                 </a:solidFill>
@@ -7126,7 +7126,7 @@
               <a:defRPr/>
             </a:pPr>
             <a:r>
-              <a:rPr lang="en-US" sz="6000" b="true" i="false" u="none" strike="noStrike" kern="0">
+              <a:rPr lang="en-US" sz="6000" b="false" i="false" u="none" strike="noStrike" kern="0">
                 <a:solidFill>
                   <a:srgbClr val="F7F8FC"/>
                 </a:solidFill>
@@ -7312,7 +7312,7 @@
               <a:defRPr/>
             </a:pPr>
             <a:r>
-              <a:rPr lang="en-US" sz="1250" b="true" i="false" u="none" strike="noStrike" kern="0">
+              <a:rPr lang="en-US" sz="1250" b="false" i="false" u="none" strike="noStrike" kern="0">
                 <a:solidFill>
                   <a:srgbClr val="E9972D"/>
                 </a:solidFill>
@@ -7384,7 +7384,7 @@
               <a:defRPr/>
             </a:pPr>
             <a:r>
-              <a:rPr lang="en-US" sz="1000" b="true" i="false" u="none" strike="noStrike" kern="0">
+              <a:rPr lang="en-US" sz="1000" b="false" i="false" u="none" strike="noStrike" kern="0">
                 <a:solidFill>
                   <a:srgbClr val="CED4E6"/>
                 </a:solidFill>
@@ -7456,7 +7456,7 @@
               <a:defRPr/>
             </a:pPr>
             <a:r>
-              <a:rPr lang="en-US" sz="1000" b="true" i="false" u="none" strike="noStrike" kern="0">
+              <a:rPr lang="en-US" sz="1000" b="false" i="false" u="none" strike="noStrike" kern="0">
                 <a:solidFill>
                   <a:srgbClr val="CED4E6"/>
                 </a:solidFill>
@@ -7528,7 +7528,7 @@
               <a:defRPr/>
             </a:pPr>
             <a:r>
-              <a:rPr lang="en-US" sz="1000" b="true" i="false" u="none" strike="noStrike" kern="0">
+              <a:rPr lang="en-US" sz="1000" b="false" i="false" u="none" strike="noStrike" kern="0">
                 <a:solidFill>
                   <a:srgbClr val="CED4E6"/>
                 </a:solidFill>
@@ -7600,7 +7600,7 @@
               <a:defRPr/>
             </a:pPr>
             <a:r>
-              <a:rPr lang="en-US" sz="1000" b="true" i="false" u="none" strike="noStrike" kern="0">
+              <a:rPr lang="en-US" sz="1000" b="false" i="false" u="none" strike="noStrike" kern="0">
                 <a:solidFill>
                   <a:srgbClr val="CED4E6"/>
                 </a:solidFill>
@@ -7637,7 +7637,7 @@
               <a:defRPr/>
             </a:pPr>
             <a:r>
-              <a:rPr lang="en-US" sz="1800" b="true" i="false" u="none" strike="noStrike" kern="0">
+              <a:rPr lang="en-US" sz="1800" b="false" i="false" u="none" strike="noStrike" kern="0">
                 <a:solidFill>
                   <a:srgbClr val="F7F8FC"/>
                 </a:solidFill>
@@ -7674,7 +7674,7 @@
               <a:defRPr/>
             </a:pPr>
             <a:r>
-              <a:rPr lang="en-US" sz="1800" b="true" i="false" u="none" strike="noStrike" kern="0">
+              <a:rPr lang="en-US" sz="1800" b="false" i="false" u="none" strike="noStrike" kern="0">
                 <a:solidFill>
                   <a:srgbClr val="F7F8FC"/>
                 </a:solidFill>
@@ -7748,7 +7748,7 @@
               <a:defRPr/>
             </a:pPr>
             <a:r>
-              <a:rPr lang="en-US" sz="1800" b="true" i="false" u="none" strike="noStrike" kern="0">
+              <a:rPr lang="en-US" sz="1800" b="false" i="false" u="none" strike="noStrike" kern="0">
                 <a:solidFill>
                   <a:srgbClr val="F7F8FC"/>
                 </a:solidFill>
@@ -7785,7 +7785,7 @@
               <a:defRPr/>
             </a:pPr>
             <a:r>
-              <a:rPr lang="en-US" sz="1800" b="true" i="false" u="none" strike="noStrike" kern="0">
+              <a:rPr lang="en-US" sz="1800" b="false" i="false" u="none" strike="noStrike" kern="0">
                 <a:solidFill>
                   <a:srgbClr val="F7F8FC"/>
                 </a:solidFill>
@@ -7822,7 +7822,7 @@
               <a:defRPr/>
             </a:pPr>
             <a:r>
-              <a:rPr lang="en-US" sz="1800" b="true" i="false" u="none" strike="noStrike" kern="0">
+              <a:rPr lang="en-US" sz="1800" b="false" i="false" u="none" strike="noStrike" kern="0">
                 <a:solidFill>
                   <a:srgbClr val="F7F8FC"/>
                 </a:solidFill>
@@ -7896,7 +7896,7 @@
               <a:defRPr/>
             </a:pPr>
             <a:r>
-              <a:rPr lang="en-US" sz="1800" b="true" i="false" u="none" strike="noStrike" kern="0">
+              <a:rPr lang="en-US" sz="1800" b="false" i="false" u="none" strike="noStrike" kern="0">
                 <a:solidFill>
                   <a:srgbClr val="F7F8FC"/>
                 </a:solidFill>
@@ -7933,7 +7933,7 @@
               <a:defRPr/>
             </a:pPr>
             <a:r>
-              <a:rPr lang="en-US" sz="1800" b="true" i="false" u="none" strike="noStrike" kern="0">
+              <a:rPr lang="en-US" sz="1800" b="false" i="false" u="none" strike="noStrike" kern="0">
                 <a:solidFill>
                   <a:srgbClr val="F7F8FC"/>
                 </a:solidFill>
@@ -7970,7 +7970,7 @@
               <a:defRPr/>
             </a:pPr>
             <a:r>
-              <a:rPr lang="en-US" sz="1800" b="true" i="false" u="none" strike="noStrike" kern="0">
+              <a:rPr lang="en-US" sz="1800" b="false" i="false" u="none" strike="noStrike" kern="0">
                 <a:solidFill>
                   <a:srgbClr val="F7F8FC"/>
                 </a:solidFill>
@@ -8007,7 +8007,7 @@
               <a:defRPr/>
             </a:pPr>
             <a:r>
-              <a:rPr lang="en-US" sz="1800" b="true" i="false" u="none" strike="noStrike" kern="0">
+              <a:rPr lang="en-US" sz="1800" b="false" i="false" u="none" strike="noStrike" kern="0">
                 <a:solidFill>
                   <a:srgbClr val="F7F8FC"/>
                 </a:solidFill>
@@ -8125,7 +8125,7 @@
               <a:defRPr/>
             </a:pPr>
             <a:r>
-              <a:rPr lang="en-US" sz="850" b="true" i="false" u="none" strike="noStrike" kern="0">
+              <a:rPr lang="en-US" sz="850" b="false" i="false" u="none" strike="noStrike" kern="0">
                 <a:solidFill>
                   <a:srgbClr val="8C95AF"/>
                 </a:solidFill>
@@ -8994,7 +8994,7 @@
               <a:defRPr/>
             </a:pPr>
             <a:r>
-              <a:rPr lang="en-US" sz="900" b="true" i="false" u="none" strike="noStrike" kern="0">
+              <a:rPr lang="en-US" sz="900" b="false" i="false" u="none" strike="noStrike" kern="0">
                 <a:solidFill>
                   <a:srgbClr val="CED4E6"/>
                 </a:solidFill>
@@ -9226,7 +9226,7 @@
               <a:defRPr/>
             </a:pPr>
             <a:r>
-              <a:rPr lang="en-US" sz="750" b="true" i="false" u="none" strike="noStrike" kern="0">
+              <a:rPr lang="en-US" sz="750" b="false" i="false" u="none" strike="noStrike" kern="0">
                 <a:solidFill>
                   <a:srgbClr val="0D1121"/>
                 </a:solidFill>
@@ -9458,7 +9458,7 @@
               <a:defRPr/>
             </a:pPr>
             <a:r>
-              <a:rPr lang="en-US" sz="750" b="true" i="false" u="none" strike="noStrike" kern="0">
+              <a:rPr lang="en-US" sz="750" b="false" i="false" u="none" strike="noStrike" kern="0">
                 <a:solidFill>
                   <a:srgbClr val="0D1121"/>
                 </a:solidFill>

--- a/assets/readme/examples/maven-banner.pptx
+++ b/assets/readme/examples/maven-banner.pptx
@@ -7080,7 +7080,7 @@
               <a:defRPr/>
             </a:pPr>
             <a:r>
-              <a:rPr lang="en-US" sz="1000" b="false" i="false" u="none" strike="noStrike" kern="0">
+              <a:rPr lang="en-US" sz="1000" b="true" i="false" u="none" strike="noStrike" kern="0">
                 <a:solidFill>
                   <a:srgbClr val="CED4E6"/>
                 </a:solidFill>
@@ -7126,7 +7126,7 @@
               <a:defRPr/>
             </a:pPr>
             <a:r>
-              <a:rPr lang="en-US" sz="6000" b="false" i="false" u="none" strike="noStrike" kern="0">
+              <a:rPr lang="en-US" sz="6000" b="true" i="false" u="none" strike="noStrike" kern="0">
                 <a:solidFill>
                   <a:srgbClr val="F7F8FC"/>
                 </a:solidFill>
@@ -7312,7 +7312,7 @@
               <a:defRPr/>
             </a:pPr>
             <a:r>
-              <a:rPr lang="en-US" sz="1250" b="false" i="false" u="none" strike="noStrike" kern="0">
+              <a:rPr lang="en-US" sz="1250" b="true" i="false" u="none" strike="noStrike" kern="0">
                 <a:solidFill>
                   <a:srgbClr val="E9972D"/>
                 </a:solidFill>
@@ -7384,7 +7384,7 @@
               <a:defRPr/>
             </a:pPr>
             <a:r>
-              <a:rPr lang="en-US" sz="1000" b="false" i="false" u="none" strike="noStrike" kern="0">
+              <a:rPr lang="en-US" sz="1000" b="true" i="false" u="none" strike="noStrike" kern="0">
                 <a:solidFill>
                   <a:srgbClr val="CED4E6"/>
                 </a:solidFill>
@@ -7456,7 +7456,7 @@
               <a:defRPr/>
             </a:pPr>
             <a:r>
-              <a:rPr lang="en-US" sz="1000" b="false" i="false" u="none" strike="noStrike" kern="0">
+              <a:rPr lang="en-US" sz="1000" b="true" i="false" u="none" strike="noStrike" kern="0">
                 <a:solidFill>
                   <a:srgbClr val="CED4E6"/>
                 </a:solidFill>
@@ -7528,7 +7528,7 @@
               <a:defRPr/>
             </a:pPr>
             <a:r>
-              <a:rPr lang="en-US" sz="1000" b="false" i="false" u="none" strike="noStrike" kern="0">
+              <a:rPr lang="en-US" sz="1000" b="true" i="false" u="none" strike="noStrike" kern="0">
                 <a:solidFill>
                   <a:srgbClr val="CED4E6"/>
                 </a:solidFill>
@@ -7600,7 +7600,7 @@
               <a:defRPr/>
             </a:pPr>
             <a:r>
-              <a:rPr lang="en-US" sz="1000" b="false" i="false" u="none" strike="noStrike" kern="0">
+              <a:rPr lang="en-US" sz="1000" b="true" i="false" u="none" strike="noStrike" kern="0">
                 <a:solidFill>
                   <a:srgbClr val="CED4E6"/>
                 </a:solidFill>
@@ -7637,7 +7637,7 @@
               <a:defRPr/>
             </a:pPr>
             <a:r>
-              <a:rPr lang="en-US" sz="1800" b="false" i="false" u="none" strike="noStrike" kern="0">
+              <a:rPr lang="en-US" sz="1800" b="true" i="false" u="none" strike="noStrike" kern="0">
                 <a:solidFill>
                   <a:srgbClr val="F7F8FC"/>
                 </a:solidFill>
@@ -7674,7 +7674,7 @@
               <a:defRPr/>
             </a:pPr>
             <a:r>
-              <a:rPr lang="en-US" sz="1800" b="false" i="false" u="none" strike="noStrike" kern="0">
+              <a:rPr lang="en-US" sz="1800" b="true" i="false" u="none" strike="noStrike" kern="0">
                 <a:solidFill>
                   <a:srgbClr val="F7F8FC"/>
                 </a:solidFill>
@@ -7748,7 +7748,7 @@
               <a:defRPr/>
             </a:pPr>
             <a:r>
-              <a:rPr lang="en-US" sz="1800" b="false" i="false" u="none" strike="noStrike" kern="0">
+              <a:rPr lang="en-US" sz="1800" b="true" i="false" u="none" strike="noStrike" kern="0">
                 <a:solidFill>
                   <a:srgbClr val="F7F8FC"/>
                 </a:solidFill>
@@ -7785,7 +7785,7 @@
               <a:defRPr/>
             </a:pPr>
             <a:r>
-              <a:rPr lang="en-US" sz="1800" b="false" i="false" u="none" strike="noStrike" kern="0">
+              <a:rPr lang="en-US" sz="1800" b="true" i="false" u="none" strike="noStrike" kern="0">
                 <a:solidFill>
                   <a:srgbClr val="F7F8FC"/>
                 </a:solidFill>
@@ -7822,7 +7822,7 @@
               <a:defRPr/>
             </a:pPr>
             <a:r>
-              <a:rPr lang="en-US" sz="1800" b="false" i="false" u="none" strike="noStrike" kern="0">
+              <a:rPr lang="en-US" sz="1800" b="true" i="false" u="none" strike="noStrike" kern="0">
                 <a:solidFill>
                   <a:srgbClr val="F7F8FC"/>
                 </a:solidFill>
@@ -7896,7 +7896,7 @@
               <a:defRPr/>
             </a:pPr>
             <a:r>
-              <a:rPr lang="en-US" sz="1800" b="false" i="false" u="none" strike="noStrike" kern="0">
+              <a:rPr lang="en-US" sz="1800" b="true" i="false" u="none" strike="noStrike" kern="0">
                 <a:solidFill>
                   <a:srgbClr val="F7F8FC"/>
                 </a:solidFill>
@@ -7933,7 +7933,7 @@
               <a:defRPr/>
             </a:pPr>
             <a:r>
-              <a:rPr lang="en-US" sz="1800" b="false" i="false" u="none" strike="noStrike" kern="0">
+              <a:rPr lang="en-US" sz="1800" b="true" i="false" u="none" strike="noStrike" kern="0">
                 <a:solidFill>
                   <a:srgbClr val="F7F8FC"/>
                 </a:solidFill>
@@ -7970,7 +7970,7 @@
               <a:defRPr/>
             </a:pPr>
             <a:r>
-              <a:rPr lang="en-US" sz="1800" b="false" i="false" u="none" strike="noStrike" kern="0">
+              <a:rPr lang="en-US" sz="1800" b="true" i="false" u="none" strike="noStrike" kern="0">
                 <a:solidFill>
                   <a:srgbClr val="F7F8FC"/>
                 </a:solidFill>
@@ -8007,7 +8007,7 @@
               <a:defRPr/>
             </a:pPr>
             <a:r>
-              <a:rPr lang="en-US" sz="1800" b="false" i="false" u="none" strike="noStrike" kern="0">
+              <a:rPr lang="en-US" sz="1800" b="true" i="false" u="none" strike="noStrike" kern="0">
                 <a:solidFill>
                   <a:srgbClr val="F7F8FC"/>
                 </a:solidFill>
@@ -8125,7 +8125,7 @@
               <a:defRPr/>
             </a:pPr>
             <a:r>
-              <a:rPr lang="en-US" sz="850" b="false" i="false" u="none" strike="noStrike" kern="0">
+              <a:rPr lang="en-US" sz="850" b="true" i="false" u="none" strike="noStrike" kern="0">
                 <a:solidFill>
                   <a:srgbClr val="8C95AF"/>
                 </a:solidFill>
@@ -8994,7 +8994,7 @@
               <a:defRPr/>
             </a:pPr>
             <a:r>
-              <a:rPr lang="en-US" sz="900" b="false" i="false" u="none" strike="noStrike" kern="0">
+              <a:rPr lang="en-US" sz="900" b="true" i="false" u="none" strike="noStrike" kern="0">
                 <a:solidFill>
                   <a:srgbClr val="CED4E6"/>
                 </a:solidFill>
@@ -9226,7 +9226,7 @@
               <a:defRPr/>
             </a:pPr>
             <a:r>
-              <a:rPr lang="en-US" sz="750" b="false" i="false" u="none" strike="noStrike" kern="0">
+              <a:rPr lang="en-US" sz="750" b="true" i="false" u="none" strike="noStrike" kern="0">
                 <a:solidFill>
                   <a:srgbClr val="0D1121"/>
                 </a:solidFill>
@@ -9458,7 +9458,7 @@
               <a:defRPr/>
             </a:pPr>
             <a:r>
-              <a:rPr lang="en-US" sz="750" b="false" i="false" u="none" strike="noStrike" kern="0">
+              <a:rPr lang="en-US" sz="750" b="true" i="false" u="none" strike="noStrike" kern="0">
                 <a:solidFill>
                   <a:srgbClr val="0D1121"/>
                 </a:solidFill>

--- a/assets/readme/examples/maven-banner.pptx
+++ b/assets/readme/examples/maven-banner.pptx
@@ -7101,7 +7101,7 @@
         <p:spPr>
           <a:xfrm>
             <a:off x="635000" y="1076498"/>
-            <a:ext cx="5379466" cy="704850"/>
+            <a:ext cx="5717032" cy="704850"/>
           </a:xfrm>
           <a:prstGeom prst="rect">
             <a:avLst/>
@@ -7621,7 +7621,7 @@
         <p:spPr>
           <a:xfrm>
             <a:off x="660400" y="5545189"/>
-            <a:ext cx="547624" cy="211455"/>
+            <a:ext cx="572770" cy="211455"/>
           </a:xfrm>
           <a:prstGeom prst="rect">
             <a:avLst/>
@@ -7657,7 +7657,7 @@
         </p:nvSpPr>
         <p:spPr>
           <a:xfrm>
-            <a:off x="1206754" y="5545189"/>
+            <a:off x="1231900" y="5545189"/>
             <a:ext cx="191922" cy="211455"/>
           </a:xfrm>
           <a:prstGeom prst="rect">
@@ -7694,7 +7694,7 @@
         </p:nvSpPr>
         <p:spPr>
           <a:xfrm>
-            <a:off x="1397406" y="5591177"/>
+            <a:off x="1422552" y="5591177"/>
             <a:ext cx="60477" cy="164465"/>
           </a:xfrm>
           <a:prstGeom prst="rect">
@@ -7731,7 +7731,7 @@
         </p:nvSpPr>
         <p:spPr>
           <a:xfrm>
-            <a:off x="1456614" y="5545189"/>
+            <a:off x="1481760" y="5545189"/>
             <a:ext cx="191922" cy="211455"/>
           </a:xfrm>
           <a:prstGeom prst="rect">
@@ -7768,8 +7768,8 @@
         </p:nvSpPr>
         <p:spPr>
           <a:xfrm>
-            <a:off x="1647266" y="5545189"/>
-            <a:ext cx="611175" cy="211455"/>
+            <a:off x="1672412" y="5545189"/>
+            <a:ext cx="674497" cy="211455"/>
           </a:xfrm>
           <a:prstGeom prst="rect">
             <a:avLst/>
@@ -7805,7 +7805,7 @@
         </p:nvSpPr>
         <p:spPr>
           <a:xfrm>
-            <a:off x="2257171" y="5545189"/>
+            <a:off x="2345639" y="5545189"/>
             <a:ext cx="191922" cy="211455"/>
           </a:xfrm>
           <a:prstGeom prst="rect">
@@ -7842,7 +7842,7 @@
         </p:nvSpPr>
         <p:spPr>
           <a:xfrm>
-            <a:off x="2447823" y="5591177"/>
+            <a:off x="2536292" y="5591177"/>
             <a:ext cx="60477" cy="164465"/>
           </a:xfrm>
           <a:prstGeom prst="rect">
@@ -7879,7 +7879,7 @@
         </p:nvSpPr>
         <p:spPr>
           <a:xfrm>
-            <a:off x="2507031" y="5545189"/>
+            <a:off x="2595499" y="5545189"/>
             <a:ext cx="191922" cy="211455"/>
           </a:xfrm>
           <a:prstGeom prst="rect">
@@ -7916,8 +7916,8 @@
         </p:nvSpPr>
         <p:spPr>
           <a:xfrm>
-            <a:off x="2697683" y="5545189"/>
-            <a:ext cx="789026" cy="211455"/>
+            <a:off x="2786151" y="5545189"/>
+            <a:ext cx="877722" cy="211455"/>
           </a:xfrm>
           <a:prstGeom prst="rect">
             <a:avLst/>
@@ -7953,7 +7953,7 @@
         </p:nvSpPr>
         <p:spPr>
           <a:xfrm>
-            <a:off x="3485439" y="5545189"/>
+            <a:off x="3662604" y="5545189"/>
             <a:ext cx="64821" cy="211455"/>
           </a:xfrm>
           <a:prstGeom prst="rect">
@@ -7990,8 +7990,8 @@
         </p:nvSpPr>
         <p:spPr>
           <a:xfrm>
-            <a:off x="3548990" y="5545189"/>
-            <a:ext cx="1005053" cy="211455"/>
+            <a:off x="3726155" y="5545189"/>
+            <a:ext cx="1093521" cy="211455"/>
           </a:xfrm>
           <a:prstGeom prst="rect">
             <a:avLst/>

--- a/assets/readme/examples/maven-banner.pptx
+++ b/assets/readme/examples/maven-banner.pptx
@@ -6,6 +6,9 @@
   </p:sldMasterIdLst>
   <p:sldIdLst>
     <p:sldId id="256" r:id="rId6"/>
+    <p:sldId id="257" r:id="rId7"/>
+    <p:sldId id="258" r:id="rId8"/>
+    <p:sldId id="259" r:id="rId9"/>
   </p:sldIdLst>
   <p:sldSz cx="12192000" cy="6858000"/>
   <p:notesSz cx="6858000" cy="9144000"/>
@@ -9511,6 +9514,6837 @@
                 <a:latin typeface="Arial"/>
               </a:rPr>
               <a:t>One model. PDF and PPTX outputs.</a:t>
+            </a:r>
+            <a:endParaRPr lang="en-US" sz="1100"/>
+          </a:p>
+        </p:txBody>
+      </p:sp>
+    </p:spTree>
+  </p:cSld>
+  <p:clrMapOvr>
+    <a:masterClrMapping/>
+  </p:clrMapOvr>
+</p:sld>
+</file>
+
+<file path=ppt/slides/slide2.xml><?xml version="1.0" encoding="utf-8"?>
+<p:sld xmlns:p="http://schemas.openxmlformats.org/presentationml/2006/main" xmlns:a="http://schemas.openxmlformats.org/drawingml/2006/main">
+  <p:cSld>
+    <p:spTree>
+      <p:nvGrpSpPr>
+        <p:cNvPr id="1" name=""/>
+        <p:cNvGrpSpPr/>
+        <p:nvPr/>
+      </p:nvGrpSpPr>
+      <p:grpSpPr>
+        <a:xfrm>
+          <a:off x="0" y="0"/>
+          <a:ext cx="0" cy="0"/>
+          <a:chOff x="0" y="0"/>
+          <a:chExt cx="0" cy="0"/>
+        </a:xfrm>
+      </p:grpSpPr>
+      <p:sp>
+        <p:nvSpPr>
+          <p:cNvPr name="AutoShape 2" id="2"/>
+          <p:cNvSpPr/>
+          <p:nvPr/>
+        </p:nvSpPr>
+        <p:spPr>
+          <a:xfrm>
+            <a:off x="0" y="0"/>
+            <a:ext cx="12192000" cy="6858000"/>
+          </a:xfrm>
+          <a:prstGeom prst="rect">
+            <a:avLst/>
+          </a:prstGeom>
+          <a:solidFill>
+            <a:srgbClr val="0D1121"/>
+          </a:solidFill>
+          <a:ln>
+            <a:noFill/>
+          </a:ln>
+        </p:spPr>
+      </p:sp>
+      <p:sp>
+        <p:nvSpPr>
+          <p:cNvPr name="GraphCompose Text Line" id="3"/>
+          <p:cNvSpPr txBox="true"/>
+          <p:nvPr/>
+        </p:nvSpPr>
+        <p:spPr>
+          <a:xfrm>
+            <a:off x="660400" y="454168"/>
+            <a:ext cx="1007110" cy="109804"/>
+          </a:xfrm>
+          <a:prstGeom prst="rect">
+            <a:avLst/>
+          </a:prstGeom>
+        </p:spPr>
+        <p:txBody>
+          <a:bodyPr anchor="t" rtlCol="false" wrap="none" tIns="0" rIns="0" bIns="0" lIns="0">
+            <a:noAutofit/>
+          </a:bodyPr>
+          <a:lstStyle/>
+          <a:p>
+            <a:pPr algn="l">
+              <a:lnSpc>
+                <a:spcPct val="100000"/>
+              </a:lnSpc>
+              <a:spcBef>
+                <a:spcPct val="0"/>
+              </a:spcBef>
+              <a:spcAft>
+                <a:spcPct val="0"/>
+              </a:spcAft>
+              <a:defRPr/>
+            </a:pPr>
+            <a:r>
+              <a:rPr lang="en-US" sz="1100" b="true" i="false" u="none" strike="noStrike" kern="0">
+                <a:solidFill>
+                  <a:srgbClr val="E9972D"/>
+                </a:solidFill>
+                <a:latin typeface="Courier New"/>
+              </a:rPr>
+              <a:t>HOW IT WORKS</a:t>
+            </a:r>
+            <a:endParaRPr lang="en-US" sz="1100"/>
+          </a:p>
+        </p:txBody>
+      </p:sp>
+      <p:sp>
+        <p:nvSpPr>
+          <p:cNvPr name="GraphCompose Text Line" id="4"/>
+          <p:cNvSpPr txBox="true"/>
+          <p:nvPr/>
+        </p:nvSpPr>
+        <p:spPr>
+          <a:xfrm>
+            <a:off x="660400" y="597253"/>
+            <a:ext cx="7623175" cy="352425"/>
+          </a:xfrm>
+          <a:prstGeom prst="rect">
+            <a:avLst/>
+          </a:prstGeom>
+        </p:spPr>
+        <p:txBody>
+          <a:bodyPr anchor="t" rtlCol="false" wrap="none" tIns="0" rIns="0" bIns="0" lIns="0">
+            <a:noAutofit/>
+          </a:bodyPr>
+          <a:lstStyle/>
+          <a:p>
+            <a:pPr algn="l">
+              <a:lnSpc>
+                <a:spcPct val="100000"/>
+              </a:lnSpc>
+              <a:spcBef>
+                <a:spcPct val="0"/>
+              </a:spcBef>
+              <a:spcAft>
+                <a:spcPct val="0"/>
+              </a:spcAft>
+              <a:defRPr/>
+            </a:pPr>
+            <a:r>
+              <a:rPr lang="en-US" sz="3000" b="true" i="false" u="none" strike="noStrike" kern="0">
+                <a:solidFill>
+                  <a:srgbClr val="F7F8FC"/>
+                </a:solidFill>
+                <a:latin typeface="Arial"/>
+              </a:rPr>
+              <a:t>From one Java file to a finished document</a:t>
+            </a:r>
+            <a:endParaRPr lang="en-US" sz="1100"/>
+          </a:p>
+        </p:txBody>
+      </p:sp>
+      <p:sp>
+        <p:nvSpPr>
+          <p:cNvPr name="AutoShape 5" id="5"/>
+          <p:cNvSpPr/>
+          <p:nvPr/>
+        </p:nvSpPr>
+        <p:spPr>
+          <a:xfrm>
+            <a:off x="660400" y="1173429"/>
+            <a:ext cx="1219200" cy="50800"/>
+          </a:xfrm>
+          <a:prstGeom prst="rect">
+            <a:avLst/>
+          </a:prstGeom>
+          <a:solidFill>
+            <a:srgbClr val="E9972D"/>
+          </a:solidFill>
+          <a:ln>
+            <a:noFill/>
+          </a:ln>
+        </p:spPr>
+      </p:sp>
+      <p:sp>
+        <p:nvSpPr>
+          <p:cNvPr name="GraphCompose Text Line" id="6"/>
+          <p:cNvSpPr txBox="true"/>
+          <p:nvPr/>
+        </p:nvSpPr>
+        <p:spPr>
+          <a:xfrm>
+            <a:off x="660400" y="1396510"/>
+            <a:ext cx="9994113" cy="152718"/>
+          </a:xfrm>
+          <a:prstGeom prst="rect">
+            <a:avLst/>
+          </a:prstGeom>
+        </p:spPr>
+        <p:txBody>
+          <a:bodyPr anchor="t" rtlCol="false" wrap="none" tIns="0" rIns="0" bIns="0" lIns="0">
+            <a:noAutofit/>
+          </a:bodyPr>
+          <a:lstStyle/>
+          <a:p>
+            <a:pPr algn="l">
+              <a:lnSpc>
+                <a:spcPct val="100000"/>
+              </a:lnSpc>
+              <a:spcBef>
+                <a:spcPct val="0"/>
+              </a:spcBef>
+              <a:spcAft>
+                <a:spcPct val="0"/>
+              </a:spcAft>
+              <a:defRPr/>
+            </a:pPr>
+            <a:r>
+              <a:rPr lang="en-US" sz="1300" b="false" i="false" u="none" strike="noStrike" kern="0">
+                <a:solidFill>
+                  <a:srgbClr val="CED4E6"/>
+                </a:solidFill>
+                <a:latin typeface="Arial"/>
+              </a:rPr>
+              <a:t>You describe the document semantically — sections, rows, tables, charts, shapes, layers — and the engine resolves the rest. No manual</a:t>
+            </a:r>
+            <a:endParaRPr lang="en-US" sz="1100"/>
+          </a:p>
+        </p:txBody>
+      </p:sp>
+      <p:sp>
+        <p:nvSpPr>
+          <p:cNvPr name="GraphCompose Text Line" id="7"/>
+          <p:cNvSpPr txBox="true"/>
+          <p:nvPr/>
+        </p:nvSpPr>
+        <p:spPr>
+          <a:xfrm>
+            <a:off x="660400" y="1600028"/>
+            <a:ext cx="4139832" cy="152718"/>
+          </a:xfrm>
+          <a:prstGeom prst="rect">
+            <a:avLst/>
+          </a:prstGeom>
+        </p:spPr>
+        <p:txBody>
+          <a:bodyPr anchor="t" rtlCol="false" wrap="none" tIns="0" rIns="0" bIns="0" lIns="0">
+            <a:noAutofit/>
+          </a:bodyPr>
+          <a:lstStyle/>
+          <a:p>
+            <a:pPr algn="l">
+              <a:lnSpc>
+                <a:spcPct val="100000"/>
+              </a:lnSpc>
+              <a:spcBef>
+                <a:spcPct val="0"/>
+              </a:spcBef>
+              <a:spcAft>
+                <a:spcPct val="0"/>
+              </a:spcAft>
+              <a:defRPr/>
+            </a:pPr>
+            <a:r>
+              <a:rPr lang="en-US" sz="1300" b="false" i="false" u="none" strike="noStrike" kern="0">
+                <a:solidFill>
+                  <a:srgbClr val="CED4E6"/>
+                </a:solidFill>
+                <a:latin typeface="Arial"/>
+              </a:rPr>
+              <a:t>coordinates, no XML templates, no per-format authoring.</a:t>
+            </a:r>
+            <a:endParaRPr lang="en-US" sz="1100"/>
+          </a:p>
+        </p:txBody>
+      </p:sp>
+      <p:sp>
+        <p:nvSpPr>
+          <p:cNvPr name="AutoShape 8" id="8"/>
+          <p:cNvSpPr/>
+          <p:nvPr/>
+        </p:nvSpPr>
+        <p:spPr>
+          <a:xfrm>
+            <a:off x="660400" y="2253564"/>
+            <a:ext cx="2584450" cy="1233106"/>
+          </a:xfrm>
+          <a:prstGeom prst="roundRect">
+            <a:avLst>
+              <a:gd name="adj" fmla="val 10299"/>
+            </a:avLst>
+          </a:prstGeom>
+          <a:solidFill>
+            <a:srgbClr val="141A2F"/>
+          </a:solidFill>
+          <a:ln w="12700">
+            <a:solidFill>
+              <a:srgbClr val="303856"/>
+            </a:solidFill>
+          </a:ln>
+        </p:spPr>
+      </p:sp>
+      <p:sp>
+        <p:nvSpPr>
+          <p:cNvPr name="GraphCompose Text Line" id="9"/>
+          <p:cNvSpPr txBox="true"/>
+          <p:nvPr/>
+        </p:nvSpPr>
+        <p:spPr>
+          <a:xfrm>
+            <a:off x="863600" y="2405070"/>
+            <a:ext cx="153670" cy="199644"/>
+          </a:xfrm>
+          <a:prstGeom prst="rect">
+            <a:avLst/>
+          </a:prstGeom>
+        </p:spPr>
+        <p:txBody>
+          <a:bodyPr anchor="t" rtlCol="false" wrap="none" tIns="0" rIns="0" bIns="0" lIns="0">
+            <a:noAutofit/>
+          </a:bodyPr>
+          <a:lstStyle/>
+          <a:p>
+            <a:pPr algn="l">
+              <a:lnSpc>
+                <a:spcPct val="100000"/>
+              </a:lnSpc>
+              <a:spcBef>
+                <a:spcPct val="0"/>
+              </a:spcBef>
+              <a:spcAft>
+                <a:spcPct val="0"/>
+              </a:spcAft>
+              <a:defRPr/>
+            </a:pPr>
+            <a:r>
+              <a:rPr lang="en-US" sz="2000" b="true" i="false" u="none" strike="noStrike" kern="0">
+                <a:solidFill>
+                  <a:srgbClr val="E9972D"/>
+                </a:solidFill>
+                <a:latin typeface="Courier New"/>
+              </a:rPr>
+              <a:t>1</a:t>
+            </a:r>
+            <a:endParaRPr lang="en-US" sz="1100"/>
+          </a:p>
+        </p:txBody>
+      </p:sp>
+      <p:sp>
+        <p:nvSpPr>
+          <p:cNvPr name="GraphCompose Text Line" id="10"/>
+          <p:cNvSpPr txBox="true"/>
+          <p:nvPr/>
+        </p:nvSpPr>
+        <p:spPr>
+          <a:xfrm>
+            <a:off x="863600" y="2727089"/>
+            <a:ext cx="707403" cy="152718"/>
+          </a:xfrm>
+          <a:prstGeom prst="rect">
+            <a:avLst/>
+          </a:prstGeom>
+        </p:spPr>
+        <p:txBody>
+          <a:bodyPr anchor="t" rtlCol="false" wrap="none" tIns="0" rIns="0" bIns="0" lIns="0">
+            <a:noAutofit/>
+          </a:bodyPr>
+          <a:lstStyle/>
+          <a:p>
+            <a:pPr algn="l">
+              <a:lnSpc>
+                <a:spcPct val="100000"/>
+              </a:lnSpc>
+              <a:spcBef>
+                <a:spcPct val="0"/>
+              </a:spcBef>
+              <a:spcAft>
+                <a:spcPct val="0"/>
+              </a:spcAft>
+              <a:defRPr/>
+            </a:pPr>
+            <a:r>
+              <a:rPr lang="en-US" sz="1300" b="true" i="false" u="none" strike="noStrike" kern="0">
+                <a:solidFill>
+                  <a:srgbClr val="F7F8FC"/>
+                </a:solidFill>
+                <a:latin typeface="Arial"/>
+              </a:rPr>
+              <a:t>AUTHOR</a:t>
+            </a:r>
+            <a:endParaRPr lang="en-US" sz="1100"/>
+          </a:p>
+        </p:txBody>
+      </p:sp>
+      <p:sp>
+        <p:nvSpPr>
+          <p:cNvPr name="GraphCompose Text Line" id="11"/>
+          <p:cNvSpPr txBox="true"/>
+          <p:nvPr/>
+        </p:nvSpPr>
+        <p:spPr>
+          <a:xfrm>
+            <a:off x="863600" y="2960764"/>
+            <a:ext cx="2074558" cy="129222"/>
+          </a:xfrm>
+          <a:prstGeom prst="rect">
+            <a:avLst/>
+          </a:prstGeom>
+        </p:spPr>
+        <p:txBody>
+          <a:bodyPr anchor="t" rtlCol="false" wrap="none" tIns="0" rIns="0" bIns="0" lIns="0">
+            <a:noAutofit/>
+          </a:bodyPr>
+          <a:lstStyle/>
+          <a:p>
+            <a:pPr algn="l">
+              <a:lnSpc>
+                <a:spcPct val="100000"/>
+              </a:lnSpc>
+              <a:spcBef>
+                <a:spcPct val="0"/>
+              </a:spcBef>
+              <a:spcAft>
+                <a:spcPct val="0"/>
+              </a:spcAft>
+              <a:defRPr/>
+            </a:pPr>
+            <a:r>
+              <a:rPr lang="en-US" sz="1100" b="false" i="false" u="none" strike="noStrike" kern="0">
+                <a:solidFill>
+                  <a:srgbClr val="8C95AF"/>
+                </a:solidFill>
+                <a:latin typeface="Arial"/>
+              </a:rPr>
+              <a:t>A fluent DSL describes intent, not</a:t>
+            </a:r>
+            <a:endParaRPr lang="en-US" sz="1100"/>
+          </a:p>
+        </p:txBody>
+      </p:sp>
+      <p:sp>
+        <p:nvSpPr>
+          <p:cNvPr name="GraphCompose Text Line" id="12"/>
+          <p:cNvSpPr txBox="true"/>
+          <p:nvPr/>
+        </p:nvSpPr>
+        <p:spPr>
+          <a:xfrm>
+            <a:off x="863600" y="3128086"/>
+            <a:ext cx="622376" cy="129222"/>
+          </a:xfrm>
+          <a:prstGeom prst="rect">
+            <a:avLst/>
+          </a:prstGeom>
+        </p:spPr>
+        <p:txBody>
+          <a:bodyPr anchor="t" rtlCol="false" wrap="none" tIns="0" rIns="0" bIns="0" lIns="0">
+            <a:noAutofit/>
+          </a:bodyPr>
+          <a:lstStyle/>
+          <a:p>
+            <a:pPr algn="l">
+              <a:lnSpc>
+                <a:spcPct val="100000"/>
+              </a:lnSpc>
+              <a:spcBef>
+                <a:spcPct val="0"/>
+              </a:spcBef>
+              <a:spcAft>
+                <a:spcPct val="0"/>
+              </a:spcAft>
+              <a:defRPr/>
+            </a:pPr>
+            <a:r>
+              <a:rPr lang="en-US" sz="1100" b="false" i="false" u="none" strike="noStrike" kern="0">
+                <a:solidFill>
+                  <a:srgbClr val="8C95AF"/>
+                </a:solidFill>
+                <a:latin typeface="Arial"/>
+              </a:rPr>
+              <a:t>geometry.</a:t>
+            </a:r>
+            <a:endParaRPr lang="en-US" sz="1100"/>
+          </a:p>
+        </p:txBody>
+      </p:sp>
+      <p:sp>
+        <p:nvSpPr>
+          <p:cNvPr name="AutoShape 13" id="13"/>
+          <p:cNvSpPr/>
+          <p:nvPr/>
+        </p:nvSpPr>
+        <p:spPr>
+          <a:xfrm>
+            <a:off x="3422650" y="2253564"/>
+            <a:ext cx="2584450" cy="1233106"/>
+          </a:xfrm>
+          <a:prstGeom prst="roundRect">
+            <a:avLst>
+              <a:gd name="adj" fmla="val 10299"/>
+            </a:avLst>
+          </a:prstGeom>
+          <a:solidFill>
+            <a:srgbClr val="141A2F"/>
+          </a:solidFill>
+          <a:ln w="12700">
+            <a:solidFill>
+              <a:srgbClr val="303856"/>
+            </a:solidFill>
+          </a:ln>
+        </p:spPr>
+      </p:sp>
+      <p:sp>
+        <p:nvSpPr>
+          <p:cNvPr name="GraphCompose Text Line" id="14"/>
+          <p:cNvSpPr txBox="true"/>
+          <p:nvPr/>
+        </p:nvSpPr>
+        <p:spPr>
+          <a:xfrm>
+            <a:off x="3625850" y="2405070"/>
+            <a:ext cx="153670" cy="199644"/>
+          </a:xfrm>
+          <a:prstGeom prst="rect">
+            <a:avLst/>
+          </a:prstGeom>
+        </p:spPr>
+        <p:txBody>
+          <a:bodyPr anchor="t" rtlCol="false" wrap="none" tIns="0" rIns="0" bIns="0" lIns="0">
+            <a:noAutofit/>
+          </a:bodyPr>
+          <a:lstStyle/>
+          <a:p>
+            <a:pPr algn="l">
+              <a:lnSpc>
+                <a:spcPct val="100000"/>
+              </a:lnSpc>
+              <a:spcBef>
+                <a:spcPct val="0"/>
+              </a:spcBef>
+              <a:spcAft>
+                <a:spcPct val="0"/>
+              </a:spcAft>
+              <a:defRPr/>
+            </a:pPr>
+            <a:r>
+              <a:rPr lang="en-US" sz="2000" b="true" i="false" u="none" strike="noStrike" kern="0">
+                <a:solidFill>
+                  <a:srgbClr val="E9972D"/>
+                </a:solidFill>
+                <a:latin typeface="Courier New"/>
+              </a:rPr>
+              <a:t>2</a:t>
+            </a:r>
+            <a:endParaRPr lang="en-US" sz="1100"/>
+          </a:p>
+        </p:txBody>
+      </p:sp>
+      <p:sp>
+        <p:nvSpPr>
+          <p:cNvPr name="GraphCompose Text Line" id="15"/>
+          <p:cNvSpPr txBox="true"/>
+          <p:nvPr/>
+        </p:nvSpPr>
+        <p:spPr>
+          <a:xfrm>
+            <a:off x="3625850" y="2727089"/>
+            <a:ext cx="826770" cy="152718"/>
+          </a:xfrm>
+          <a:prstGeom prst="rect">
+            <a:avLst/>
+          </a:prstGeom>
+        </p:spPr>
+        <p:txBody>
+          <a:bodyPr anchor="t" rtlCol="false" wrap="none" tIns="0" rIns="0" bIns="0" lIns="0">
+            <a:noAutofit/>
+          </a:bodyPr>
+          <a:lstStyle/>
+          <a:p>
+            <a:pPr algn="l">
+              <a:lnSpc>
+                <a:spcPct val="100000"/>
+              </a:lnSpc>
+              <a:spcBef>
+                <a:spcPct val="0"/>
+              </a:spcBef>
+              <a:spcAft>
+                <a:spcPct val="0"/>
+              </a:spcAft>
+              <a:defRPr/>
+            </a:pPr>
+            <a:r>
+              <a:rPr lang="en-US" sz="1300" b="true" i="false" u="none" strike="noStrike" kern="0">
+                <a:solidFill>
+                  <a:srgbClr val="F7F8FC"/>
+                </a:solidFill>
+                <a:latin typeface="Arial"/>
+              </a:rPr>
+              <a:t>MEASURE</a:t>
+            </a:r>
+            <a:endParaRPr lang="en-US" sz="1100"/>
+          </a:p>
+        </p:txBody>
+      </p:sp>
+      <p:sp>
+        <p:nvSpPr>
+          <p:cNvPr name="GraphCompose Text Line" id="16"/>
+          <p:cNvSpPr txBox="true"/>
+          <p:nvPr/>
+        </p:nvSpPr>
+        <p:spPr>
+          <a:xfrm>
+            <a:off x="3625850" y="2960764"/>
+            <a:ext cx="1763725" cy="129222"/>
+          </a:xfrm>
+          <a:prstGeom prst="rect">
+            <a:avLst/>
+          </a:prstGeom>
+        </p:spPr>
+        <p:txBody>
+          <a:bodyPr anchor="t" rtlCol="false" wrap="none" tIns="0" rIns="0" bIns="0" lIns="0">
+            <a:noAutofit/>
+          </a:bodyPr>
+          <a:lstStyle/>
+          <a:p>
+            <a:pPr algn="l">
+              <a:lnSpc>
+                <a:spcPct val="100000"/>
+              </a:lnSpc>
+              <a:spcBef>
+                <a:spcPct val="0"/>
+              </a:spcBef>
+              <a:spcAft>
+                <a:spcPct val="0"/>
+              </a:spcAft>
+              <a:defRPr/>
+            </a:pPr>
+            <a:r>
+              <a:rPr lang="en-US" sz="1100" b="false" i="false" u="none" strike="noStrike" kern="0">
+                <a:solidFill>
+                  <a:srgbClr val="8C95AF"/>
+                </a:solidFill>
+                <a:latin typeface="Arial"/>
+              </a:rPr>
+              <a:t>Every node measured twice,</a:t>
+            </a:r>
+            <a:endParaRPr lang="en-US" sz="1100"/>
+          </a:p>
+        </p:txBody>
+      </p:sp>
+      <p:sp>
+        <p:nvSpPr>
+          <p:cNvPr name="GraphCompose Text Line" id="17"/>
+          <p:cNvSpPr txBox="true"/>
+          <p:nvPr/>
+        </p:nvSpPr>
+        <p:spPr>
+          <a:xfrm>
+            <a:off x="3625850" y="3128086"/>
+            <a:ext cx="1033653" cy="129222"/>
+          </a:xfrm>
+          <a:prstGeom prst="rect">
+            <a:avLst/>
+          </a:prstGeom>
+        </p:spPr>
+        <p:txBody>
+          <a:bodyPr anchor="t" rtlCol="false" wrap="none" tIns="0" rIns="0" bIns="0" lIns="0">
+            <a:noAutofit/>
+          </a:bodyPr>
+          <a:lstStyle/>
+          <a:p>
+            <a:pPr algn="l">
+              <a:lnSpc>
+                <a:spcPct val="100000"/>
+              </a:lnSpc>
+              <a:spcBef>
+                <a:spcPct val="0"/>
+              </a:spcBef>
+              <a:spcAft>
+                <a:spcPct val="0"/>
+              </a:spcAft>
+              <a:defRPr/>
+            </a:pPr>
+            <a:r>
+              <a:rPr lang="en-US" sz="1100" b="false" i="false" u="none" strike="noStrike" kern="0">
+                <a:solidFill>
+                  <a:srgbClr val="8C95AF"/>
+                </a:solidFill>
+                <a:latin typeface="Arial"/>
+              </a:rPr>
+              <a:t>deterministically.</a:t>
+            </a:r>
+            <a:endParaRPr lang="en-US" sz="1100"/>
+          </a:p>
+        </p:txBody>
+      </p:sp>
+      <p:sp>
+        <p:nvSpPr>
+          <p:cNvPr name="AutoShape 18" id="18"/>
+          <p:cNvSpPr/>
+          <p:nvPr/>
+        </p:nvSpPr>
+        <p:spPr>
+          <a:xfrm>
+            <a:off x="6184900" y="2253564"/>
+            <a:ext cx="2584450" cy="1233106"/>
+          </a:xfrm>
+          <a:prstGeom prst="roundRect">
+            <a:avLst>
+              <a:gd name="adj" fmla="val 10299"/>
+            </a:avLst>
+          </a:prstGeom>
+          <a:solidFill>
+            <a:srgbClr val="141A2F"/>
+          </a:solidFill>
+          <a:ln w="12700">
+            <a:solidFill>
+              <a:srgbClr val="303856"/>
+            </a:solidFill>
+          </a:ln>
+        </p:spPr>
+      </p:sp>
+      <p:sp>
+        <p:nvSpPr>
+          <p:cNvPr name="GraphCompose Text Line" id="19"/>
+          <p:cNvSpPr txBox="true"/>
+          <p:nvPr/>
+        </p:nvSpPr>
+        <p:spPr>
+          <a:xfrm>
+            <a:off x="6388100" y="2405070"/>
+            <a:ext cx="153670" cy="199644"/>
+          </a:xfrm>
+          <a:prstGeom prst="rect">
+            <a:avLst/>
+          </a:prstGeom>
+        </p:spPr>
+        <p:txBody>
+          <a:bodyPr anchor="t" rtlCol="false" wrap="none" tIns="0" rIns="0" bIns="0" lIns="0">
+            <a:noAutofit/>
+          </a:bodyPr>
+          <a:lstStyle/>
+          <a:p>
+            <a:pPr algn="l">
+              <a:lnSpc>
+                <a:spcPct val="100000"/>
+              </a:lnSpc>
+              <a:spcBef>
+                <a:spcPct val="0"/>
+              </a:spcBef>
+              <a:spcAft>
+                <a:spcPct val="0"/>
+              </a:spcAft>
+              <a:defRPr/>
+            </a:pPr>
+            <a:r>
+              <a:rPr lang="en-US" sz="2000" b="true" i="false" u="none" strike="noStrike" kern="0">
+                <a:solidFill>
+                  <a:srgbClr val="E9972D"/>
+                </a:solidFill>
+                <a:latin typeface="Courier New"/>
+              </a:rPr>
+              <a:t>3</a:t>
+            </a:r>
+            <a:endParaRPr lang="en-US" sz="1100"/>
+          </a:p>
+        </p:txBody>
+      </p:sp>
+      <p:sp>
+        <p:nvSpPr>
+          <p:cNvPr name="GraphCompose Text Line" id="20"/>
+          <p:cNvSpPr txBox="true"/>
+          <p:nvPr/>
+        </p:nvSpPr>
+        <p:spPr>
+          <a:xfrm>
+            <a:off x="6388100" y="2727089"/>
+            <a:ext cx="854342" cy="152718"/>
+          </a:xfrm>
+          <a:prstGeom prst="rect">
+            <a:avLst/>
+          </a:prstGeom>
+        </p:spPr>
+        <p:txBody>
+          <a:bodyPr anchor="t" rtlCol="false" wrap="none" tIns="0" rIns="0" bIns="0" lIns="0">
+            <a:noAutofit/>
+          </a:bodyPr>
+          <a:lstStyle/>
+          <a:p>
+            <a:pPr algn="l">
+              <a:lnSpc>
+                <a:spcPct val="100000"/>
+              </a:lnSpc>
+              <a:spcBef>
+                <a:spcPct val="0"/>
+              </a:spcBef>
+              <a:spcAft>
+                <a:spcPct val="0"/>
+              </a:spcAft>
+              <a:defRPr/>
+            </a:pPr>
+            <a:r>
+              <a:rPr lang="en-US" sz="1300" b="true" i="false" u="none" strike="noStrike" kern="0">
+                <a:solidFill>
+                  <a:srgbClr val="F7F8FC"/>
+                </a:solidFill>
+                <a:latin typeface="Arial"/>
+              </a:rPr>
+              <a:t>PAGINATE</a:t>
+            </a:r>
+            <a:endParaRPr lang="en-US" sz="1100"/>
+          </a:p>
+        </p:txBody>
+      </p:sp>
+      <p:sp>
+        <p:nvSpPr>
+          <p:cNvPr name="GraphCompose Text Line" id="21"/>
+          <p:cNvSpPr txBox="true"/>
+          <p:nvPr/>
+        </p:nvSpPr>
+        <p:spPr>
+          <a:xfrm>
+            <a:off x="6388100" y="2960764"/>
+            <a:ext cx="2019795" cy="129222"/>
+          </a:xfrm>
+          <a:prstGeom prst="rect">
+            <a:avLst/>
+          </a:prstGeom>
+        </p:spPr>
+        <p:txBody>
+          <a:bodyPr anchor="t" rtlCol="false" wrap="none" tIns="0" rIns="0" bIns="0" lIns="0">
+            <a:noAutofit/>
+          </a:bodyPr>
+          <a:lstStyle/>
+          <a:p>
+            <a:pPr algn="l">
+              <a:lnSpc>
+                <a:spcPct val="100000"/>
+              </a:lnSpc>
+              <a:spcBef>
+                <a:spcPct val="0"/>
+              </a:spcBef>
+              <a:spcAft>
+                <a:spcPct val="0"/>
+              </a:spcAft>
+              <a:defRPr/>
+            </a:pPr>
+            <a:r>
+              <a:rPr lang="en-US" sz="1100" b="false" i="false" u="none" strike="noStrike" kern="0">
+                <a:solidFill>
+                  <a:srgbClr val="8C95AF"/>
+                </a:solidFill>
+                <a:latin typeface="Arial"/>
+              </a:rPr>
+              <a:t>The flow splits across pages row</a:t>
+            </a:r>
+            <a:endParaRPr lang="en-US" sz="1100"/>
+          </a:p>
+        </p:txBody>
+      </p:sp>
+      <p:sp>
+        <p:nvSpPr>
+          <p:cNvPr name="GraphCompose Text Line" id="22"/>
+          <p:cNvSpPr txBox="true"/>
+          <p:nvPr/>
+        </p:nvSpPr>
+        <p:spPr>
+          <a:xfrm>
+            <a:off x="6388100" y="3128086"/>
+            <a:ext cx="451523" cy="129222"/>
+          </a:xfrm>
+          <a:prstGeom prst="rect">
+            <a:avLst/>
+          </a:prstGeom>
+        </p:spPr>
+        <p:txBody>
+          <a:bodyPr anchor="t" rtlCol="false" wrap="none" tIns="0" rIns="0" bIns="0" lIns="0">
+            <a:noAutofit/>
+          </a:bodyPr>
+          <a:lstStyle/>
+          <a:p>
+            <a:pPr algn="l">
+              <a:lnSpc>
+                <a:spcPct val="100000"/>
+              </a:lnSpc>
+              <a:spcBef>
+                <a:spcPct val="0"/>
+              </a:spcBef>
+              <a:spcAft>
+                <a:spcPct val="0"/>
+              </a:spcAft>
+              <a:defRPr/>
+            </a:pPr>
+            <a:r>
+              <a:rPr lang="en-US" sz="1100" b="false" i="false" u="none" strike="noStrike" kern="0">
+                <a:solidFill>
+                  <a:srgbClr val="8C95AF"/>
+                </a:solidFill>
+                <a:latin typeface="Arial"/>
+              </a:rPr>
+              <a:t>by row.</a:t>
+            </a:r>
+            <a:endParaRPr lang="en-US" sz="1100"/>
+          </a:p>
+        </p:txBody>
+      </p:sp>
+      <p:sp>
+        <p:nvSpPr>
+          <p:cNvPr name="AutoShape 23" id="23"/>
+          <p:cNvSpPr/>
+          <p:nvPr/>
+        </p:nvSpPr>
+        <p:spPr>
+          <a:xfrm>
+            <a:off x="8947150" y="2253564"/>
+            <a:ext cx="2584450" cy="1233106"/>
+          </a:xfrm>
+          <a:prstGeom prst="roundRect">
+            <a:avLst>
+              <a:gd name="adj" fmla="val 10299"/>
+            </a:avLst>
+          </a:prstGeom>
+          <a:solidFill>
+            <a:srgbClr val="141A2F"/>
+          </a:solidFill>
+          <a:ln w="12700">
+            <a:solidFill>
+              <a:srgbClr val="303856"/>
+            </a:solidFill>
+          </a:ln>
+        </p:spPr>
+      </p:sp>
+      <p:sp>
+        <p:nvSpPr>
+          <p:cNvPr name="GraphCompose Text Line" id="24"/>
+          <p:cNvSpPr txBox="true"/>
+          <p:nvPr/>
+        </p:nvSpPr>
+        <p:spPr>
+          <a:xfrm>
+            <a:off x="9150350" y="2405070"/>
+            <a:ext cx="153670" cy="199644"/>
+          </a:xfrm>
+          <a:prstGeom prst="rect">
+            <a:avLst/>
+          </a:prstGeom>
+        </p:spPr>
+        <p:txBody>
+          <a:bodyPr anchor="t" rtlCol="false" wrap="none" tIns="0" rIns="0" bIns="0" lIns="0">
+            <a:noAutofit/>
+          </a:bodyPr>
+          <a:lstStyle/>
+          <a:p>
+            <a:pPr algn="l">
+              <a:lnSpc>
+                <a:spcPct val="100000"/>
+              </a:lnSpc>
+              <a:spcBef>
+                <a:spcPct val="0"/>
+              </a:spcBef>
+              <a:spcAft>
+                <a:spcPct val="0"/>
+              </a:spcAft>
+              <a:defRPr/>
+            </a:pPr>
+            <a:r>
+              <a:rPr lang="en-US" sz="2000" b="true" i="false" u="none" strike="noStrike" kern="0">
+                <a:solidFill>
+                  <a:srgbClr val="E9972D"/>
+                </a:solidFill>
+                <a:latin typeface="Courier New"/>
+              </a:rPr>
+              <a:t>4</a:t>
+            </a:r>
+            <a:endParaRPr lang="en-US" sz="1100"/>
+          </a:p>
+        </p:txBody>
+      </p:sp>
+      <p:sp>
+        <p:nvSpPr>
+          <p:cNvPr name="GraphCompose Text Line" id="25"/>
+          <p:cNvSpPr txBox="true"/>
+          <p:nvPr/>
+        </p:nvSpPr>
+        <p:spPr>
+          <a:xfrm>
+            <a:off x="9150350" y="2727089"/>
+            <a:ext cx="698322" cy="152718"/>
+          </a:xfrm>
+          <a:prstGeom prst="rect">
+            <a:avLst/>
+          </a:prstGeom>
+        </p:spPr>
+        <p:txBody>
+          <a:bodyPr anchor="t" rtlCol="false" wrap="none" tIns="0" rIns="0" bIns="0" lIns="0">
+            <a:noAutofit/>
+          </a:bodyPr>
+          <a:lstStyle/>
+          <a:p>
+            <a:pPr algn="l">
+              <a:lnSpc>
+                <a:spcPct val="100000"/>
+              </a:lnSpc>
+              <a:spcBef>
+                <a:spcPct val="0"/>
+              </a:spcBef>
+              <a:spcAft>
+                <a:spcPct val="0"/>
+              </a:spcAft>
+              <a:defRPr/>
+            </a:pPr>
+            <a:r>
+              <a:rPr lang="en-US" sz="1300" b="true" i="false" u="none" strike="noStrike" kern="0">
+                <a:solidFill>
+                  <a:srgbClr val="F7F8FC"/>
+                </a:solidFill>
+                <a:latin typeface="Arial"/>
+              </a:rPr>
+              <a:t>RENDER</a:t>
+            </a:r>
+            <a:endParaRPr lang="en-US" sz="1100"/>
+          </a:p>
+        </p:txBody>
+      </p:sp>
+      <p:sp>
+        <p:nvSpPr>
+          <p:cNvPr name="GraphCompose Text Line" id="26"/>
+          <p:cNvSpPr txBox="true"/>
+          <p:nvPr/>
+        </p:nvSpPr>
+        <p:spPr>
+          <a:xfrm>
+            <a:off x="9150350" y="2960764"/>
+            <a:ext cx="2167458" cy="129222"/>
+          </a:xfrm>
+          <a:prstGeom prst="rect">
+            <a:avLst/>
+          </a:prstGeom>
+        </p:spPr>
+        <p:txBody>
+          <a:bodyPr anchor="t" rtlCol="false" wrap="none" tIns="0" rIns="0" bIns="0" lIns="0">
+            <a:noAutofit/>
+          </a:bodyPr>
+          <a:lstStyle/>
+          <a:p>
+            <a:pPr algn="l">
+              <a:lnSpc>
+                <a:spcPct val="100000"/>
+              </a:lnSpc>
+              <a:spcBef>
+                <a:spcPct val="0"/>
+              </a:spcBef>
+              <a:spcAft>
+                <a:spcPct val="0"/>
+              </a:spcAft>
+              <a:defRPr/>
+            </a:pPr>
+            <a:r>
+              <a:rPr lang="en-US" sz="1100" b="false" i="false" u="none" strike="noStrike" kern="0">
+                <a:solidFill>
+                  <a:srgbClr val="8C95AF"/>
+                </a:solidFill>
+                <a:latin typeface="Arial"/>
+              </a:rPr>
+              <a:t>A backend writes the bytes — PDF</a:t>
+            </a:r>
+            <a:endParaRPr lang="en-US" sz="1100"/>
+          </a:p>
+        </p:txBody>
+      </p:sp>
+      <p:sp>
+        <p:nvSpPr>
+          <p:cNvPr name="GraphCompose Text Line" id="27"/>
+          <p:cNvSpPr txBox="true"/>
+          <p:nvPr/>
+        </p:nvSpPr>
+        <p:spPr>
+          <a:xfrm>
+            <a:off x="9150350" y="3128086"/>
+            <a:ext cx="568033" cy="129222"/>
+          </a:xfrm>
+          <a:prstGeom prst="rect">
+            <a:avLst/>
+          </a:prstGeom>
+        </p:spPr>
+        <p:txBody>
+          <a:bodyPr anchor="t" rtlCol="false" wrap="none" tIns="0" rIns="0" bIns="0" lIns="0">
+            <a:noAutofit/>
+          </a:bodyPr>
+          <a:lstStyle/>
+          <a:p>
+            <a:pPr algn="l">
+              <a:lnSpc>
+                <a:spcPct val="100000"/>
+              </a:lnSpc>
+              <a:spcBef>
+                <a:spcPct val="0"/>
+              </a:spcBef>
+              <a:spcAft>
+                <a:spcPct val="0"/>
+              </a:spcAft>
+              <a:defRPr/>
+            </a:pPr>
+            <a:r>
+              <a:rPr lang="en-US" sz="1100" b="false" i="false" u="none" strike="noStrike" kern="0">
+                <a:solidFill>
+                  <a:srgbClr val="8C95AF"/>
+                </a:solidFill>
+                <a:latin typeface="Arial"/>
+              </a:rPr>
+              <a:t>or PPTX.</a:t>
+            </a:r>
+            <a:endParaRPr lang="en-US" sz="1100"/>
+          </a:p>
+        </p:txBody>
+      </p:sp>
+      <p:sp>
+        <p:nvSpPr>
+          <p:cNvPr name="AutoShape 28" id="28"/>
+          <p:cNvSpPr/>
+          <p:nvPr/>
+        </p:nvSpPr>
+        <p:spPr>
+          <a:xfrm>
+            <a:off x="660400" y="3766071"/>
+            <a:ext cx="3505200" cy="944563"/>
+          </a:xfrm>
+          <a:prstGeom prst="roundRect">
+            <a:avLst>
+              <a:gd name="adj" fmla="val 13445"/>
+            </a:avLst>
+          </a:prstGeom>
+          <a:solidFill>
+            <a:srgbClr val="192038"/>
+          </a:solidFill>
+          <a:ln>
+            <a:noFill/>
+          </a:ln>
+        </p:spPr>
+      </p:sp>
+      <p:cxnSp>
+        <p:nvCxnSpPr>
+          <p:cNvPr name="Connector 29" id="29"/>
+          <p:cNvCxnSpPr/>
+          <p:nvPr/>
+        </p:nvCxnSpPr>
+        <p:spPr>
+          <a:xfrm>
+            <a:off x="660400" y="3766071"/>
+            <a:ext cx="3505200" cy="0"/>
+          </a:xfrm>
+          <a:prstGeom prst="line">
+            <a:avLst/>
+          </a:prstGeom>
+          <a:ln w="38100">
+            <a:solidFill>
+              <a:srgbClr val="E9972D"/>
+            </a:solidFill>
+          </a:ln>
+        </p:spPr>
+      </p:cxnSp>
+      <p:sp>
+        <p:nvSpPr>
+          <p:cNvPr name="GraphCompose Text Line" id="30"/>
+          <p:cNvSpPr txBox="true"/>
+          <p:nvPr/>
+        </p:nvSpPr>
+        <p:spPr>
+          <a:xfrm>
+            <a:off x="863600" y="3938352"/>
+            <a:ext cx="1047178" cy="152718"/>
+          </a:xfrm>
+          <a:prstGeom prst="rect">
+            <a:avLst/>
+          </a:prstGeom>
+        </p:spPr>
+        <p:txBody>
+          <a:bodyPr anchor="t" rtlCol="false" wrap="none" tIns="0" rIns="0" bIns="0" lIns="0">
+            <a:noAutofit/>
+          </a:bodyPr>
+          <a:lstStyle/>
+          <a:p>
+            <a:pPr algn="l">
+              <a:lnSpc>
+                <a:spcPct val="100000"/>
+              </a:lnSpc>
+              <a:spcBef>
+                <a:spcPct val="0"/>
+              </a:spcBef>
+              <a:spcAft>
+                <a:spcPct val="0"/>
+              </a:spcAft>
+              <a:defRPr/>
+            </a:pPr>
+            <a:r>
+              <a:rPr lang="en-US" sz="1300" b="true" i="false" u="none" strike="noStrike" kern="0">
+                <a:solidFill>
+                  <a:srgbClr val="F7F8FC"/>
+                </a:solidFill>
+                <a:latin typeface="Arial"/>
+              </a:rPr>
+              <a:t>Deterministic</a:t>
+            </a:r>
+            <a:endParaRPr lang="en-US" sz="1100"/>
+          </a:p>
+        </p:txBody>
+      </p:sp>
+      <p:sp>
+        <p:nvSpPr>
+          <p:cNvPr name="GraphCompose Text Line" id="31"/>
+          <p:cNvSpPr txBox="true"/>
+          <p:nvPr/>
+        </p:nvSpPr>
+        <p:spPr>
+          <a:xfrm>
+            <a:off x="863600" y="4184726"/>
+            <a:ext cx="3037230" cy="129222"/>
+          </a:xfrm>
+          <a:prstGeom prst="rect">
+            <a:avLst/>
+          </a:prstGeom>
+        </p:spPr>
+        <p:txBody>
+          <a:bodyPr anchor="t" rtlCol="false" wrap="none" tIns="0" rIns="0" bIns="0" lIns="0">
+            <a:noAutofit/>
+          </a:bodyPr>
+          <a:lstStyle/>
+          <a:p>
+            <a:pPr algn="l">
+              <a:lnSpc>
+                <a:spcPct val="100000"/>
+              </a:lnSpc>
+              <a:spcBef>
+                <a:spcPct val="0"/>
+              </a:spcBef>
+              <a:spcAft>
+                <a:spcPct val="0"/>
+              </a:spcAft>
+              <a:defRPr/>
+            </a:pPr>
+            <a:r>
+              <a:rPr lang="en-US" sz="1100" b="false" i="false" u="none" strike="noStrike" kern="0">
+                <a:solidFill>
+                  <a:srgbClr val="8C95AF"/>
+                </a:solidFill>
+                <a:latin typeface="Arial"/>
+              </a:rPr>
+              <a:t>The same input renders the same bytes on every</a:t>
+            </a:r>
+            <a:endParaRPr lang="en-US" sz="1100"/>
+          </a:p>
+        </p:txBody>
+      </p:sp>
+      <p:sp>
+        <p:nvSpPr>
+          <p:cNvPr name="GraphCompose Text Line" id="32"/>
+          <p:cNvSpPr txBox="true"/>
+          <p:nvPr/>
+        </p:nvSpPr>
+        <p:spPr>
+          <a:xfrm>
+            <a:off x="863600" y="4352049"/>
+            <a:ext cx="2951874" cy="129222"/>
+          </a:xfrm>
+          <a:prstGeom prst="rect">
+            <a:avLst/>
+          </a:prstGeom>
+        </p:spPr>
+        <p:txBody>
+          <a:bodyPr anchor="t" rtlCol="false" wrap="none" tIns="0" rIns="0" bIns="0" lIns="0">
+            <a:noAutofit/>
+          </a:bodyPr>
+          <a:lstStyle/>
+          <a:p>
+            <a:pPr algn="l">
+              <a:lnSpc>
+                <a:spcPct val="100000"/>
+              </a:lnSpc>
+              <a:spcBef>
+                <a:spcPct val="0"/>
+              </a:spcBef>
+              <a:spcAft>
+                <a:spcPct val="0"/>
+              </a:spcAft>
+              <a:defRPr/>
+            </a:pPr>
+            <a:r>
+              <a:rPr lang="en-US" sz="1100" b="false" i="false" u="none" strike="noStrike" kern="0">
+                <a:solidFill>
+                  <a:srgbClr val="8C95AF"/>
+                </a:solidFill>
+                <a:latin typeface="Arial"/>
+              </a:rPr>
+              <a:t>machine. Layout is reproducible, not best-effort.</a:t>
+            </a:r>
+            <a:endParaRPr lang="en-US" sz="1100"/>
+          </a:p>
+        </p:txBody>
+      </p:sp>
+      <p:sp>
+        <p:nvSpPr>
+          <p:cNvPr name="AutoShape 33" id="33"/>
+          <p:cNvSpPr/>
+          <p:nvPr/>
+        </p:nvSpPr>
+        <p:spPr>
+          <a:xfrm>
+            <a:off x="4343400" y="3766071"/>
+            <a:ext cx="3505200" cy="1111885"/>
+          </a:xfrm>
+          <a:prstGeom prst="roundRect">
+            <a:avLst>
+              <a:gd name="adj" fmla="val 11422"/>
+            </a:avLst>
+          </a:prstGeom>
+          <a:solidFill>
+            <a:srgbClr val="192038"/>
+          </a:solidFill>
+          <a:ln>
+            <a:noFill/>
+          </a:ln>
+        </p:spPr>
+      </p:sp>
+      <p:cxnSp>
+        <p:nvCxnSpPr>
+          <p:cNvPr name="Connector 34" id="34"/>
+          <p:cNvCxnSpPr/>
+          <p:nvPr/>
+        </p:nvCxnSpPr>
+        <p:spPr>
+          <a:xfrm>
+            <a:off x="4343400" y="3766071"/>
+            <a:ext cx="3505200" cy="0"/>
+          </a:xfrm>
+          <a:prstGeom prst="line">
+            <a:avLst/>
+          </a:prstGeom>
+          <a:ln w="38100">
+            <a:solidFill>
+              <a:srgbClr val="E9972D"/>
+            </a:solidFill>
+          </a:ln>
+        </p:spPr>
+      </p:cxnSp>
+      <p:sp>
+        <p:nvSpPr>
+          <p:cNvPr name="GraphCompose Text Line" id="35"/>
+          <p:cNvSpPr txBox="true"/>
+          <p:nvPr/>
+        </p:nvSpPr>
+        <p:spPr>
+          <a:xfrm>
+            <a:off x="4546600" y="3938352"/>
+            <a:ext cx="1441602" cy="152718"/>
+          </a:xfrm>
+          <a:prstGeom prst="rect">
+            <a:avLst/>
+          </a:prstGeom>
+        </p:spPr>
+        <p:txBody>
+          <a:bodyPr anchor="t" rtlCol="false" wrap="none" tIns="0" rIns="0" bIns="0" lIns="0">
+            <a:noAutofit/>
+          </a:bodyPr>
+          <a:lstStyle/>
+          <a:p>
+            <a:pPr algn="l">
+              <a:lnSpc>
+                <a:spcPct val="100000"/>
+              </a:lnSpc>
+              <a:spcBef>
+                <a:spcPct val="0"/>
+              </a:spcBef>
+              <a:spcAft>
+                <a:spcPct val="0"/>
+              </a:spcAft>
+              <a:defRPr/>
+            </a:pPr>
+            <a:r>
+              <a:rPr lang="en-US" sz="1300" b="true" i="false" u="none" strike="noStrike" kern="0">
+                <a:solidFill>
+                  <a:srgbClr val="F7F8FC"/>
+                </a:solidFill>
+                <a:latin typeface="Arial"/>
+              </a:rPr>
+              <a:t>Regression-tested</a:t>
+            </a:r>
+            <a:endParaRPr lang="en-US" sz="1100"/>
+          </a:p>
+        </p:txBody>
+      </p:sp>
+      <p:sp>
+        <p:nvSpPr>
+          <p:cNvPr name="GraphCompose Text Line" id="36"/>
+          <p:cNvSpPr txBox="true"/>
+          <p:nvPr/>
+        </p:nvSpPr>
+        <p:spPr>
+          <a:xfrm>
+            <a:off x="4546600" y="4184726"/>
+            <a:ext cx="3091574" cy="129222"/>
+          </a:xfrm>
+          <a:prstGeom prst="rect">
+            <a:avLst/>
+          </a:prstGeom>
+        </p:spPr>
+        <p:txBody>
+          <a:bodyPr anchor="t" rtlCol="false" wrap="none" tIns="0" rIns="0" bIns="0" lIns="0">
+            <a:noAutofit/>
+          </a:bodyPr>
+          <a:lstStyle/>
+          <a:p>
+            <a:pPr algn="l">
+              <a:lnSpc>
+                <a:spcPct val="100000"/>
+              </a:lnSpc>
+              <a:spcBef>
+                <a:spcPct val="0"/>
+              </a:spcBef>
+              <a:spcAft>
+                <a:spcPct val="0"/>
+              </a:spcAft>
+              <a:defRPr/>
+            </a:pPr>
+            <a:r>
+              <a:rPr lang="en-US" sz="1100" b="false" i="false" u="none" strike="noStrike" kern="0">
+                <a:solidFill>
+                  <a:srgbClr val="8C95AF"/>
+                </a:solidFill>
+                <a:latin typeface="Arial"/>
+              </a:rPr>
+              <a:t>layoutSnapshot() captures the resolved geometry,</a:t>
+            </a:r>
+            <a:endParaRPr lang="en-US" sz="1100"/>
+          </a:p>
+        </p:txBody>
+      </p:sp>
+      <p:sp>
+        <p:nvSpPr>
+          <p:cNvPr name="GraphCompose Text Line" id="37"/>
+          <p:cNvSpPr txBox="true"/>
+          <p:nvPr/>
+        </p:nvSpPr>
+        <p:spPr>
+          <a:xfrm>
+            <a:off x="4546600" y="4352049"/>
+            <a:ext cx="3091853" cy="129222"/>
+          </a:xfrm>
+          <a:prstGeom prst="rect">
+            <a:avLst/>
+          </a:prstGeom>
+        </p:spPr>
+        <p:txBody>
+          <a:bodyPr anchor="t" rtlCol="false" wrap="none" tIns="0" rIns="0" bIns="0" lIns="0">
+            <a:noAutofit/>
+          </a:bodyPr>
+          <a:lstStyle/>
+          <a:p>
+            <a:pPr algn="l">
+              <a:lnSpc>
+                <a:spcPct val="100000"/>
+              </a:lnSpc>
+              <a:spcBef>
+                <a:spcPct val="0"/>
+              </a:spcBef>
+              <a:spcAft>
+                <a:spcPct val="0"/>
+              </a:spcAft>
+              <a:defRPr/>
+            </a:pPr>
+            <a:r>
+              <a:rPr lang="en-US" sz="1100" b="false" i="false" u="none" strike="noStrike" kern="0">
+                <a:solidFill>
+                  <a:srgbClr val="8C95AF"/>
+                </a:solidFill>
+                <a:latin typeface="Arial"/>
+              </a:rPr>
+              <a:t>so a layout change fails a test instead of surfacing</a:t>
+            </a:r>
+            <a:endParaRPr lang="en-US" sz="1100"/>
+          </a:p>
+        </p:txBody>
+      </p:sp>
+      <p:sp>
+        <p:nvSpPr>
+          <p:cNvPr name="GraphCompose Text Line" id="38"/>
+          <p:cNvSpPr txBox="true"/>
+          <p:nvPr/>
+        </p:nvSpPr>
+        <p:spPr>
+          <a:xfrm>
+            <a:off x="4546600" y="4519371"/>
+            <a:ext cx="762216" cy="129222"/>
+          </a:xfrm>
+          <a:prstGeom prst="rect">
+            <a:avLst/>
+          </a:prstGeom>
+        </p:spPr>
+        <p:txBody>
+          <a:bodyPr anchor="t" rtlCol="false" wrap="none" tIns="0" rIns="0" bIns="0" lIns="0">
+            <a:noAutofit/>
+          </a:bodyPr>
+          <a:lstStyle/>
+          <a:p>
+            <a:pPr algn="l">
+              <a:lnSpc>
+                <a:spcPct val="100000"/>
+              </a:lnSpc>
+              <a:spcBef>
+                <a:spcPct val="0"/>
+              </a:spcBef>
+              <a:spcAft>
+                <a:spcPct val="0"/>
+              </a:spcAft>
+              <a:defRPr/>
+            </a:pPr>
+            <a:r>
+              <a:rPr lang="en-US" sz="1100" b="false" i="false" u="none" strike="noStrike" kern="0">
+                <a:solidFill>
+                  <a:srgbClr val="8C95AF"/>
+                </a:solidFill>
+                <a:latin typeface="Arial"/>
+              </a:rPr>
+              <a:t>in a release.</a:t>
+            </a:r>
+            <a:endParaRPr lang="en-US" sz="1100"/>
+          </a:p>
+        </p:txBody>
+      </p:sp>
+      <p:sp>
+        <p:nvSpPr>
+          <p:cNvPr name="AutoShape 39" id="39"/>
+          <p:cNvSpPr/>
+          <p:nvPr/>
+        </p:nvSpPr>
+        <p:spPr>
+          <a:xfrm>
+            <a:off x="8026400" y="3766071"/>
+            <a:ext cx="3505200" cy="1111885"/>
+          </a:xfrm>
+          <a:prstGeom prst="roundRect">
+            <a:avLst>
+              <a:gd name="adj" fmla="val 11422"/>
+            </a:avLst>
+          </a:prstGeom>
+          <a:solidFill>
+            <a:srgbClr val="192038"/>
+          </a:solidFill>
+          <a:ln>
+            <a:noFill/>
+          </a:ln>
+        </p:spPr>
+      </p:sp>
+      <p:cxnSp>
+        <p:nvCxnSpPr>
+          <p:cNvPr name="Connector 40" id="40"/>
+          <p:cNvCxnSpPr/>
+          <p:nvPr/>
+        </p:nvCxnSpPr>
+        <p:spPr>
+          <a:xfrm>
+            <a:off x="8026400" y="3766071"/>
+            <a:ext cx="3505200" cy="0"/>
+          </a:xfrm>
+          <a:prstGeom prst="line">
+            <a:avLst/>
+          </a:prstGeom>
+          <a:ln w="38100">
+            <a:solidFill>
+              <a:srgbClr val="E9972D"/>
+            </a:solidFill>
+          </a:ln>
+        </p:spPr>
+      </p:cxnSp>
+      <p:sp>
+        <p:nvSpPr>
+          <p:cNvPr name="GraphCompose Text Line" id="41"/>
+          <p:cNvSpPr txBox="true"/>
+          <p:nvPr/>
+        </p:nvSpPr>
+        <p:spPr>
+          <a:xfrm>
+            <a:off x="8229600" y="3938352"/>
+            <a:ext cx="1881924" cy="152718"/>
+          </a:xfrm>
+          <a:prstGeom prst="rect">
+            <a:avLst/>
+          </a:prstGeom>
+        </p:spPr>
+        <p:txBody>
+          <a:bodyPr anchor="t" rtlCol="false" wrap="none" tIns="0" rIns="0" bIns="0" lIns="0">
+            <a:noAutofit/>
+          </a:bodyPr>
+          <a:lstStyle/>
+          <a:p>
+            <a:pPr algn="l">
+              <a:lnSpc>
+                <a:spcPct val="100000"/>
+              </a:lnSpc>
+              <a:spcBef>
+                <a:spcPct val="0"/>
+              </a:spcBef>
+              <a:spcAft>
+                <a:spcPct val="0"/>
+              </a:spcAft>
+              <a:defRPr/>
+            </a:pPr>
+            <a:r>
+              <a:rPr lang="en-US" sz="1300" b="true" i="false" u="none" strike="noStrike" kern="0">
+                <a:solidFill>
+                  <a:srgbClr val="F7F8FC"/>
+                </a:solidFill>
+                <a:latin typeface="Arial"/>
+              </a:rPr>
+              <a:t>One model, two formats</a:t>
+            </a:r>
+            <a:endParaRPr lang="en-US" sz="1100"/>
+          </a:p>
+        </p:txBody>
+      </p:sp>
+      <p:sp>
+        <p:nvSpPr>
+          <p:cNvPr name="GraphCompose Text Line" id="42"/>
+          <p:cNvSpPr txBox="true"/>
+          <p:nvPr/>
+        </p:nvSpPr>
+        <p:spPr>
+          <a:xfrm>
+            <a:off x="8229600" y="4184726"/>
+            <a:ext cx="2819578" cy="129222"/>
+          </a:xfrm>
+          <a:prstGeom prst="rect">
+            <a:avLst/>
+          </a:prstGeom>
+        </p:spPr>
+        <p:txBody>
+          <a:bodyPr anchor="t" rtlCol="false" wrap="none" tIns="0" rIns="0" bIns="0" lIns="0">
+            <a:noAutofit/>
+          </a:bodyPr>
+          <a:lstStyle/>
+          <a:p>
+            <a:pPr algn="l">
+              <a:lnSpc>
+                <a:spcPct val="100000"/>
+              </a:lnSpc>
+              <a:spcBef>
+                <a:spcPct val="0"/>
+              </a:spcBef>
+              <a:spcAft>
+                <a:spcPct val="0"/>
+              </a:spcAft>
+              <a:defRPr/>
+            </a:pPr>
+            <a:r>
+              <a:rPr lang="en-US" sz="1100" b="false" i="false" u="none" strike="noStrike" kern="0">
+                <a:solidFill>
+                  <a:srgbClr val="8C95AF"/>
+                </a:solidFill>
+                <a:latin typeface="Arial"/>
+              </a:rPr>
+              <a:t>The same composition emits this PDF and an</a:t>
+            </a:r>
+            <a:endParaRPr lang="en-US" sz="1100"/>
+          </a:p>
+        </p:txBody>
+      </p:sp>
+      <p:sp>
+        <p:nvSpPr>
+          <p:cNvPr name="GraphCompose Text Line" id="43"/>
+          <p:cNvSpPr txBox="true"/>
+          <p:nvPr/>
+        </p:nvSpPr>
+        <p:spPr>
+          <a:xfrm>
+            <a:off x="8229600" y="4352049"/>
+            <a:ext cx="2998534" cy="129222"/>
+          </a:xfrm>
+          <a:prstGeom prst="rect">
+            <a:avLst/>
+          </a:prstGeom>
+        </p:spPr>
+        <p:txBody>
+          <a:bodyPr anchor="t" rtlCol="false" wrap="none" tIns="0" rIns="0" bIns="0" lIns="0">
+            <a:noAutofit/>
+          </a:bodyPr>
+          <a:lstStyle/>
+          <a:p>
+            <a:pPr algn="l">
+              <a:lnSpc>
+                <a:spcPct val="100000"/>
+              </a:lnSpc>
+              <a:spcBef>
+                <a:spcPct val="0"/>
+              </a:spcBef>
+              <a:spcAft>
+                <a:spcPct val="0"/>
+              </a:spcAft>
+              <a:defRPr/>
+            </a:pPr>
+            <a:r>
+              <a:rPr lang="en-US" sz="1100" b="false" i="false" u="none" strike="noStrike" kern="0">
+                <a:solidFill>
+                  <a:srgbClr val="8C95AF"/>
+                </a:solidFill>
+                <a:latin typeface="Arial"/>
+              </a:rPr>
+              <a:t>editable PPTX. Nothing is authored twice, so the</a:t>
+            </a:r>
+            <a:endParaRPr lang="en-US" sz="1100"/>
+          </a:p>
+        </p:txBody>
+      </p:sp>
+      <p:sp>
+        <p:nvSpPr>
+          <p:cNvPr name="GraphCompose Text Line" id="44"/>
+          <p:cNvSpPr txBox="true"/>
+          <p:nvPr/>
+        </p:nvSpPr>
+        <p:spPr>
+          <a:xfrm>
+            <a:off x="8229600" y="4519371"/>
+            <a:ext cx="987412" cy="129222"/>
+          </a:xfrm>
+          <a:prstGeom prst="rect">
+            <a:avLst/>
+          </a:prstGeom>
+        </p:spPr>
+        <p:txBody>
+          <a:bodyPr anchor="t" rtlCol="false" wrap="none" tIns="0" rIns="0" bIns="0" lIns="0">
+            <a:noAutofit/>
+          </a:bodyPr>
+          <a:lstStyle/>
+          <a:p>
+            <a:pPr algn="l">
+              <a:lnSpc>
+                <a:spcPct val="100000"/>
+              </a:lnSpc>
+              <a:spcBef>
+                <a:spcPct val="0"/>
+              </a:spcBef>
+              <a:spcAft>
+                <a:spcPct val="0"/>
+              </a:spcAft>
+              <a:defRPr/>
+            </a:pPr>
+            <a:r>
+              <a:rPr lang="en-US" sz="1100" b="false" i="false" u="none" strike="noStrike" kern="0">
+                <a:solidFill>
+                  <a:srgbClr val="8C95AF"/>
+                </a:solidFill>
+                <a:latin typeface="Arial"/>
+              </a:rPr>
+              <a:t>two cannot drift.</a:t>
+            </a:r>
+            <a:endParaRPr lang="en-US" sz="1100"/>
+          </a:p>
+        </p:txBody>
+      </p:sp>
+    </p:spTree>
+  </p:cSld>
+  <p:clrMapOvr>
+    <a:masterClrMapping/>
+  </p:clrMapOvr>
+</p:sld>
+</file>
+
+<file path=ppt/slides/slide3.xml><?xml version="1.0" encoding="utf-8"?>
+<p:sld xmlns:p="http://schemas.openxmlformats.org/presentationml/2006/main" xmlns:a="http://schemas.openxmlformats.org/drawingml/2006/main">
+  <p:cSld>
+    <p:spTree>
+      <p:nvGrpSpPr>
+        <p:cNvPr id="1" name=""/>
+        <p:cNvGrpSpPr/>
+        <p:nvPr/>
+      </p:nvGrpSpPr>
+      <p:grpSpPr>
+        <a:xfrm>
+          <a:off x="0" y="0"/>
+          <a:ext cx="0" cy="0"/>
+          <a:chOff x="0" y="0"/>
+          <a:chExt cx="0" cy="0"/>
+        </a:xfrm>
+      </p:grpSpPr>
+      <p:sp>
+        <p:nvSpPr>
+          <p:cNvPr name="AutoShape 2" id="2"/>
+          <p:cNvSpPr/>
+          <p:nvPr/>
+        </p:nvSpPr>
+        <p:spPr>
+          <a:xfrm>
+            <a:off x="0" y="0"/>
+            <a:ext cx="12192000" cy="6858000"/>
+          </a:xfrm>
+          <a:prstGeom prst="rect">
+            <a:avLst/>
+          </a:prstGeom>
+          <a:solidFill>
+            <a:srgbClr val="0D1121"/>
+          </a:solidFill>
+          <a:ln>
+            <a:noFill/>
+          </a:ln>
+        </p:spPr>
+      </p:sp>
+      <p:sp>
+        <p:nvSpPr>
+          <p:cNvPr name="GraphCompose Text Line" id="3"/>
+          <p:cNvSpPr txBox="true"/>
+          <p:nvPr/>
+        </p:nvSpPr>
+        <p:spPr>
+          <a:xfrm>
+            <a:off x="660400" y="454168"/>
+            <a:ext cx="1761490" cy="109804"/>
+          </a:xfrm>
+          <a:prstGeom prst="rect">
+            <a:avLst/>
+          </a:prstGeom>
+        </p:spPr>
+        <p:txBody>
+          <a:bodyPr anchor="t" rtlCol="false" wrap="none" tIns="0" rIns="0" bIns="0" lIns="0">
+            <a:noAutofit/>
+          </a:bodyPr>
+          <a:lstStyle/>
+          <a:p>
+            <a:pPr algn="l">
+              <a:lnSpc>
+                <a:spcPct val="100000"/>
+              </a:lnSpc>
+              <a:spcBef>
+                <a:spcPct val="0"/>
+              </a:spcBef>
+              <a:spcAft>
+                <a:spcPct val="0"/>
+              </a:spcAft>
+              <a:defRPr/>
+            </a:pPr>
+            <a:r>
+              <a:rPr lang="en-US" sz="1100" b="true" i="false" u="none" strike="noStrike" kern="0">
+                <a:solidFill>
+                  <a:srgbClr val="E9972D"/>
+                </a:solidFill>
+                <a:latin typeface="Courier New"/>
+              </a:rPr>
+              <a:t>MEASURED, NOT CLAIMED</a:t>
+            </a:r>
+            <a:endParaRPr lang="en-US" sz="1100"/>
+          </a:p>
+        </p:txBody>
+      </p:sp>
+      <p:sp>
+        <p:nvSpPr>
+          <p:cNvPr name="GraphCompose Text Line" id="4"/>
+          <p:cNvSpPr txBox="true"/>
+          <p:nvPr/>
+        </p:nvSpPr>
+        <p:spPr>
+          <a:xfrm>
+            <a:off x="660400" y="597253"/>
+            <a:ext cx="5865622" cy="352425"/>
+          </a:xfrm>
+          <a:prstGeom prst="rect">
+            <a:avLst/>
+          </a:prstGeom>
+        </p:spPr>
+        <p:txBody>
+          <a:bodyPr anchor="t" rtlCol="false" wrap="none" tIns="0" rIns="0" bIns="0" lIns="0">
+            <a:noAutofit/>
+          </a:bodyPr>
+          <a:lstStyle/>
+          <a:p>
+            <a:pPr algn="l">
+              <a:lnSpc>
+                <a:spcPct val="100000"/>
+              </a:lnSpc>
+              <a:spcBef>
+                <a:spcPct val="0"/>
+              </a:spcBef>
+              <a:spcAft>
+                <a:spcPct val="0"/>
+              </a:spcAft>
+              <a:defRPr/>
+            </a:pPr>
+            <a:r>
+              <a:rPr lang="en-US" sz="3000" b="true" i="false" u="none" strike="noStrike" kern="0">
+                <a:solidFill>
+                  <a:srgbClr val="F7F8FC"/>
+                </a:solidFill>
+                <a:latin typeface="Arial"/>
+              </a:rPr>
+              <a:t>GraphCompose against the field</a:t>
+            </a:r>
+            <a:endParaRPr lang="en-US" sz="1100"/>
+          </a:p>
+        </p:txBody>
+      </p:sp>
+      <p:sp>
+        <p:nvSpPr>
+          <p:cNvPr name="AutoShape 5" id="5"/>
+          <p:cNvSpPr/>
+          <p:nvPr/>
+        </p:nvSpPr>
+        <p:spPr>
+          <a:xfrm>
+            <a:off x="660400" y="1173429"/>
+            <a:ext cx="1219200" cy="50800"/>
+          </a:xfrm>
+          <a:prstGeom prst="rect">
+            <a:avLst/>
+          </a:prstGeom>
+          <a:solidFill>
+            <a:srgbClr val="E9972D"/>
+          </a:solidFill>
+          <a:ln>
+            <a:noFill/>
+          </a:ln>
+        </p:spPr>
+      </p:sp>
+      <p:sp>
+        <p:nvSpPr>
+          <p:cNvPr name="GraphCompose Text Line" id="6"/>
+          <p:cNvSpPr txBox="true"/>
+          <p:nvPr/>
+        </p:nvSpPr>
+        <p:spPr>
+          <a:xfrm>
+            <a:off x="660400" y="1396510"/>
+            <a:ext cx="10604157" cy="152718"/>
+          </a:xfrm>
+          <a:prstGeom prst="rect">
+            <a:avLst/>
+          </a:prstGeom>
+        </p:spPr>
+        <p:txBody>
+          <a:bodyPr anchor="t" rtlCol="false" wrap="none" tIns="0" rIns="0" bIns="0" lIns="0">
+            <a:noAutofit/>
+          </a:bodyPr>
+          <a:lstStyle/>
+          <a:p>
+            <a:pPr algn="l">
+              <a:lnSpc>
+                <a:spcPct val="100000"/>
+              </a:lnSpc>
+              <a:spcBef>
+                <a:spcPct val="0"/>
+              </a:spcBef>
+              <a:spcAft>
+                <a:spcPct val="0"/>
+              </a:spcAft>
+              <a:defRPr/>
+            </a:pPr>
+            <a:r>
+              <a:rPr lang="en-US" sz="1300" b="false" i="false" u="none" strike="noStrike" kern="0">
+                <a:solidFill>
+                  <a:srgbClr val="CED4E6"/>
+                </a:solidFill>
+                <a:latin typeface="Arial"/>
+              </a:rPr>
+              <a:t>The same documents through three engines — render time and peak heap, measured by this repository's own harness. Every figure on this page</a:t>
+            </a:r>
+            <a:endParaRPr lang="en-US" sz="1100"/>
+          </a:p>
+        </p:txBody>
+      </p:sp>
+      <p:sp>
+        <p:nvSpPr>
+          <p:cNvPr name="GraphCompose Text Line" id="7"/>
+          <p:cNvSpPr txBox="true"/>
+          <p:nvPr/>
+        </p:nvSpPr>
+        <p:spPr>
+          <a:xfrm>
+            <a:off x="660400" y="1600028"/>
+            <a:ext cx="4864951" cy="152718"/>
+          </a:xfrm>
+          <a:prstGeom prst="rect">
+            <a:avLst/>
+          </a:prstGeom>
+        </p:spPr>
+        <p:txBody>
+          <a:bodyPr anchor="t" rtlCol="false" wrap="none" tIns="0" rIns="0" bIns="0" lIns="0">
+            <a:noAutofit/>
+          </a:bodyPr>
+          <a:lstStyle/>
+          <a:p>
+            <a:pPr algn="l">
+              <a:lnSpc>
+                <a:spcPct val="100000"/>
+              </a:lnSpc>
+              <a:spcBef>
+                <a:spcPct val="0"/>
+              </a:spcBef>
+              <a:spcAft>
+                <a:spcPct val="0"/>
+              </a:spcAft>
+              <a:defRPr/>
+            </a:pPr>
+            <a:r>
+              <a:rPr lang="en-US" sz="1300" b="false" i="false" u="none" strike="noStrike" kern="0">
+                <a:solidFill>
+                  <a:srgbClr val="CED4E6"/>
+                </a:solidFill>
+                <a:latin typeface="Arial"/>
+              </a:rPr>
+              <a:t>and the next is read from the result file at render time, not typed in.</a:t>
+            </a:r>
+            <a:endParaRPr lang="en-US" sz="1100"/>
+          </a:p>
+        </p:txBody>
+      </p:sp>
+      <p:sp>
+        <p:nvSpPr>
+          <p:cNvPr name="GraphCompose Table Cell Fill" id="8"/>
+          <p:cNvSpPr/>
+          <p:nvPr/>
+        </p:nvSpPr>
+        <p:spPr>
+          <a:xfrm>
+            <a:off x="660400" y="2253564"/>
+            <a:ext cx="1287577" cy="267970"/>
+          </a:xfrm>
+          <a:prstGeom prst="rect">
+            <a:avLst/>
+          </a:prstGeom>
+          <a:solidFill>
+            <a:srgbClr val="2A3558"/>
+          </a:solidFill>
+          <a:ln>
+            <a:noFill/>
+          </a:ln>
+        </p:spPr>
+      </p:sp>
+      <p:sp>
+        <p:nvSpPr>
+          <p:cNvPr name="GraphCompose Table Cell Fill" id="9"/>
+          <p:cNvSpPr/>
+          <p:nvPr/>
+        </p:nvSpPr>
+        <p:spPr>
+          <a:xfrm>
+            <a:off x="1947977" y="2253564"/>
+            <a:ext cx="1490726" cy="267970"/>
+          </a:xfrm>
+          <a:prstGeom prst="rect">
+            <a:avLst/>
+          </a:prstGeom>
+          <a:solidFill>
+            <a:srgbClr val="2A3558"/>
+          </a:solidFill>
+          <a:ln>
+            <a:noFill/>
+          </a:ln>
+        </p:spPr>
+      </p:sp>
+      <p:sp>
+        <p:nvSpPr>
+          <p:cNvPr name="GraphCompose Table Cell Fill" id="10"/>
+          <p:cNvSpPr/>
+          <p:nvPr/>
+        </p:nvSpPr>
+        <p:spPr>
+          <a:xfrm>
+            <a:off x="3438703" y="2253564"/>
+            <a:ext cx="1575460" cy="267970"/>
+          </a:xfrm>
+          <a:prstGeom prst="rect">
+            <a:avLst/>
+          </a:prstGeom>
+          <a:solidFill>
+            <a:srgbClr val="2A3558"/>
+          </a:solidFill>
+          <a:ln>
+            <a:noFill/>
+          </a:ln>
+        </p:spPr>
+      </p:sp>
+      <p:sp>
+        <p:nvSpPr>
+          <p:cNvPr name="GraphCompose Table Cell Fill" id="11"/>
+          <p:cNvSpPr/>
+          <p:nvPr/>
+        </p:nvSpPr>
+        <p:spPr>
+          <a:xfrm>
+            <a:off x="5014163" y="2253564"/>
+            <a:ext cx="1490726" cy="267970"/>
+          </a:xfrm>
+          <a:prstGeom prst="rect">
+            <a:avLst/>
+          </a:prstGeom>
+          <a:solidFill>
+            <a:srgbClr val="2A3558"/>
+          </a:solidFill>
+          <a:ln>
+            <a:noFill/>
+          </a:ln>
+        </p:spPr>
+      </p:sp>
+      <p:sp>
+        <p:nvSpPr>
+          <p:cNvPr name="GraphCompose Table Cell Fill" id="12"/>
+          <p:cNvSpPr/>
+          <p:nvPr/>
+        </p:nvSpPr>
+        <p:spPr>
+          <a:xfrm>
+            <a:off x="660400" y="2521534"/>
+            <a:ext cx="1287577" cy="267970"/>
+          </a:xfrm>
+          <a:prstGeom prst="rect">
+            <a:avLst/>
+          </a:prstGeom>
+          <a:solidFill>
+            <a:srgbClr val="1D2642"/>
+          </a:solidFill>
+          <a:ln>
+            <a:noFill/>
+          </a:ln>
+        </p:spPr>
+      </p:sp>
+      <p:sp>
+        <p:nvSpPr>
+          <p:cNvPr name="GraphCompose Table Cell Fill" id="13"/>
+          <p:cNvSpPr/>
+          <p:nvPr/>
+        </p:nvSpPr>
+        <p:spPr>
+          <a:xfrm>
+            <a:off x="1947977" y="2521534"/>
+            <a:ext cx="1490726" cy="267970"/>
+          </a:xfrm>
+          <a:prstGeom prst="rect">
+            <a:avLst/>
+          </a:prstGeom>
+          <a:solidFill>
+            <a:srgbClr val="1D2642"/>
+          </a:solidFill>
+          <a:ln>
+            <a:noFill/>
+          </a:ln>
+        </p:spPr>
+      </p:sp>
+      <p:sp>
+        <p:nvSpPr>
+          <p:cNvPr name="GraphCompose Table Cell Fill" id="14"/>
+          <p:cNvSpPr/>
+          <p:nvPr/>
+        </p:nvSpPr>
+        <p:spPr>
+          <a:xfrm>
+            <a:off x="3438703" y="2521534"/>
+            <a:ext cx="1575460" cy="267970"/>
+          </a:xfrm>
+          <a:prstGeom prst="rect">
+            <a:avLst/>
+          </a:prstGeom>
+          <a:solidFill>
+            <a:srgbClr val="1D2642"/>
+          </a:solidFill>
+          <a:ln>
+            <a:noFill/>
+          </a:ln>
+        </p:spPr>
+      </p:sp>
+      <p:sp>
+        <p:nvSpPr>
+          <p:cNvPr name="GraphCompose Table Cell Fill" id="15"/>
+          <p:cNvSpPr/>
+          <p:nvPr/>
+        </p:nvSpPr>
+        <p:spPr>
+          <a:xfrm>
+            <a:off x="5014163" y="2521534"/>
+            <a:ext cx="1490726" cy="267970"/>
+          </a:xfrm>
+          <a:prstGeom prst="rect">
+            <a:avLst/>
+          </a:prstGeom>
+          <a:solidFill>
+            <a:srgbClr val="1D2642"/>
+          </a:solidFill>
+          <a:ln>
+            <a:noFill/>
+          </a:ln>
+        </p:spPr>
+      </p:sp>
+      <p:sp>
+        <p:nvSpPr>
+          <p:cNvPr name="GraphCompose Table Cell Fill" id="16"/>
+          <p:cNvSpPr/>
+          <p:nvPr/>
+        </p:nvSpPr>
+        <p:spPr>
+          <a:xfrm>
+            <a:off x="660400" y="2789504"/>
+            <a:ext cx="1287577" cy="267970"/>
+          </a:xfrm>
+          <a:prstGeom prst="rect">
+            <a:avLst/>
+          </a:prstGeom>
+          <a:solidFill>
+            <a:srgbClr val="13192D"/>
+          </a:solidFill>
+          <a:ln>
+            <a:noFill/>
+          </a:ln>
+        </p:spPr>
+      </p:sp>
+      <p:sp>
+        <p:nvSpPr>
+          <p:cNvPr name="GraphCompose Table Cell Fill" id="17"/>
+          <p:cNvSpPr/>
+          <p:nvPr/>
+        </p:nvSpPr>
+        <p:spPr>
+          <a:xfrm>
+            <a:off x="1947977" y="2789504"/>
+            <a:ext cx="1490726" cy="267970"/>
+          </a:xfrm>
+          <a:prstGeom prst="rect">
+            <a:avLst/>
+          </a:prstGeom>
+          <a:solidFill>
+            <a:srgbClr val="13192D"/>
+          </a:solidFill>
+          <a:ln>
+            <a:noFill/>
+          </a:ln>
+        </p:spPr>
+      </p:sp>
+      <p:sp>
+        <p:nvSpPr>
+          <p:cNvPr name="GraphCompose Table Cell Fill" id="18"/>
+          <p:cNvSpPr/>
+          <p:nvPr/>
+        </p:nvSpPr>
+        <p:spPr>
+          <a:xfrm>
+            <a:off x="3438703" y="2789504"/>
+            <a:ext cx="1575460" cy="267970"/>
+          </a:xfrm>
+          <a:prstGeom prst="rect">
+            <a:avLst/>
+          </a:prstGeom>
+          <a:solidFill>
+            <a:srgbClr val="13192D"/>
+          </a:solidFill>
+          <a:ln>
+            <a:noFill/>
+          </a:ln>
+        </p:spPr>
+      </p:sp>
+      <p:sp>
+        <p:nvSpPr>
+          <p:cNvPr name="GraphCompose Table Cell Fill" id="19"/>
+          <p:cNvSpPr/>
+          <p:nvPr/>
+        </p:nvSpPr>
+        <p:spPr>
+          <a:xfrm>
+            <a:off x="5014163" y="2789504"/>
+            <a:ext cx="1490726" cy="267970"/>
+          </a:xfrm>
+          <a:prstGeom prst="rect">
+            <a:avLst/>
+          </a:prstGeom>
+          <a:solidFill>
+            <a:srgbClr val="13192D"/>
+          </a:solidFill>
+          <a:ln>
+            <a:noFill/>
+          </a:ln>
+        </p:spPr>
+      </p:sp>
+      <p:sp>
+        <p:nvSpPr>
+          <p:cNvPr name="GraphCompose Table Cell Fill" id="20"/>
+          <p:cNvSpPr/>
+          <p:nvPr/>
+        </p:nvSpPr>
+        <p:spPr>
+          <a:xfrm>
+            <a:off x="660400" y="3057474"/>
+            <a:ext cx="1287577" cy="267970"/>
+          </a:xfrm>
+          <a:prstGeom prst="rect">
+            <a:avLst/>
+          </a:prstGeom>
+          <a:solidFill>
+            <a:srgbClr val="1D2642"/>
+          </a:solidFill>
+          <a:ln>
+            <a:noFill/>
+          </a:ln>
+        </p:spPr>
+      </p:sp>
+      <p:sp>
+        <p:nvSpPr>
+          <p:cNvPr name="GraphCompose Table Cell Fill" id="21"/>
+          <p:cNvSpPr/>
+          <p:nvPr/>
+        </p:nvSpPr>
+        <p:spPr>
+          <a:xfrm>
+            <a:off x="1947977" y="3057474"/>
+            <a:ext cx="1490726" cy="267970"/>
+          </a:xfrm>
+          <a:prstGeom prst="rect">
+            <a:avLst/>
+          </a:prstGeom>
+          <a:solidFill>
+            <a:srgbClr val="1D2642"/>
+          </a:solidFill>
+          <a:ln>
+            <a:noFill/>
+          </a:ln>
+        </p:spPr>
+      </p:sp>
+      <p:sp>
+        <p:nvSpPr>
+          <p:cNvPr name="GraphCompose Table Cell Fill" id="22"/>
+          <p:cNvSpPr/>
+          <p:nvPr/>
+        </p:nvSpPr>
+        <p:spPr>
+          <a:xfrm>
+            <a:off x="3438703" y="3057474"/>
+            <a:ext cx="1575460" cy="267970"/>
+          </a:xfrm>
+          <a:prstGeom prst="rect">
+            <a:avLst/>
+          </a:prstGeom>
+          <a:solidFill>
+            <a:srgbClr val="1D2642"/>
+          </a:solidFill>
+          <a:ln>
+            <a:noFill/>
+          </a:ln>
+        </p:spPr>
+      </p:sp>
+      <p:sp>
+        <p:nvSpPr>
+          <p:cNvPr name="GraphCompose Table Cell Fill" id="23"/>
+          <p:cNvSpPr/>
+          <p:nvPr/>
+        </p:nvSpPr>
+        <p:spPr>
+          <a:xfrm>
+            <a:off x="5014163" y="3057474"/>
+            <a:ext cx="1490726" cy="267970"/>
+          </a:xfrm>
+          <a:prstGeom prst="rect">
+            <a:avLst/>
+          </a:prstGeom>
+          <a:solidFill>
+            <a:srgbClr val="1D2642"/>
+          </a:solidFill>
+          <a:ln>
+            <a:noFill/>
+          </a:ln>
+        </p:spPr>
+      </p:sp>
+      <p:sp>
+        <p:nvSpPr>
+          <p:cNvPr name="GraphCompose Table Cell Fill" id="24"/>
+          <p:cNvSpPr/>
+          <p:nvPr/>
+        </p:nvSpPr>
+        <p:spPr>
+          <a:xfrm>
+            <a:off x="660400" y="3325444"/>
+            <a:ext cx="1287577" cy="267970"/>
+          </a:xfrm>
+          <a:prstGeom prst="rect">
+            <a:avLst/>
+          </a:prstGeom>
+          <a:solidFill>
+            <a:srgbClr val="13192D"/>
+          </a:solidFill>
+          <a:ln>
+            <a:noFill/>
+          </a:ln>
+        </p:spPr>
+      </p:sp>
+      <p:sp>
+        <p:nvSpPr>
+          <p:cNvPr name="GraphCompose Table Cell Fill" id="25"/>
+          <p:cNvSpPr/>
+          <p:nvPr/>
+        </p:nvSpPr>
+        <p:spPr>
+          <a:xfrm>
+            <a:off x="1947977" y="3325444"/>
+            <a:ext cx="1490726" cy="267970"/>
+          </a:xfrm>
+          <a:prstGeom prst="rect">
+            <a:avLst/>
+          </a:prstGeom>
+          <a:solidFill>
+            <a:srgbClr val="13192D"/>
+          </a:solidFill>
+          <a:ln>
+            <a:noFill/>
+          </a:ln>
+        </p:spPr>
+      </p:sp>
+      <p:sp>
+        <p:nvSpPr>
+          <p:cNvPr name="GraphCompose Table Cell Fill" id="26"/>
+          <p:cNvSpPr/>
+          <p:nvPr/>
+        </p:nvSpPr>
+        <p:spPr>
+          <a:xfrm>
+            <a:off x="3438703" y="3325444"/>
+            <a:ext cx="1575460" cy="267970"/>
+          </a:xfrm>
+          <a:prstGeom prst="rect">
+            <a:avLst/>
+          </a:prstGeom>
+          <a:solidFill>
+            <a:srgbClr val="13192D"/>
+          </a:solidFill>
+          <a:ln>
+            <a:noFill/>
+          </a:ln>
+        </p:spPr>
+      </p:sp>
+      <p:sp>
+        <p:nvSpPr>
+          <p:cNvPr name="GraphCompose Table Cell Fill" id="27"/>
+          <p:cNvSpPr/>
+          <p:nvPr/>
+        </p:nvSpPr>
+        <p:spPr>
+          <a:xfrm>
+            <a:off x="5014163" y="3325444"/>
+            <a:ext cx="1490726" cy="267970"/>
+          </a:xfrm>
+          <a:prstGeom prst="rect">
+            <a:avLst/>
+          </a:prstGeom>
+          <a:solidFill>
+            <a:srgbClr val="13192D"/>
+          </a:solidFill>
+          <a:ln>
+            <a:noFill/>
+          </a:ln>
+        </p:spPr>
+      </p:sp>
+      <p:cxnSp>
+        <p:nvCxnSpPr>
+          <p:cNvPr name="GraphCompose Table Cell Border" id="28"/>
+          <p:cNvCxnSpPr/>
+          <p:nvPr/>
+        </p:nvCxnSpPr>
+        <p:spPr>
+          <a:xfrm>
+            <a:off x="660400" y="2253564"/>
+            <a:ext cx="1292657" cy="0"/>
+          </a:xfrm>
+          <a:prstGeom prst="line">
+            <a:avLst/>
+          </a:prstGeom>
+          <a:ln w="10160">
+            <a:solidFill>
+              <a:srgbClr val="303856"/>
+            </a:solidFill>
+          </a:ln>
+        </p:spPr>
+      </p:cxnSp>
+      <p:cxnSp>
+        <p:nvCxnSpPr>
+          <p:cNvPr name="GraphCompose Table Cell Border" id="29"/>
+          <p:cNvCxnSpPr/>
+          <p:nvPr/>
+        </p:nvCxnSpPr>
+        <p:spPr>
+          <a:xfrm>
+            <a:off x="660400" y="2521534"/>
+            <a:ext cx="1292657" cy="0"/>
+          </a:xfrm>
+          <a:prstGeom prst="line">
+            <a:avLst/>
+          </a:prstGeom>
+          <a:ln w="10160">
+            <a:solidFill>
+              <a:srgbClr val="303856"/>
+            </a:solidFill>
+          </a:ln>
+        </p:spPr>
+      </p:cxnSp>
+      <p:cxnSp>
+        <p:nvCxnSpPr>
+          <p:cNvPr name="GraphCompose Table Cell Border" id="30"/>
+          <p:cNvCxnSpPr/>
+          <p:nvPr/>
+        </p:nvCxnSpPr>
+        <p:spPr>
+          <a:xfrm>
+            <a:off x="660400" y="2253564"/>
+            <a:ext cx="0" cy="267970"/>
+          </a:xfrm>
+          <a:prstGeom prst="line">
+            <a:avLst/>
+          </a:prstGeom>
+          <a:ln w="10160">
+            <a:solidFill>
+              <a:srgbClr val="303856"/>
+            </a:solidFill>
+          </a:ln>
+        </p:spPr>
+      </p:cxnSp>
+      <p:cxnSp>
+        <p:nvCxnSpPr>
+          <p:cNvPr name="GraphCompose Table Cell Border" id="31"/>
+          <p:cNvCxnSpPr/>
+          <p:nvPr/>
+        </p:nvCxnSpPr>
+        <p:spPr>
+          <a:xfrm>
+            <a:off x="1947977" y="2253564"/>
+            <a:ext cx="0" cy="267970"/>
+          </a:xfrm>
+          <a:prstGeom prst="line">
+            <a:avLst/>
+          </a:prstGeom>
+          <a:ln w="10160">
+            <a:solidFill>
+              <a:srgbClr val="303856"/>
+            </a:solidFill>
+          </a:ln>
+        </p:spPr>
+      </p:cxnSp>
+      <p:sp>
+        <p:nvSpPr>
+          <p:cNvPr name="GraphCompose Table Cell Text" id="32"/>
+          <p:cNvSpPr txBox="true"/>
+          <p:nvPr/>
+        </p:nvSpPr>
+        <p:spPr>
+          <a:xfrm>
+            <a:off x="787400" y="2288524"/>
+            <a:ext cx="822706" cy="140970"/>
+          </a:xfrm>
+          <a:prstGeom prst="rect">
+            <a:avLst/>
+          </a:prstGeom>
+        </p:spPr>
+        <p:txBody>
+          <a:bodyPr anchor="t" rtlCol="false" wrap="none" tIns="0" rIns="0" bIns="0" lIns="0">
+            <a:noAutofit/>
+          </a:bodyPr>
+          <a:lstStyle/>
+          <a:p>
+            <a:pPr algn="l">
+              <a:defRPr/>
+            </a:pPr>
+            <a:r>
+              <a:rPr lang="en-US" sz="1200" b="true" i="false" u="none" strike="noStrike" kern="0">
+                <a:solidFill>
+                  <a:srgbClr val="F7F8FC"/>
+                </a:solidFill>
+                <a:latin typeface="Arial"/>
+              </a:rPr>
+              <a:t>Report size</a:t>
+            </a:r>
+            <a:endParaRPr lang="en-US" sz="1100"/>
+          </a:p>
+        </p:txBody>
+      </p:sp>
+      <p:cxnSp>
+        <p:nvCxnSpPr>
+          <p:cNvPr name="GraphCompose Table Cell Border" id="33"/>
+          <p:cNvCxnSpPr/>
+          <p:nvPr/>
+        </p:nvCxnSpPr>
+        <p:spPr>
+          <a:xfrm>
+            <a:off x="1942897" y="2253564"/>
+            <a:ext cx="1500886" cy="0"/>
+          </a:xfrm>
+          <a:prstGeom prst="line">
+            <a:avLst/>
+          </a:prstGeom>
+          <a:ln w="10160">
+            <a:solidFill>
+              <a:srgbClr val="303856"/>
+            </a:solidFill>
+          </a:ln>
+        </p:spPr>
+      </p:cxnSp>
+      <p:cxnSp>
+        <p:nvCxnSpPr>
+          <p:cNvPr name="GraphCompose Table Cell Border" id="34"/>
+          <p:cNvCxnSpPr/>
+          <p:nvPr/>
+        </p:nvCxnSpPr>
+        <p:spPr>
+          <a:xfrm>
+            <a:off x="1942897" y="2521534"/>
+            <a:ext cx="1500886" cy="0"/>
+          </a:xfrm>
+          <a:prstGeom prst="line">
+            <a:avLst/>
+          </a:prstGeom>
+          <a:ln w="10160">
+            <a:solidFill>
+              <a:srgbClr val="303856"/>
+            </a:solidFill>
+          </a:ln>
+        </p:spPr>
+      </p:cxnSp>
+      <p:cxnSp>
+        <p:nvCxnSpPr>
+          <p:cNvPr name="GraphCompose Table Cell Border" id="35"/>
+          <p:cNvCxnSpPr/>
+          <p:nvPr/>
+        </p:nvCxnSpPr>
+        <p:spPr>
+          <a:xfrm>
+            <a:off x="3438703" y="2253564"/>
+            <a:ext cx="0" cy="267970"/>
+          </a:xfrm>
+          <a:prstGeom prst="line">
+            <a:avLst/>
+          </a:prstGeom>
+          <a:ln w="10160">
+            <a:solidFill>
+              <a:srgbClr val="303856"/>
+            </a:solidFill>
+          </a:ln>
+        </p:spPr>
+      </p:cxnSp>
+      <p:sp>
+        <p:nvSpPr>
+          <p:cNvPr name="GraphCompose Table Cell Text" id="36"/>
+          <p:cNvSpPr txBox="true"/>
+          <p:nvPr/>
+        </p:nvSpPr>
+        <p:spPr>
+          <a:xfrm>
+            <a:off x="2074977" y="2288524"/>
+            <a:ext cx="1144422" cy="140970"/>
+          </a:xfrm>
+          <a:prstGeom prst="rect">
+            <a:avLst/>
+          </a:prstGeom>
+        </p:spPr>
+        <p:txBody>
+          <a:bodyPr anchor="t" rtlCol="false" wrap="none" tIns="0" rIns="0" bIns="0" lIns="0">
+            <a:noAutofit/>
+          </a:bodyPr>
+          <a:lstStyle/>
+          <a:p>
+            <a:pPr algn="l">
+              <a:defRPr/>
+            </a:pPr>
+            <a:r>
+              <a:rPr lang="en-US" sz="1200" b="true" i="false" u="none" strike="noStrike" kern="0">
+                <a:solidFill>
+                  <a:srgbClr val="F7F8FC"/>
+                </a:solidFill>
+                <a:latin typeface="Arial"/>
+              </a:rPr>
+              <a:t>GraphCompose</a:t>
+            </a:r>
+            <a:endParaRPr lang="en-US" sz="1100"/>
+          </a:p>
+        </p:txBody>
+      </p:sp>
+      <p:cxnSp>
+        <p:nvCxnSpPr>
+          <p:cNvPr name="GraphCompose Table Cell Border" id="37"/>
+          <p:cNvCxnSpPr/>
+          <p:nvPr/>
+        </p:nvCxnSpPr>
+        <p:spPr>
+          <a:xfrm>
+            <a:off x="3433623" y="2253564"/>
+            <a:ext cx="1585620" cy="0"/>
+          </a:xfrm>
+          <a:prstGeom prst="line">
+            <a:avLst/>
+          </a:prstGeom>
+          <a:ln w="10160">
+            <a:solidFill>
+              <a:srgbClr val="303856"/>
+            </a:solidFill>
+          </a:ln>
+        </p:spPr>
+      </p:cxnSp>
+      <p:cxnSp>
+        <p:nvCxnSpPr>
+          <p:cNvPr name="GraphCompose Table Cell Border" id="38"/>
+          <p:cNvCxnSpPr/>
+          <p:nvPr/>
+        </p:nvCxnSpPr>
+        <p:spPr>
+          <a:xfrm>
+            <a:off x="3433623" y="2521534"/>
+            <a:ext cx="1585620" cy="0"/>
+          </a:xfrm>
+          <a:prstGeom prst="line">
+            <a:avLst/>
+          </a:prstGeom>
+          <a:ln w="10160">
+            <a:solidFill>
+              <a:srgbClr val="303856"/>
+            </a:solidFill>
+          </a:ln>
+        </p:spPr>
+      </p:cxnSp>
+      <p:cxnSp>
+        <p:nvCxnSpPr>
+          <p:cNvPr name="GraphCompose Table Cell Border" id="39"/>
+          <p:cNvCxnSpPr/>
+          <p:nvPr/>
+        </p:nvCxnSpPr>
+        <p:spPr>
+          <a:xfrm>
+            <a:off x="5014163" y="2253564"/>
+            <a:ext cx="0" cy="267970"/>
+          </a:xfrm>
+          <a:prstGeom prst="line">
+            <a:avLst/>
+          </a:prstGeom>
+          <a:ln w="10160">
+            <a:solidFill>
+              <a:srgbClr val="303856"/>
+            </a:solidFill>
+          </a:ln>
+        </p:spPr>
+      </p:cxnSp>
+      <p:sp>
+        <p:nvSpPr>
+          <p:cNvPr name="GraphCompose Table Cell Text" id="40"/>
+          <p:cNvSpPr txBox="true"/>
+          <p:nvPr/>
+        </p:nvSpPr>
+        <p:spPr>
+          <a:xfrm>
+            <a:off x="3565703" y="2288524"/>
+            <a:ext cx="484073" cy="140970"/>
+          </a:xfrm>
+          <a:prstGeom prst="rect">
+            <a:avLst/>
+          </a:prstGeom>
+        </p:spPr>
+        <p:txBody>
+          <a:bodyPr anchor="t" rtlCol="false" wrap="none" tIns="0" rIns="0" bIns="0" lIns="0">
+            <a:noAutofit/>
+          </a:bodyPr>
+          <a:lstStyle/>
+          <a:p>
+            <a:pPr algn="l">
+              <a:defRPr/>
+            </a:pPr>
+            <a:r>
+              <a:rPr lang="en-US" sz="1200" b="true" i="false" u="none" strike="noStrike" kern="0">
+                <a:solidFill>
+                  <a:srgbClr val="F7F8FC"/>
+                </a:solidFill>
+                <a:latin typeface="Arial"/>
+              </a:rPr>
+              <a:t>iText 9</a:t>
+            </a:r>
+            <a:endParaRPr lang="en-US" sz="1100"/>
+          </a:p>
+        </p:txBody>
+      </p:sp>
+      <p:cxnSp>
+        <p:nvCxnSpPr>
+          <p:cNvPr name="GraphCompose Table Cell Border" id="41"/>
+          <p:cNvCxnSpPr/>
+          <p:nvPr/>
+        </p:nvCxnSpPr>
+        <p:spPr>
+          <a:xfrm>
+            <a:off x="5009083" y="2253564"/>
+            <a:ext cx="1495806" cy="0"/>
+          </a:xfrm>
+          <a:prstGeom prst="line">
+            <a:avLst/>
+          </a:prstGeom>
+          <a:ln w="10160">
+            <a:solidFill>
+              <a:srgbClr val="303856"/>
+            </a:solidFill>
+          </a:ln>
+        </p:spPr>
+      </p:cxnSp>
+      <p:cxnSp>
+        <p:nvCxnSpPr>
+          <p:cNvPr name="GraphCompose Table Cell Border" id="42"/>
+          <p:cNvCxnSpPr/>
+          <p:nvPr/>
+        </p:nvCxnSpPr>
+        <p:spPr>
+          <a:xfrm>
+            <a:off x="5009083" y="2521534"/>
+            <a:ext cx="1495806" cy="0"/>
+          </a:xfrm>
+          <a:prstGeom prst="line">
+            <a:avLst/>
+          </a:prstGeom>
+          <a:ln w="10160">
+            <a:solidFill>
+              <a:srgbClr val="303856"/>
+            </a:solidFill>
+          </a:ln>
+        </p:spPr>
+      </p:cxnSp>
+      <p:cxnSp>
+        <p:nvCxnSpPr>
+          <p:cNvPr name="GraphCompose Table Cell Border" id="43"/>
+          <p:cNvCxnSpPr/>
+          <p:nvPr/>
+        </p:nvCxnSpPr>
+        <p:spPr>
+          <a:xfrm>
+            <a:off x="6504889" y="2253564"/>
+            <a:ext cx="0" cy="267970"/>
+          </a:xfrm>
+          <a:prstGeom prst="line">
+            <a:avLst/>
+          </a:prstGeom>
+          <a:ln w="10160">
+            <a:solidFill>
+              <a:srgbClr val="303856"/>
+            </a:solidFill>
+          </a:ln>
+        </p:spPr>
+      </p:cxnSp>
+      <p:sp>
+        <p:nvSpPr>
+          <p:cNvPr name="GraphCompose Table Cell Text" id="44"/>
+          <p:cNvSpPr txBox="true"/>
+          <p:nvPr/>
+        </p:nvSpPr>
+        <p:spPr>
+          <a:xfrm>
+            <a:off x="5141163" y="2288524"/>
+            <a:ext cx="1068375" cy="140970"/>
+          </a:xfrm>
+          <a:prstGeom prst="rect">
+            <a:avLst/>
+          </a:prstGeom>
+        </p:spPr>
+        <p:txBody>
+          <a:bodyPr anchor="t" rtlCol="false" wrap="none" tIns="0" rIns="0" bIns="0" lIns="0">
+            <a:noAutofit/>
+          </a:bodyPr>
+          <a:lstStyle/>
+          <a:p>
+            <a:pPr algn="l">
+              <a:defRPr/>
+            </a:pPr>
+            <a:r>
+              <a:rPr lang="en-US" sz="1200" b="true" i="false" u="none" strike="noStrike" kern="0">
+                <a:solidFill>
+                  <a:srgbClr val="F7F8FC"/>
+                </a:solidFill>
+                <a:latin typeface="Arial"/>
+              </a:rPr>
+              <a:t>JasperReports</a:t>
+            </a:r>
+            <a:endParaRPr lang="en-US" sz="1100"/>
+          </a:p>
+        </p:txBody>
+      </p:sp>
+      <p:cxnSp>
+        <p:nvCxnSpPr>
+          <p:cNvPr name="GraphCompose Table Cell Border" id="45"/>
+          <p:cNvCxnSpPr/>
+          <p:nvPr/>
+        </p:nvCxnSpPr>
+        <p:spPr>
+          <a:xfrm>
+            <a:off x="660400" y="2789504"/>
+            <a:ext cx="1292657" cy="0"/>
+          </a:xfrm>
+          <a:prstGeom prst="line">
+            <a:avLst/>
+          </a:prstGeom>
+          <a:ln w="10160">
+            <a:solidFill>
+              <a:srgbClr val="303856"/>
+            </a:solidFill>
+          </a:ln>
+        </p:spPr>
+      </p:cxnSp>
+      <p:cxnSp>
+        <p:nvCxnSpPr>
+          <p:cNvPr name="GraphCompose Table Cell Border" id="46"/>
+          <p:cNvCxnSpPr/>
+          <p:nvPr/>
+        </p:nvCxnSpPr>
+        <p:spPr>
+          <a:xfrm>
+            <a:off x="660400" y="2521534"/>
+            <a:ext cx="0" cy="267970"/>
+          </a:xfrm>
+          <a:prstGeom prst="line">
+            <a:avLst/>
+          </a:prstGeom>
+          <a:ln w="10160">
+            <a:solidFill>
+              <a:srgbClr val="303856"/>
+            </a:solidFill>
+          </a:ln>
+        </p:spPr>
+      </p:cxnSp>
+      <p:cxnSp>
+        <p:nvCxnSpPr>
+          <p:cNvPr name="GraphCompose Table Cell Border" id="47"/>
+          <p:cNvCxnSpPr/>
+          <p:nvPr/>
+        </p:nvCxnSpPr>
+        <p:spPr>
+          <a:xfrm>
+            <a:off x="1947977" y="2521534"/>
+            <a:ext cx="0" cy="267970"/>
+          </a:xfrm>
+          <a:prstGeom prst="line">
+            <a:avLst/>
+          </a:prstGeom>
+          <a:ln w="10160">
+            <a:solidFill>
+              <a:srgbClr val="303856"/>
+            </a:solidFill>
+          </a:ln>
+        </p:spPr>
+      </p:cxnSp>
+      <p:sp>
+        <p:nvSpPr>
+          <p:cNvPr name="GraphCompose Table Cell Text" id="48"/>
+          <p:cNvSpPr txBox="true"/>
+          <p:nvPr/>
+        </p:nvSpPr>
+        <p:spPr>
+          <a:xfrm>
+            <a:off x="787400" y="2556494"/>
+            <a:ext cx="1034847" cy="140970"/>
+          </a:xfrm>
+          <a:prstGeom prst="rect">
+            <a:avLst/>
+          </a:prstGeom>
+        </p:spPr>
+        <p:txBody>
+          <a:bodyPr anchor="t" rtlCol="false" wrap="none" tIns="0" rIns="0" bIns="0" lIns="0">
+            <a:noAutofit/>
+          </a:bodyPr>
+          <a:lstStyle/>
+          <a:p>
+            <a:pPr algn="l">
+              <a:defRPr/>
+            </a:pPr>
+            <a:r>
+              <a:rPr lang="en-US" sz="1200" b="false" i="false" u="none" strike="noStrike" kern="0">
+                <a:solidFill>
+                  <a:srgbClr val="CED4E6"/>
+                </a:solidFill>
+                <a:latin typeface="Arial"/>
+              </a:rPr>
+              <a:t>1 page · 3 lines</a:t>
+            </a:r>
+            <a:endParaRPr lang="en-US" sz="1100"/>
+          </a:p>
+        </p:txBody>
+      </p:sp>
+      <p:cxnSp>
+        <p:nvCxnSpPr>
+          <p:cNvPr name="GraphCompose Table Cell Border" id="49"/>
+          <p:cNvCxnSpPr/>
+          <p:nvPr/>
+        </p:nvCxnSpPr>
+        <p:spPr>
+          <a:xfrm>
+            <a:off x="1942897" y="2789504"/>
+            <a:ext cx="1500886" cy="0"/>
+          </a:xfrm>
+          <a:prstGeom prst="line">
+            <a:avLst/>
+          </a:prstGeom>
+          <a:ln w="10160">
+            <a:solidFill>
+              <a:srgbClr val="303856"/>
+            </a:solidFill>
+          </a:ln>
+        </p:spPr>
+      </p:cxnSp>
+      <p:cxnSp>
+        <p:nvCxnSpPr>
+          <p:cNvPr name="GraphCompose Table Cell Border" id="50"/>
+          <p:cNvCxnSpPr/>
+          <p:nvPr/>
+        </p:nvCxnSpPr>
+        <p:spPr>
+          <a:xfrm>
+            <a:off x="3438703" y="2521534"/>
+            <a:ext cx="0" cy="267970"/>
+          </a:xfrm>
+          <a:prstGeom prst="line">
+            <a:avLst/>
+          </a:prstGeom>
+          <a:ln w="10160">
+            <a:solidFill>
+              <a:srgbClr val="303856"/>
+            </a:solidFill>
+          </a:ln>
+        </p:spPr>
+      </p:cxnSp>
+      <p:sp>
+        <p:nvSpPr>
+          <p:cNvPr name="GraphCompose Table Cell Text" id="51"/>
+          <p:cNvSpPr txBox="true"/>
+          <p:nvPr/>
+        </p:nvSpPr>
+        <p:spPr>
+          <a:xfrm>
+            <a:off x="2074977" y="2556494"/>
+            <a:ext cx="1068527" cy="140970"/>
+          </a:xfrm>
+          <a:prstGeom prst="rect">
+            <a:avLst/>
+          </a:prstGeom>
+        </p:spPr>
+        <p:txBody>
+          <a:bodyPr anchor="t" rtlCol="false" wrap="none" tIns="0" rIns="0" bIns="0" lIns="0">
+            <a:noAutofit/>
+          </a:bodyPr>
+          <a:lstStyle/>
+          <a:p>
+            <a:pPr algn="l">
+              <a:defRPr/>
+            </a:pPr>
+            <a:r>
+              <a:rPr lang="en-US" sz="1200" b="false" i="false" u="none" strike="noStrike" kern="0">
+                <a:solidFill>
+                  <a:srgbClr val="CED4E6"/>
+                </a:solidFill>
+                <a:latin typeface="Arial"/>
+              </a:rPr>
+              <a:t>2.8 ms · 0.2 MB</a:t>
+            </a:r>
+            <a:endParaRPr lang="en-US" sz="1100"/>
+          </a:p>
+        </p:txBody>
+      </p:sp>
+      <p:cxnSp>
+        <p:nvCxnSpPr>
+          <p:cNvPr name="GraphCompose Table Cell Border" id="52"/>
+          <p:cNvCxnSpPr/>
+          <p:nvPr/>
+        </p:nvCxnSpPr>
+        <p:spPr>
+          <a:xfrm>
+            <a:off x="3433623" y="2789504"/>
+            <a:ext cx="1585620" cy="0"/>
+          </a:xfrm>
+          <a:prstGeom prst="line">
+            <a:avLst/>
+          </a:prstGeom>
+          <a:ln w="10160">
+            <a:solidFill>
+              <a:srgbClr val="303856"/>
+            </a:solidFill>
+          </a:ln>
+        </p:spPr>
+      </p:cxnSp>
+      <p:cxnSp>
+        <p:nvCxnSpPr>
+          <p:cNvPr name="GraphCompose Table Cell Border" id="53"/>
+          <p:cNvCxnSpPr/>
+          <p:nvPr/>
+        </p:nvCxnSpPr>
+        <p:spPr>
+          <a:xfrm>
+            <a:off x="5014163" y="2521534"/>
+            <a:ext cx="0" cy="267970"/>
+          </a:xfrm>
+          <a:prstGeom prst="line">
+            <a:avLst/>
+          </a:prstGeom>
+          <a:ln w="10160">
+            <a:solidFill>
+              <a:srgbClr val="303856"/>
+            </a:solidFill>
+          </a:ln>
+        </p:spPr>
+      </p:cxnSp>
+      <p:sp>
+        <p:nvSpPr>
+          <p:cNvPr name="GraphCompose Table Cell Text" id="54"/>
+          <p:cNvSpPr txBox="true"/>
+          <p:nvPr/>
+        </p:nvSpPr>
+        <p:spPr>
+          <a:xfrm>
+            <a:off x="3565703" y="2556494"/>
+            <a:ext cx="1068527" cy="140970"/>
+          </a:xfrm>
+          <a:prstGeom prst="rect">
+            <a:avLst/>
+          </a:prstGeom>
+        </p:spPr>
+        <p:txBody>
+          <a:bodyPr anchor="t" rtlCol="false" wrap="none" tIns="0" rIns="0" bIns="0" lIns="0">
+            <a:noAutofit/>
+          </a:bodyPr>
+          <a:lstStyle/>
+          <a:p>
+            <a:pPr algn="l">
+              <a:defRPr/>
+            </a:pPr>
+            <a:r>
+              <a:rPr lang="en-US" sz="1200" b="false" i="false" u="none" strike="noStrike" kern="0">
+                <a:solidFill>
+                  <a:srgbClr val="CED4E6"/>
+                </a:solidFill>
+                <a:latin typeface="Arial"/>
+              </a:rPr>
+              <a:t>2.8 ms · 0.2 MB</a:t>
+            </a:r>
+            <a:endParaRPr lang="en-US" sz="1100"/>
+          </a:p>
+        </p:txBody>
+      </p:sp>
+      <p:cxnSp>
+        <p:nvCxnSpPr>
+          <p:cNvPr name="GraphCompose Table Cell Border" id="55"/>
+          <p:cNvCxnSpPr/>
+          <p:nvPr/>
+        </p:nvCxnSpPr>
+        <p:spPr>
+          <a:xfrm>
+            <a:off x="5009083" y="2789504"/>
+            <a:ext cx="1495806" cy="0"/>
+          </a:xfrm>
+          <a:prstGeom prst="line">
+            <a:avLst/>
+          </a:prstGeom>
+          <a:ln w="10160">
+            <a:solidFill>
+              <a:srgbClr val="303856"/>
+            </a:solidFill>
+          </a:ln>
+        </p:spPr>
+      </p:cxnSp>
+      <p:cxnSp>
+        <p:nvCxnSpPr>
+          <p:cNvPr name="GraphCompose Table Cell Border" id="56"/>
+          <p:cNvCxnSpPr/>
+          <p:nvPr/>
+        </p:nvCxnSpPr>
+        <p:spPr>
+          <a:xfrm>
+            <a:off x="6504889" y="2521534"/>
+            <a:ext cx="0" cy="267970"/>
+          </a:xfrm>
+          <a:prstGeom prst="line">
+            <a:avLst/>
+          </a:prstGeom>
+          <a:ln w="10160">
+            <a:solidFill>
+              <a:srgbClr val="303856"/>
+            </a:solidFill>
+          </a:ln>
+        </p:spPr>
+      </p:cxnSp>
+      <p:sp>
+        <p:nvSpPr>
+          <p:cNvPr name="GraphCompose Table Cell Text" id="57"/>
+          <p:cNvSpPr txBox="true"/>
+          <p:nvPr/>
+        </p:nvSpPr>
+        <p:spPr>
+          <a:xfrm>
+            <a:off x="5141163" y="2556494"/>
+            <a:ext cx="1068527" cy="140970"/>
+          </a:xfrm>
+          <a:prstGeom prst="rect">
+            <a:avLst/>
+          </a:prstGeom>
+        </p:spPr>
+        <p:txBody>
+          <a:bodyPr anchor="t" rtlCol="false" wrap="none" tIns="0" rIns="0" bIns="0" lIns="0">
+            <a:noAutofit/>
+          </a:bodyPr>
+          <a:lstStyle/>
+          <a:p>
+            <a:pPr algn="l">
+              <a:defRPr/>
+            </a:pPr>
+            <a:r>
+              <a:rPr lang="en-US" sz="1200" b="false" i="false" u="none" strike="noStrike" kern="0">
+                <a:solidFill>
+                  <a:srgbClr val="CED4E6"/>
+                </a:solidFill>
+                <a:latin typeface="Arial"/>
+              </a:rPr>
+              <a:t>5.7 ms · 0.2 MB</a:t>
+            </a:r>
+            <a:endParaRPr lang="en-US" sz="1100"/>
+          </a:p>
+        </p:txBody>
+      </p:sp>
+      <p:cxnSp>
+        <p:nvCxnSpPr>
+          <p:cNvPr name="GraphCompose Table Cell Border" id="58"/>
+          <p:cNvCxnSpPr/>
+          <p:nvPr/>
+        </p:nvCxnSpPr>
+        <p:spPr>
+          <a:xfrm>
+            <a:off x="660400" y="3057474"/>
+            <a:ext cx="1292657" cy="0"/>
+          </a:xfrm>
+          <a:prstGeom prst="line">
+            <a:avLst/>
+          </a:prstGeom>
+          <a:ln w="10160">
+            <a:solidFill>
+              <a:srgbClr val="303856"/>
+            </a:solidFill>
+          </a:ln>
+        </p:spPr>
+      </p:cxnSp>
+      <p:cxnSp>
+        <p:nvCxnSpPr>
+          <p:cNvPr name="GraphCompose Table Cell Border" id="59"/>
+          <p:cNvCxnSpPr/>
+          <p:nvPr/>
+        </p:nvCxnSpPr>
+        <p:spPr>
+          <a:xfrm>
+            <a:off x="660400" y="2789504"/>
+            <a:ext cx="0" cy="267970"/>
+          </a:xfrm>
+          <a:prstGeom prst="line">
+            <a:avLst/>
+          </a:prstGeom>
+          <a:ln w="10160">
+            <a:solidFill>
+              <a:srgbClr val="303856"/>
+            </a:solidFill>
+          </a:ln>
+        </p:spPr>
+      </p:cxnSp>
+      <p:cxnSp>
+        <p:nvCxnSpPr>
+          <p:cNvPr name="GraphCompose Table Cell Border" id="60"/>
+          <p:cNvCxnSpPr/>
+          <p:nvPr/>
+        </p:nvCxnSpPr>
+        <p:spPr>
+          <a:xfrm>
+            <a:off x="1947977" y="2789504"/>
+            <a:ext cx="0" cy="267970"/>
+          </a:xfrm>
+          <a:prstGeom prst="line">
+            <a:avLst/>
+          </a:prstGeom>
+          <a:ln w="10160">
+            <a:solidFill>
+              <a:srgbClr val="303856"/>
+            </a:solidFill>
+          </a:ln>
+        </p:spPr>
+      </p:cxnSp>
+      <p:sp>
+        <p:nvSpPr>
+          <p:cNvPr name="GraphCompose Table Cell Text" id="61"/>
+          <p:cNvSpPr txBox="true"/>
+          <p:nvPr/>
+        </p:nvSpPr>
+        <p:spPr>
+          <a:xfrm>
+            <a:off x="787400" y="2824464"/>
+            <a:ext cx="534822" cy="140970"/>
+          </a:xfrm>
+          <a:prstGeom prst="rect">
+            <a:avLst/>
+          </a:prstGeom>
+        </p:spPr>
+        <p:txBody>
+          <a:bodyPr anchor="t" rtlCol="false" wrap="none" tIns="0" rIns="0" bIns="0" lIns="0">
+            <a:noAutofit/>
+          </a:bodyPr>
+          <a:lstStyle/>
+          <a:p>
+            <a:pPr algn="l">
+              <a:defRPr/>
+            </a:pPr>
+            <a:r>
+              <a:rPr lang="en-US" sz="1200" b="false" i="false" u="none" strike="noStrike" kern="0">
+                <a:solidFill>
+                  <a:srgbClr val="CED4E6"/>
+                </a:solidFill>
+                <a:latin typeface="Arial"/>
+              </a:rPr>
+              <a:t>40 rows</a:t>
+            </a:r>
+            <a:endParaRPr lang="en-US" sz="1100"/>
+          </a:p>
+        </p:txBody>
+      </p:sp>
+      <p:cxnSp>
+        <p:nvCxnSpPr>
+          <p:cNvPr name="GraphCompose Table Cell Border" id="62"/>
+          <p:cNvCxnSpPr/>
+          <p:nvPr/>
+        </p:nvCxnSpPr>
+        <p:spPr>
+          <a:xfrm>
+            <a:off x="1942897" y="3057474"/>
+            <a:ext cx="1500886" cy="0"/>
+          </a:xfrm>
+          <a:prstGeom prst="line">
+            <a:avLst/>
+          </a:prstGeom>
+          <a:ln w="10160">
+            <a:solidFill>
+              <a:srgbClr val="303856"/>
+            </a:solidFill>
+          </a:ln>
+        </p:spPr>
+      </p:cxnSp>
+      <p:cxnSp>
+        <p:nvCxnSpPr>
+          <p:cNvPr name="GraphCompose Table Cell Border" id="63"/>
+          <p:cNvCxnSpPr/>
+          <p:nvPr/>
+        </p:nvCxnSpPr>
+        <p:spPr>
+          <a:xfrm>
+            <a:off x="3438703" y="2789504"/>
+            <a:ext cx="0" cy="267970"/>
+          </a:xfrm>
+          <a:prstGeom prst="line">
+            <a:avLst/>
+          </a:prstGeom>
+          <a:ln w="10160">
+            <a:solidFill>
+              <a:srgbClr val="303856"/>
+            </a:solidFill>
+          </a:ln>
+        </p:spPr>
+      </p:cxnSp>
+      <p:sp>
+        <p:nvSpPr>
+          <p:cNvPr name="GraphCompose Table Cell Text" id="64"/>
+          <p:cNvSpPr txBox="true"/>
+          <p:nvPr/>
+        </p:nvSpPr>
+        <p:spPr>
+          <a:xfrm>
+            <a:off x="2074977" y="2824464"/>
+            <a:ext cx="1068527" cy="140970"/>
+          </a:xfrm>
+          <a:prstGeom prst="rect">
+            <a:avLst/>
+          </a:prstGeom>
+        </p:spPr>
+        <p:txBody>
+          <a:bodyPr anchor="t" rtlCol="false" wrap="none" tIns="0" rIns="0" bIns="0" lIns="0">
+            <a:noAutofit/>
+          </a:bodyPr>
+          <a:lstStyle/>
+          <a:p>
+            <a:pPr algn="l">
+              <a:defRPr/>
+            </a:pPr>
+            <a:r>
+              <a:rPr lang="en-US" sz="1200" b="false" i="false" u="none" strike="noStrike" kern="0">
+                <a:solidFill>
+                  <a:srgbClr val="CED4E6"/>
+                </a:solidFill>
+                <a:latin typeface="Arial"/>
+              </a:rPr>
+              <a:t>5.7 ms · 1.0 MB</a:t>
+            </a:r>
+            <a:endParaRPr lang="en-US" sz="1100"/>
+          </a:p>
+        </p:txBody>
+      </p:sp>
+      <p:cxnSp>
+        <p:nvCxnSpPr>
+          <p:cNvPr name="GraphCompose Table Cell Border" id="65"/>
+          <p:cNvCxnSpPr/>
+          <p:nvPr/>
+        </p:nvCxnSpPr>
+        <p:spPr>
+          <a:xfrm>
+            <a:off x="3433623" y="3057474"/>
+            <a:ext cx="1585620" cy="0"/>
+          </a:xfrm>
+          <a:prstGeom prst="line">
+            <a:avLst/>
+          </a:prstGeom>
+          <a:ln w="10160">
+            <a:solidFill>
+              <a:srgbClr val="303856"/>
+            </a:solidFill>
+          </a:ln>
+        </p:spPr>
+      </p:cxnSp>
+      <p:cxnSp>
+        <p:nvCxnSpPr>
+          <p:cNvPr name="GraphCompose Table Cell Border" id="66"/>
+          <p:cNvCxnSpPr/>
+          <p:nvPr/>
+        </p:nvCxnSpPr>
+        <p:spPr>
+          <a:xfrm>
+            <a:off x="5014163" y="2789504"/>
+            <a:ext cx="0" cy="267970"/>
+          </a:xfrm>
+          <a:prstGeom prst="line">
+            <a:avLst/>
+          </a:prstGeom>
+          <a:ln w="10160">
+            <a:solidFill>
+              <a:srgbClr val="303856"/>
+            </a:solidFill>
+          </a:ln>
+        </p:spPr>
+      </p:cxnSp>
+      <p:sp>
+        <p:nvSpPr>
+          <p:cNvPr name="GraphCompose Table Cell Text" id="67"/>
+          <p:cNvSpPr txBox="true"/>
+          <p:nvPr/>
+        </p:nvSpPr>
+        <p:spPr>
+          <a:xfrm>
+            <a:off x="3565703" y="2824464"/>
+            <a:ext cx="1153262" cy="140970"/>
+          </a:xfrm>
+          <a:prstGeom prst="rect">
+            <a:avLst/>
+          </a:prstGeom>
+        </p:spPr>
+        <p:txBody>
+          <a:bodyPr anchor="t" rtlCol="false" wrap="none" tIns="0" rIns="0" bIns="0" lIns="0">
+            <a:noAutofit/>
+          </a:bodyPr>
+          <a:lstStyle/>
+          <a:p>
+            <a:pPr algn="l">
+              <a:defRPr/>
+            </a:pPr>
+            <a:r>
+              <a:rPr lang="en-US" sz="1200" b="false" i="false" u="none" strike="noStrike" kern="0">
+                <a:solidFill>
+                  <a:srgbClr val="CED4E6"/>
+                </a:solidFill>
+                <a:latin typeface="Arial"/>
+              </a:rPr>
+              <a:t>14.5 ms · 3.1 MB</a:t>
+            </a:r>
+            <a:endParaRPr lang="en-US" sz="1100"/>
+          </a:p>
+        </p:txBody>
+      </p:sp>
+      <p:cxnSp>
+        <p:nvCxnSpPr>
+          <p:cNvPr name="GraphCompose Table Cell Border" id="68"/>
+          <p:cNvCxnSpPr/>
+          <p:nvPr/>
+        </p:nvCxnSpPr>
+        <p:spPr>
+          <a:xfrm>
+            <a:off x="5009083" y="3057474"/>
+            <a:ext cx="1495806" cy="0"/>
+          </a:xfrm>
+          <a:prstGeom prst="line">
+            <a:avLst/>
+          </a:prstGeom>
+          <a:ln w="10160">
+            <a:solidFill>
+              <a:srgbClr val="303856"/>
+            </a:solidFill>
+          </a:ln>
+        </p:spPr>
+      </p:cxnSp>
+      <p:cxnSp>
+        <p:nvCxnSpPr>
+          <p:cNvPr name="GraphCompose Table Cell Border" id="69"/>
+          <p:cNvCxnSpPr/>
+          <p:nvPr/>
+        </p:nvCxnSpPr>
+        <p:spPr>
+          <a:xfrm>
+            <a:off x="6504889" y="2789504"/>
+            <a:ext cx="0" cy="267970"/>
+          </a:xfrm>
+          <a:prstGeom prst="line">
+            <a:avLst/>
+          </a:prstGeom>
+          <a:ln w="10160">
+            <a:solidFill>
+              <a:srgbClr val="303856"/>
+            </a:solidFill>
+          </a:ln>
+        </p:spPr>
+      </p:cxnSp>
+      <p:sp>
+        <p:nvSpPr>
+          <p:cNvPr name="GraphCompose Table Cell Text" id="70"/>
+          <p:cNvSpPr txBox="true"/>
+          <p:nvPr/>
+        </p:nvSpPr>
+        <p:spPr>
+          <a:xfrm>
+            <a:off x="5141163" y="2824464"/>
+            <a:ext cx="1068527" cy="140970"/>
+          </a:xfrm>
+          <a:prstGeom prst="rect">
+            <a:avLst/>
+          </a:prstGeom>
+        </p:spPr>
+        <p:txBody>
+          <a:bodyPr anchor="t" rtlCol="false" wrap="none" tIns="0" rIns="0" bIns="0" lIns="0">
+            <a:noAutofit/>
+          </a:bodyPr>
+          <a:lstStyle/>
+          <a:p>
+            <a:pPr algn="l">
+              <a:defRPr/>
+            </a:pPr>
+            <a:r>
+              <a:rPr lang="en-US" sz="1200" b="false" i="false" u="none" strike="noStrike" kern="0">
+                <a:solidFill>
+                  <a:srgbClr val="CED4E6"/>
+                </a:solidFill>
+                <a:latin typeface="Arial"/>
+              </a:rPr>
+              <a:t>9.9 ms · 2.5 MB</a:t>
+            </a:r>
+            <a:endParaRPr lang="en-US" sz="1100"/>
+          </a:p>
+        </p:txBody>
+      </p:sp>
+      <p:cxnSp>
+        <p:nvCxnSpPr>
+          <p:cNvPr name="GraphCompose Table Cell Border" id="71"/>
+          <p:cNvCxnSpPr/>
+          <p:nvPr/>
+        </p:nvCxnSpPr>
+        <p:spPr>
+          <a:xfrm>
+            <a:off x="660400" y="3325444"/>
+            <a:ext cx="1292657" cy="0"/>
+          </a:xfrm>
+          <a:prstGeom prst="line">
+            <a:avLst/>
+          </a:prstGeom>
+          <a:ln w="10160">
+            <a:solidFill>
+              <a:srgbClr val="303856"/>
+            </a:solidFill>
+          </a:ln>
+        </p:spPr>
+      </p:cxnSp>
+      <p:cxnSp>
+        <p:nvCxnSpPr>
+          <p:cNvPr name="GraphCompose Table Cell Border" id="72"/>
+          <p:cNvCxnSpPr/>
+          <p:nvPr/>
+        </p:nvCxnSpPr>
+        <p:spPr>
+          <a:xfrm>
+            <a:off x="660400" y="3057474"/>
+            <a:ext cx="0" cy="267970"/>
+          </a:xfrm>
+          <a:prstGeom prst="line">
+            <a:avLst/>
+          </a:prstGeom>
+          <a:ln w="10160">
+            <a:solidFill>
+              <a:srgbClr val="303856"/>
+            </a:solidFill>
+          </a:ln>
+        </p:spPr>
+      </p:cxnSp>
+      <p:cxnSp>
+        <p:nvCxnSpPr>
+          <p:cNvPr name="GraphCompose Table Cell Border" id="73"/>
+          <p:cNvCxnSpPr/>
+          <p:nvPr/>
+        </p:nvCxnSpPr>
+        <p:spPr>
+          <a:xfrm>
+            <a:off x="1947977" y="3057474"/>
+            <a:ext cx="0" cy="267970"/>
+          </a:xfrm>
+          <a:prstGeom prst="line">
+            <a:avLst/>
+          </a:prstGeom>
+          <a:ln w="10160">
+            <a:solidFill>
+              <a:srgbClr val="303856"/>
+            </a:solidFill>
+          </a:ln>
+        </p:spPr>
+      </p:cxnSp>
+      <p:sp>
+        <p:nvSpPr>
+          <p:cNvPr name="GraphCompose Table Cell Text" id="74"/>
+          <p:cNvSpPr txBox="true"/>
+          <p:nvPr/>
+        </p:nvSpPr>
+        <p:spPr>
+          <a:xfrm>
+            <a:off x="787400" y="3092434"/>
+            <a:ext cx="619557" cy="140970"/>
+          </a:xfrm>
+          <a:prstGeom prst="rect">
+            <a:avLst/>
+          </a:prstGeom>
+        </p:spPr>
+        <p:txBody>
+          <a:bodyPr anchor="t" rtlCol="false" wrap="none" tIns="0" rIns="0" bIns="0" lIns="0">
+            <a:noAutofit/>
+          </a:bodyPr>
+          <a:lstStyle/>
+          <a:p>
+            <a:pPr algn="l">
+              <a:defRPr/>
+            </a:pPr>
+            <a:r>
+              <a:rPr lang="en-US" sz="1200" b="false" i="false" u="none" strike="noStrike" kern="0">
+                <a:solidFill>
+                  <a:srgbClr val="CED4E6"/>
+                </a:solidFill>
+                <a:latin typeface="Arial"/>
+              </a:rPr>
+              <a:t>200 rows</a:t>
+            </a:r>
+            <a:endParaRPr lang="en-US" sz="1100"/>
+          </a:p>
+        </p:txBody>
+      </p:sp>
+      <p:cxnSp>
+        <p:nvCxnSpPr>
+          <p:cNvPr name="GraphCompose Table Cell Border" id="75"/>
+          <p:cNvCxnSpPr/>
+          <p:nvPr/>
+        </p:nvCxnSpPr>
+        <p:spPr>
+          <a:xfrm>
+            <a:off x="1942897" y="3325444"/>
+            <a:ext cx="1500886" cy="0"/>
+          </a:xfrm>
+          <a:prstGeom prst="line">
+            <a:avLst/>
+          </a:prstGeom>
+          <a:ln w="10160">
+            <a:solidFill>
+              <a:srgbClr val="303856"/>
+            </a:solidFill>
+          </a:ln>
+        </p:spPr>
+      </p:cxnSp>
+      <p:cxnSp>
+        <p:nvCxnSpPr>
+          <p:cNvPr name="GraphCompose Table Cell Border" id="76"/>
+          <p:cNvCxnSpPr/>
+          <p:nvPr/>
+        </p:nvCxnSpPr>
+        <p:spPr>
+          <a:xfrm>
+            <a:off x="3438703" y="3057474"/>
+            <a:ext cx="0" cy="267970"/>
+          </a:xfrm>
+          <a:prstGeom prst="line">
+            <a:avLst/>
+          </a:prstGeom>
+          <a:ln w="10160">
+            <a:solidFill>
+              <a:srgbClr val="303856"/>
+            </a:solidFill>
+          </a:ln>
+        </p:spPr>
+      </p:cxnSp>
+      <p:sp>
+        <p:nvSpPr>
+          <p:cNvPr name="GraphCompose Table Cell Text" id="77"/>
+          <p:cNvSpPr txBox="true"/>
+          <p:nvPr/>
+        </p:nvSpPr>
+        <p:spPr>
+          <a:xfrm>
+            <a:off x="2074977" y="3092434"/>
+            <a:ext cx="1153262" cy="140970"/>
+          </a:xfrm>
+          <a:prstGeom prst="rect">
+            <a:avLst/>
+          </a:prstGeom>
+        </p:spPr>
+        <p:txBody>
+          <a:bodyPr anchor="t" rtlCol="false" wrap="none" tIns="0" rIns="0" bIns="0" lIns="0">
+            <a:noAutofit/>
+          </a:bodyPr>
+          <a:lstStyle/>
+          <a:p>
+            <a:pPr algn="l">
+              <a:defRPr/>
+            </a:pPr>
+            <a:r>
+              <a:rPr lang="en-US" sz="1200" b="false" i="false" u="none" strike="noStrike" kern="0">
+                <a:solidFill>
+                  <a:srgbClr val="CED4E6"/>
+                </a:solidFill>
+                <a:latin typeface="Arial"/>
+              </a:rPr>
+              <a:t>15.3 ms · 3.9 MB</a:t>
+            </a:r>
+            <a:endParaRPr lang="en-US" sz="1100"/>
+          </a:p>
+        </p:txBody>
+      </p:sp>
+      <p:cxnSp>
+        <p:nvCxnSpPr>
+          <p:cNvPr name="GraphCompose Table Cell Border" id="78"/>
+          <p:cNvCxnSpPr/>
+          <p:nvPr/>
+        </p:nvCxnSpPr>
+        <p:spPr>
+          <a:xfrm>
+            <a:off x="3433623" y="3325444"/>
+            <a:ext cx="1585620" cy="0"/>
+          </a:xfrm>
+          <a:prstGeom prst="line">
+            <a:avLst/>
+          </a:prstGeom>
+          <a:ln w="10160">
+            <a:solidFill>
+              <a:srgbClr val="303856"/>
+            </a:solidFill>
+          </a:ln>
+        </p:spPr>
+      </p:cxnSp>
+      <p:cxnSp>
+        <p:nvCxnSpPr>
+          <p:cNvPr name="GraphCompose Table Cell Border" id="79"/>
+          <p:cNvCxnSpPr/>
+          <p:nvPr/>
+        </p:nvCxnSpPr>
+        <p:spPr>
+          <a:xfrm>
+            <a:off x="5014163" y="3057474"/>
+            <a:ext cx="0" cy="267970"/>
+          </a:xfrm>
+          <a:prstGeom prst="line">
+            <a:avLst/>
+          </a:prstGeom>
+          <a:ln w="10160">
+            <a:solidFill>
+              <a:srgbClr val="303856"/>
+            </a:solidFill>
+          </a:ln>
+        </p:spPr>
+      </p:cxnSp>
+      <p:sp>
+        <p:nvSpPr>
+          <p:cNvPr name="GraphCompose Table Cell Text" id="80"/>
+          <p:cNvSpPr txBox="true"/>
+          <p:nvPr/>
+        </p:nvSpPr>
+        <p:spPr>
+          <a:xfrm>
+            <a:off x="3565703" y="3092434"/>
+            <a:ext cx="1237996" cy="140970"/>
+          </a:xfrm>
+          <a:prstGeom prst="rect">
+            <a:avLst/>
+          </a:prstGeom>
+        </p:spPr>
+        <p:txBody>
+          <a:bodyPr anchor="t" rtlCol="false" wrap="none" tIns="0" rIns="0" bIns="0" lIns="0">
+            <a:noAutofit/>
+          </a:bodyPr>
+          <a:lstStyle/>
+          <a:p>
+            <a:pPr algn="l">
+              <a:defRPr/>
+            </a:pPr>
+            <a:r>
+              <a:rPr lang="en-US" sz="1200" b="false" i="false" u="none" strike="noStrike" kern="0">
+                <a:solidFill>
+                  <a:srgbClr val="CED4E6"/>
+                </a:solidFill>
+                <a:latin typeface="Arial"/>
+              </a:rPr>
+              <a:t>57.6 ms · 13.8 MB</a:t>
+            </a:r>
+            <a:endParaRPr lang="en-US" sz="1100"/>
+          </a:p>
+        </p:txBody>
+      </p:sp>
+      <p:cxnSp>
+        <p:nvCxnSpPr>
+          <p:cNvPr name="GraphCompose Table Cell Border" id="81"/>
+          <p:cNvCxnSpPr/>
+          <p:nvPr/>
+        </p:nvCxnSpPr>
+        <p:spPr>
+          <a:xfrm>
+            <a:off x="5009083" y="3325444"/>
+            <a:ext cx="1495806" cy="0"/>
+          </a:xfrm>
+          <a:prstGeom prst="line">
+            <a:avLst/>
+          </a:prstGeom>
+          <a:ln w="10160">
+            <a:solidFill>
+              <a:srgbClr val="303856"/>
+            </a:solidFill>
+          </a:ln>
+        </p:spPr>
+      </p:cxnSp>
+      <p:cxnSp>
+        <p:nvCxnSpPr>
+          <p:cNvPr name="GraphCompose Table Cell Border" id="82"/>
+          <p:cNvCxnSpPr/>
+          <p:nvPr/>
+        </p:nvCxnSpPr>
+        <p:spPr>
+          <a:xfrm>
+            <a:off x="6504889" y="3057474"/>
+            <a:ext cx="0" cy="267970"/>
+          </a:xfrm>
+          <a:prstGeom prst="line">
+            <a:avLst/>
+          </a:prstGeom>
+          <a:ln w="10160">
+            <a:solidFill>
+              <a:srgbClr val="303856"/>
+            </a:solidFill>
+          </a:ln>
+        </p:spPr>
+      </p:cxnSp>
+      <p:sp>
+        <p:nvSpPr>
+          <p:cNvPr name="GraphCompose Table Cell Text" id="83"/>
+          <p:cNvSpPr txBox="true"/>
+          <p:nvPr/>
+        </p:nvSpPr>
+        <p:spPr>
+          <a:xfrm>
+            <a:off x="5141163" y="3092434"/>
+            <a:ext cx="1237996" cy="140970"/>
+          </a:xfrm>
+          <a:prstGeom prst="rect">
+            <a:avLst/>
+          </a:prstGeom>
+        </p:spPr>
+        <p:txBody>
+          <a:bodyPr anchor="t" rtlCol="false" wrap="none" tIns="0" rIns="0" bIns="0" lIns="0">
+            <a:noAutofit/>
+          </a:bodyPr>
+          <a:lstStyle/>
+          <a:p>
+            <a:pPr algn="l">
+              <a:defRPr/>
+            </a:pPr>
+            <a:r>
+              <a:rPr lang="en-US" sz="1200" b="false" i="false" u="none" strike="noStrike" kern="0">
+                <a:solidFill>
+                  <a:srgbClr val="CED4E6"/>
+                </a:solidFill>
+                <a:latin typeface="Arial"/>
+              </a:rPr>
+              <a:t>21.1 ms · 10.8 MB</a:t>
+            </a:r>
+            <a:endParaRPr lang="en-US" sz="1100"/>
+          </a:p>
+        </p:txBody>
+      </p:sp>
+      <p:cxnSp>
+        <p:nvCxnSpPr>
+          <p:cNvPr name="GraphCompose Table Cell Border" id="84"/>
+          <p:cNvCxnSpPr/>
+          <p:nvPr/>
+        </p:nvCxnSpPr>
+        <p:spPr>
+          <a:xfrm>
+            <a:off x="660400" y="3593414"/>
+            <a:ext cx="1292657" cy="0"/>
+          </a:xfrm>
+          <a:prstGeom prst="line">
+            <a:avLst/>
+          </a:prstGeom>
+          <a:ln w="10160">
+            <a:solidFill>
+              <a:srgbClr val="303856"/>
+            </a:solidFill>
+          </a:ln>
+        </p:spPr>
+      </p:cxnSp>
+      <p:cxnSp>
+        <p:nvCxnSpPr>
+          <p:cNvPr name="GraphCompose Table Cell Border" id="85"/>
+          <p:cNvCxnSpPr/>
+          <p:nvPr/>
+        </p:nvCxnSpPr>
+        <p:spPr>
+          <a:xfrm>
+            <a:off x="660400" y="3325444"/>
+            <a:ext cx="0" cy="267970"/>
+          </a:xfrm>
+          <a:prstGeom prst="line">
+            <a:avLst/>
+          </a:prstGeom>
+          <a:ln w="10160">
+            <a:solidFill>
+              <a:srgbClr val="303856"/>
+            </a:solidFill>
+          </a:ln>
+        </p:spPr>
+      </p:cxnSp>
+      <p:cxnSp>
+        <p:nvCxnSpPr>
+          <p:cNvPr name="GraphCompose Table Cell Border" id="86"/>
+          <p:cNvCxnSpPr/>
+          <p:nvPr/>
+        </p:nvCxnSpPr>
+        <p:spPr>
+          <a:xfrm>
+            <a:off x="1947977" y="3325444"/>
+            <a:ext cx="0" cy="267970"/>
+          </a:xfrm>
+          <a:prstGeom prst="line">
+            <a:avLst/>
+          </a:prstGeom>
+          <a:ln w="10160">
+            <a:solidFill>
+              <a:srgbClr val="303856"/>
+            </a:solidFill>
+          </a:ln>
+        </p:spPr>
+      </p:cxnSp>
+      <p:sp>
+        <p:nvSpPr>
+          <p:cNvPr name="GraphCompose Table Cell Text" id="87"/>
+          <p:cNvSpPr txBox="true"/>
+          <p:nvPr/>
+        </p:nvSpPr>
+        <p:spPr>
+          <a:xfrm>
+            <a:off x="787400" y="3360404"/>
+            <a:ext cx="704291" cy="140970"/>
+          </a:xfrm>
+          <a:prstGeom prst="rect">
+            <a:avLst/>
+          </a:prstGeom>
+        </p:spPr>
+        <p:txBody>
+          <a:bodyPr anchor="t" rtlCol="false" wrap="none" tIns="0" rIns="0" bIns="0" lIns="0">
+            <a:noAutofit/>
+          </a:bodyPr>
+          <a:lstStyle/>
+          <a:p>
+            <a:pPr algn="l">
+              <a:defRPr/>
+            </a:pPr>
+            <a:r>
+              <a:rPr lang="en-US" sz="1200" b="false" i="false" u="none" strike="noStrike" kern="0">
+                <a:solidFill>
+                  <a:srgbClr val="CED4E6"/>
+                </a:solidFill>
+                <a:latin typeface="Arial"/>
+              </a:rPr>
+              <a:t>1000 rows</a:t>
+            </a:r>
+            <a:endParaRPr lang="en-US" sz="1100"/>
+          </a:p>
+        </p:txBody>
+      </p:sp>
+      <p:cxnSp>
+        <p:nvCxnSpPr>
+          <p:cNvPr name="GraphCompose Table Cell Border" id="88"/>
+          <p:cNvCxnSpPr/>
+          <p:nvPr/>
+        </p:nvCxnSpPr>
+        <p:spPr>
+          <a:xfrm>
+            <a:off x="1942897" y="3593414"/>
+            <a:ext cx="1500886" cy="0"/>
+          </a:xfrm>
+          <a:prstGeom prst="line">
+            <a:avLst/>
+          </a:prstGeom>
+          <a:ln w="10160">
+            <a:solidFill>
+              <a:srgbClr val="303856"/>
+            </a:solidFill>
+          </a:ln>
+        </p:spPr>
+      </p:cxnSp>
+      <p:cxnSp>
+        <p:nvCxnSpPr>
+          <p:cNvPr name="GraphCompose Table Cell Border" id="89"/>
+          <p:cNvCxnSpPr/>
+          <p:nvPr/>
+        </p:nvCxnSpPr>
+        <p:spPr>
+          <a:xfrm>
+            <a:off x="3438703" y="3325444"/>
+            <a:ext cx="0" cy="267970"/>
+          </a:xfrm>
+          <a:prstGeom prst="line">
+            <a:avLst/>
+          </a:prstGeom>
+          <a:ln w="10160">
+            <a:solidFill>
+              <a:srgbClr val="303856"/>
+            </a:solidFill>
+          </a:ln>
+        </p:spPr>
+      </p:cxnSp>
+      <p:sp>
+        <p:nvSpPr>
+          <p:cNvPr name="GraphCompose Table Cell Text" id="90"/>
+          <p:cNvSpPr txBox="true"/>
+          <p:nvPr/>
+        </p:nvSpPr>
+        <p:spPr>
+          <a:xfrm>
+            <a:off x="2074977" y="3360404"/>
+            <a:ext cx="1237996" cy="140970"/>
+          </a:xfrm>
+          <a:prstGeom prst="rect">
+            <a:avLst/>
+          </a:prstGeom>
+        </p:spPr>
+        <p:txBody>
+          <a:bodyPr anchor="t" rtlCol="false" wrap="none" tIns="0" rIns="0" bIns="0" lIns="0">
+            <a:noAutofit/>
+          </a:bodyPr>
+          <a:lstStyle/>
+          <a:p>
+            <a:pPr algn="l">
+              <a:defRPr/>
+            </a:pPr>
+            <a:r>
+              <a:rPr lang="en-US" sz="1200" b="false" i="false" u="none" strike="noStrike" kern="0">
+                <a:solidFill>
+                  <a:srgbClr val="CED4E6"/>
+                </a:solidFill>
+                <a:latin typeface="Arial"/>
+              </a:rPr>
+              <a:t>64.1 ms · 19.2 MB</a:t>
+            </a:r>
+            <a:endParaRPr lang="en-US" sz="1100"/>
+          </a:p>
+        </p:txBody>
+      </p:sp>
+      <p:cxnSp>
+        <p:nvCxnSpPr>
+          <p:cNvPr name="GraphCompose Table Cell Border" id="91"/>
+          <p:cNvCxnSpPr/>
+          <p:nvPr/>
+        </p:nvCxnSpPr>
+        <p:spPr>
+          <a:xfrm>
+            <a:off x="3433623" y="3593414"/>
+            <a:ext cx="1585620" cy="0"/>
+          </a:xfrm>
+          <a:prstGeom prst="line">
+            <a:avLst/>
+          </a:prstGeom>
+          <a:ln w="10160">
+            <a:solidFill>
+              <a:srgbClr val="303856"/>
+            </a:solidFill>
+          </a:ln>
+        </p:spPr>
+      </p:cxnSp>
+      <p:cxnSp>
+        <p:nvCxnSpPr>
+          <p:cNvPr name="GraphCompose Table Cell Border" id="92"/>
+          <p:cNvCxnSpPr/>
+          <p:nvPr/>
+        </p:nvCxnSpPr>
+        <p:spPr>
+          <a:xfrm>
+            <a:off x="5014163" y="3325444"/>
+            <a:ext cx="0" cy="267970"/>
+          </a:xfrm>
+          <a:prstGeom prst="line">
+            <a:avLst/>
+          </a:prstGeom>
+          <a:ln w="10160">
+            <a:solidFill>
+              <a:srgbClr val="303856"/>
+            </a:solidFill>
+          </a:ln>
+        </p:spPr>
+      </p:cxnSp>
+      <p:sp>
+        <p:nvSpPr>
+          <p:cNvPr name="GraphCompose Table Cell Text" id="93"/>
+          <p:cNvSpPr txBox="true"/>
+          <p:nvPr/>
+        </p:nvSpPr>
+        <p:spPr>
+          <a:xfrm>
+            <a:off x="3565703" y="3360404"/>
+            <a:ext cx="1322730" cy="140970"/>
+          </a:xfrm>
+          <a:prstGeom prst="rect">
+            <a:avLst/>
+          </a:prstGeom>
+        </p:spPr>
+        <p:txBody>
+          <a:bodyPr anchor="t" rtlCol="false" wrap="none" tIns="0" rIns="0" bIns="0" lIns="0">
+            <a:noAutofit/>
+          </a:bodyPr>
+          <a:lstStyle/>
+          <a:p>
+            <a:pPr algn="l">
+              <a:defRPr/>
+            </a:pPr>
+            <a:r>
+              <a:rPr lang="en-US" sz="1200" b="false" i="false" u="none" strike="noStrike" kern="0">
+                <a:solidFill>
+                  <a:srgbClr val="CED4E6"/>
+                </a:solidFill>
+                <a:latin typeface="Arial"/>
+              </a:rPr>
+              <a:t>291.0 ms · 68.2 MB</a:t>
+            </a:r>
+            <a:endParaRPr lang="en-US" sz="1100"/>
+          </a:p>
+        </p:txBody>
+      </p:sp>
+      <p:cxnSp>
+        <p:nvCxnSpPr>
+          <p:cNvPr name="GraphCompose Table Cell Border" id="94"/>
+          <p:cNvCxnSpPr/>
+          <p:nvPr/>
+        </p:nvCxnSpPr>
+        <p:spPr>
+          <a:xfrm>
+            <a:off x="5009083" y="3593414"/>
+            <a:ext cx="1495806" cy="0"/>
+          </a:xfrm>
+          <a:prstGeom prst="line">
+            <a:avLst/>
+          </a:prstGeom>
+          <a:ln w="10160">
+            <a:solidFill>
+              <a:srgbClr val="303856"/>
+            </a:solidFill>
+          </a:ln>
+        </p:spPr>
+      </p:cxnSp>
+      <p:cxnSp>
+        <p:nvCxnSpPr>
+          <p:cNvPr name="GraphCompose Table Cell Border" id="95"/>
+          <p:cNvCxnSpPr/>
+          <p:nvPr/>
+        </p:nvCxnSpPr>
+        <p:spPr>
+          <a:xfrm>
+            <a:off x="6504889" y="3325444"/>
+            <a:ext cx="0" cy="267970"/>
+          </a:xfrm>
+          <a:prstGeom prst="line">
+            <a:avLst/>
+          </a:prstGeom>
+          <a:ln w="10160">
+            <a:solidFill>
+              <a:srgbClr val="303856"/>
+            </a:solidFill>
+          </a:ln>
+        </p:spPr>
+      </p:cxnSp>
+      <p:sp>
+        <p:nvSpPr>
+          <p:cNvPr name="GraphCompose Table Cell Text" id="96"/>
+          <p:cNvSpPr txBox="true"/>
+          <p:nvPr/>
+        </p:nvSpPr>
+        <p:spPr>
+          <a:xfrm>
+            <a:off x="5141163" y="3360404"/>
+            <a:ext cx="1237996" cy="140970"/>
+          </a:xfrm>
+          <a:prstGeom prst="rect">
+            <a:avLst/>
+          </a:prstGeom>
+        </p:spPr>
+        <p:txBody>
+          <a:bodyPr anchor="t" rtlCol="false" wrap="none" tIns="0" rIns="0" bIns="0" lIns="0">
+            <a:noAutofit/>
+          </a:bodyPr>
+          <a:lstStyle/>
+          <a:p>
+            <a:pPr algn="l">
+              <a:defRPr/>
+            </a:pPr>
+            <a:r>
+              <a:rPr lang="en-US" sz="1200" b="false" i="false" u="none" strike="noStrike" kern="0">
+                <a:solidFill>
+                  <a:srgbClr val="CED4E6"/>
+                </a:solidFill>
+                <a:latin typeface="Arial"/>
+              </a:rPr>
+              <a:t>64.8 ms · 52.5 MB</a:t>
+            </a:r>
+            <a:endParaRPr lang="en-US" sz="1100"/>
+          </a:p>
+        </p:txBody>
+      </p:sp>
+      <p:sp>
+        <p:nvSpPr>
+          <p:cNvPr name="AutoShape 97" id="97"/>
+          <p:cNvSpPr/>
+          <p:nvPr/>
+        </p:nvSpPr>
+        <p:spPr>
+          <a:xfrm>
+            <a:off x="660400" y="3847414"/>
+            <a:ext cx="3505200" cy="915353"/>
+          </a:xfrm>
+          <a:prstGeom prst="roundRect">
+            <a:avLst>
+              <a:gd name="adj" fmla="val 13874"/>
+            </a:avLst>
+          </a:prstGeom>
+          <a:solidFill>
+            <a:srgbClr val="141A2F"/>
+          </a:solidFill>
+          <a:ln>
+            <a:noFill/>
+          </a:ln>
+        </p:spPr>
+      </p:sp>
+      <p:cxnSp>
+        <p:nvCxnSpPr>
+          <p:cNvPr name="Connector 98" id="98"/>
+          <p:cNvCxnSpPr/>
+          <p:nvPr/>
+        </p:nvCxnSpPr>
+        <p:spPr>
+          <a:xfrm>
+            <a:off x="660400" y="3847414"/>
+            <a:ext cx="3505200" cy="0"/>
+          </a:xfrm>
+          <a:prstGeom prst="line">
+            <a:avLst/>
+          </a:prstGeom>
+          <a:ln w="38100">
+            <a:solidFill>
+              <a:srgbClr val="E9972D"/>
+            </a:solidFill>
+          </a:ln>
+        </p:spPr>
+      </p:cxnSp>
+      <p:sp>
+        <p:nvSpPr>
+          <p:cNvPr name="GraphCompose Text Line" id="99"/>
+          <p:cNvSpPr txBox="true"/>
+          <p:nvPr/>
+        </p:nvSpPr>
+        <p:spPr>
+          <a:xfrm>
+            <a:off x="863600" y="3984020"/>
+            <a:ext cx="693268" cy="328930"/>
+          </a:xfrm>
+          <a:prstGeom prst="rect">
+            <a:avLst/>
+          </a:prstGeom>
+        </p:spPr>
+        <p:txBody>
+          <a:bodyPr anchor="t" rtlCol="false" wrap="none" tIns="0" rIns="0" bIns="0" lIns="0">
+            <a:noAutofit/>
+          </a:bodyPr>
+          <a:lstStyle/>
+          <a:p>
+            <a:pPr algn="l">
+              <a:lnSpc>
+                <a:spcPct val="100000"/>
+              </a:lnSpc>
+              <a:spcBef>
+                <a:spcPct val="0"/>
+              </a:spcBef>
+              <a:spcAft>
+                <a:spcPct val="0"/>
+              </a:spcAft>
+              <a:defRPr/>
+            </a:pPr>
+            <a:r>
+              <a:rPr lang="en-US" sz="2800" b="true" i="false" u="none" strike="noStrike" kern="0">
+                <a:solidFill>
+                  <a:srgbClr val="E9972D"/>
+                </a:solidFill>
+                <a:latin typeface="Arial"/>
+              </a:rPr>
+              <a:t>4.5x</a:t>
+            </a:r>
+            <a:endParaRPr lang="en-US" sz="1100"/>
+          </a:p>
+        </p:txBody>
+      </p:sp>
+      <p:sp>
+        <p:nvSpPr>
+          <p:cNvPr name="GraphCompose Text Line" id="100"/>
+          <p:cNvSpPr txBox="true"/>
+          <p:nvPr/>
+        </p:nvSpPr>
+        <p:spPr>
+          <a:xfrm>
+            <a:off x="863600" y="4404182"/>
+            <a:ext cx="1958048" cy="129222"/>
+          </a:xfrm>
+          <a:prstGeom prst="rect">
+            <a:avLst/>
+          </a:prstGeom>
+        </p:spPr>
+        <p:txBody>
+          <a:bodyPr anchor="t" rtlCol="false" wrap="none" tIns="0" rIns="0" bIns="0" lIns="0">
+            <a:noAutofit/>
+          </a:bodyPr>
+          <a:lstStyle/>
+          <a:p>
+            <a:pPr algn="l">
+              <a:lnSpc>
+                <a:spcPct val="100000"/>
+              </a:lnSpc>
+              <a:spcBef>
+                <a:spcPct val="0"/>
+              </a:spcBef>
+              <a:spcAft>
+                <a:spcPct val="0"/>
+              </a:spcAft>
+              <a:defRPr/>
+            </a:pPr>
+            <a:r>
+              <a:rPr lang="en-US" sz="1100" b="false" i="false" u="none" strike="noStrike" kern="0">
+                <a:solidFill>
+                  <a:srgbClr val="8C95AF"/>
+                </a:solidFill>
+                <a:latin typeface="Arial"/>
+              </a:rPr>
+              <a:t>faster than iText 9 at 1000 rows</a:t>
+            </a:r>
+            <a:endParaRPr lang="en-US" sz="1100"/>
+          </a:p>
+        </p:txBody>
+      </p:sp>
+      <p:sp>
+        <p:nvSpPr>
+          <p:cNvPr name="AutoShape 101" id="101"/>
+          <p:cNvSpPr/>
+          <p:nvPr/>
+        </p:nvSpPr>
+        <p:spPr>
+          <a:xfrm>
+            <a:off x="4343400" y="3847414"/>
+            <a:ext cx="3505200" cy="915353"/>
+          </a:xfrm>
+          <a:prstGeom prst="roundRect">
+            <a:avLst>
+              <a:gd name="adj" fmla="val 13874"/>
+            </a:avLst>
+          </a:prstGeom>
+          <a:solidFill>
+            <a:srgbClr val="141A2F"/>
+          </a:solidFill>
+          <a:ln>
+            <a:noFill/>
+          </a:ln>
+        </p:spPr>
+      </p:sp>
+      <p:cxnSp>
+        <p:nvCxnSpPr>
+          <p:cNvPr name="Connector 102" id="102"/>
+          <p:cNvCxnSpPr/>
+          <p:nvPr/>
+        </p:nvCxnSpPr>
+        <p:spPr>
+          <a:xfrm>
+            <a:off x="4343400" y="3847414"/>
+            <a:ext cx="3505200" cy="0"/>
+          </a:xfrm>
+          <a:prstGeom prst="line">
+            <a:avLst/>
+          </a:prstGeom>
+          <a:ln w="38100">
+            <a:solidFill>
+              <a:srgbClr val="7A85A8"/>
+            </a:solidFill>
+          </a:ln>
+        </p:spPr>
+      </p:cxnSp>
+      <p:sp>
+        <p:nvSpPr>
+          <p:cNvPr name="GraphCompose Text Line" id="103"/>
+          <p:cNvSpPr txBox="true"/>
+          <p:nvPr/>
+        </p:nvSpPr>
+        <p:spPr>
+          <a:xfrm>
+            <a:off x="4546600" y="3984020"/>
+            <a:ext cx="693268" cy="328930"/>
+          </a:xfrm>
+          <a:prstGeom prst="rect">
+            <a:avLst/>
+          </a:prstGeom>
+        </p:spPr>
+        <p:txBody>
+          <a:bodyPr anchor="t" rtlCol="false" wrap="none" tIns="0" rIns="0" bIns="0" lIns="0">
+            <a:noAutofit/>
+          </a:bodyPr>
+          <a:lstStyle/>
+          <a:p>
+            <a:pPr algn="l">
+              <a:lnSpc>
+                <a:spcPct val="100000"/>
+              </a:lnSpc>
+              <a:spcBef>
+                <a:spcPct val="0"/>
+              </a:spcBef>
+              <a:spcAft>
+                <a:spcPct val="0"/>
+              </a:spcAft>
+              <a:defRPr/>
+            </a:pPr>
+            <a:r>
+              <a:rPr lang="en-US" sz="2800" b="true" i="false" u="none" strike="noStrike" kern="0">
+                <a:solidFill>
+                  <a:srgbClr val="7A85A8"/>
+                </a:solidFill>
+                <a:latin typeface="Arial"/>
+              </a:rPr>
+              <a:t>3.6x</a:t>
+            </a:r>
+            <a:endParaRPr lang="en-US" sz="1100"/>
+          </a:p>
+        </p:txBody>
+      </p:sp>
+      <p:sp>
+        <p:nvSpPr>
+          <p:cNvPr name="GraphCompose Text Line" id="104"/>
+          <p:cNvSpPr txBox="true"/>
+          <p:nvPr/>
+        </p:nvSpPr>
+        <p:spPr>
+          <a:xfrm>
+            <a:off x="4546600" y="4404182"/>
+            <a:ext cx="1150442" cy="129222"/>
+          </a:xfrm>
+          <a:prstGeom prst="rect">
+            <a:avLst/>
+          </a:prstGeom>
+        </p:spPr>
+        <p:txBody>
+          <a:bodyPr anchor="t" rtlCol="false" wrap="none" tIns="0" rIns="0" bIns="0" lIns="0">
+            <a:noAutofit/>
+          </a:bodyPr>
+          <a:lstStyle/>
+          <a:p>
+            <a:pPr algn="l">
+              <a:lnSpc>
+                <a:spcPct val="100000"/>
+              </a:lnSpc>
+              <a:spcBef>
+                <a:spcPct val="0"/>
+              </a:spcBef>
+              <a:spcAft>
+                <a:spcPct val="0"/>
+              </a:spcAft>
+              <a:defRPr/>
+            </a:pPr>
+            <a:r>
+              <a:rPr lang="en-US" sz="1100" b="false" i="false" u="none" strike="noStrike" kern="0">
+                <a:solidFill>
+                  <a:srgbClr val="8C95AF"/>
+                </a:solidFill>
+                <a:latin typeface="Arial"/>
+              </a:rPr>
+              <a:t>lighter than iText 9</a:t>
+            </a:r>
+            <a:endParaRPr lang="en-US" sz="1100"/>
+          </a:p>
+        </p:txBody>
+      </p:sp>
+      <p:sp>
+        <p:nvSpPr>
+          <p:cNvPr name="AutoShape 105" id="105"/>
+          <p:cNvSpPr/>
+          <p:nvPr/>
+        </p:nvSpPr>
+        <p:spPr>
+          <a:xfrm>
+            <a:off x="8026400" y="3847414"/>
+            <a:ext cx="3505200" cy="915353"/>
+          </a:xfrm>
+          <a:prstGeom prst="roundRect">
+            <a:avLst>
+              <a:gd name="adj" fmla="val 13874"/>
+            </a:avLst>
+          </a:prstGeom>
+          <a:solidFill>
+            <a:srgbClr val="141A2F"/>
+          </a:solidFill>
+          <a:ln>
+            <a:noFill/>
+          </a:ln>
+        </p:spPr>
+      </p:sp>
+      <p:cxnSp>
+        <p:nvCxnSpPr>
+          <p:cNvPr name="Connector 106" id="106"/>
+          <p:cNvCxnSpPr/>
+          <p:nvPr/>
+        </p:nvCxnSpPr>
+        <p:spPr>
+          <a:xfrm>
+            <a:off x="8026400" y="3847414"/>
+            <a:ext cx="3505200" cy="0"/>
+          </a:xfrm>
+          <a:prstGeom prst="line">
+            <a:avLst/>
+          </a:prstGeom>
+          <a:ln w="38100">
+            <a:solidFill>
+              <a:srgbClr val="5DC88F"/>
+            </a:solidFill>
+          </a:ln>
+        </p:spPr>
+      </p:cxnSp>
+      <p:sp>
+        <p:nvSpPr>
+          <p:cNvPr name="GraphCompose Text Line" id="107"/>
+          <p:cNvSpPr txBox="true"/>
+          <p:nvPr/>
+        </p:nvSpPr>
+        <p:spPr>
+          <a:xfrm>
+            <a:off x="8229600" y="3984020"/>
+            <a:ext cx="693268" cy="328930"/>
+          </a:xfrm>
+          <a:prstGeom prst="rect">
+            <a:avLst/>
+          </a:prstGeom>
+        </p:spPr>
+        <p:txBody>
+          <a:bodyPr anchor="t" rtlCol="false" wrap="none" tIns="0" rIns="0" bIns="0" lIns="0">
+            <a:noAutofit/>
+          </a:bodyPr>
+          <a:lstStyle/>
+          <a:p>
+            <a:pPr algn="l">
+              <a:lnSpc>
+                <a:spcPct val="100000"/>
+              </a:lnSpc>
+              <a:spcBef>
+                <a:spcPct val="0"/>
+              </a:spcBef>
+              <a:spcAft>
+                <a:spcPct val="0"/>
+              </a:spcAft>
+              <a:defRPr/>
+            </a:pPr>
+            <a:r>
+              <a:rPr lang="en-US" sz="2800" b="true" i="false" u="none" strike="noStrike" kern="0">
+                <a:solidFill>
+                  <a:srgbClr val="5DC88F"/>
+                </a:solidFill>
+                <a:latin typeface="Arial"/>
+              </a:rPr>
+              <a:t>2.7x</a:t>
+            </a:r>
+            <a:endParaRPr lang="en-US" sz="1100"/>
+          </a:p>
+        </p:txBody>
+      </p:sp>
+      <p:sp>
+        <p:nvSpPr>
+          <p:cNvPr name="GraphCompose Text Line" id="108"/>
+          <p:cNvSpPr txBox="true"/>
+          <p:nvPr/>
+        </p:nvSpPr>
+        <p:spPr>
+          <a:xfrm>
+            <a:off x="8229600" y="4404182"/>
+            <a:ext cx="1639532" cy="129222"/>
+          </a:xfrm>
+          <a:prstGeom prst="rect">
+            <a:avLst/>
+          </a:prstGeom>
+        </p:spPr>
+        <p:txBody>
+          <a:bodyPr anchor="t" rtlCol="false" wrap="none" tIns="0" rIns="0" bIns="0" lIns="0">
+            <a:noAutofit/>
+          </a:bodyPr>
+          <a:lstStyle/>
+          <a:p>
+            <a:pPr algn="l">
+              <a:lnSpc>
+                <a:spcPct val="100000"/>
+              </a:lnSpc>
+              <a:spcBef>
+                <a:spcPct val="0"/>
+              </a:spcBef>
+              <a:spcAft>
+                <a:spcPct val="0"/>
+              </a:spcAft>
+              <a:defRPr/>
+            </a:pPr>
+            <a:r>
+              <a:rPr lang="en-US" sz="1100" b="false" i="false" u="none" strike="noStrike" kern="0">
+                <a:solidFill>
+                  <a:srgbClr val="8C95AF"/>
+                </a:solidFill>
+                <a:latin typeface="Arial"/>
+              </a:rPr>
+              <a:t>lighter than JasperReports</a:t>
+            </a:r>
+            <a:endParaRPr lang="en-US" sz="1100"/>
+          </a:p>
+        </p:txBody>
+      </p:sp>
+      <p:sp>
+        <p:nvSpPr>
+          <p:cNvPr name="GraphCompose Text Line" id="109"/>
+          <p:cNvSpPr txBox="true"/>
+          <p:nvPr/>
+        </p:nvSpPr>
+        <p:spPr>
+          <a:xfrm>
+            <a:off x="660400" y="4968772"/>
+            <a:ext cx="10328427" cy="111601"/>
+          </a:xfrm>
+          <a:prstGeom prst="rect">
+            <a:avLst/>
+          </a:prstGeom>
+        </p:spPr>
+        <p:txBody>
+          <a:bodyPr anchor="t" rtlCol="false" wrap="none" tIns="0" rIns="0" bIns="0" lIns="0">
+            <a:noAutofit/>
+          </a:bodyPr>
+          <a:lstStyle/>
+          <a:p>
+            <a:pPr algn="l">
+              <a:lnSpc>
+                <a:spcPct val="100000"/>
+              </a:lnSpc>
+              <a:spcBef>
+                <a:spcPct val="0"/>
+              </a:spcBef>
+              <a:spcAft>
+                <a:spcPct val="0"/>
+              </a:spcAft>
+              <a:defRPr/>
+            </a:pPr>
+            <a:r>
+              <a:rPr lang="en-US" sz="950" b="false" i="false" u="none" strike="noStrike" kern="0">
+                <a:solidFill>
+                  <a:srgbClr val="68728E"/>
+                </a:solidFill>
+                <a:latin typeface="Arial"/>
+              </a:rPr>
+              <a:t>Measured 2026-07-26 23:00:56 · 50 warmup / 100 measurement iterations on one machine. Read the ratios rather than the milliseconds: all three engines are measured in the same run, so their</a:t>
+            </a:r>
+            <a:endParaRPr lang="en-US" sz="1100"/>
+          </a:p>
+        </p:txBody>
+      </p:sp>
+      <p:sp>
+        <p:nvSpPr>
+          <p:cNvPr name="GraphCompose Text Line" id="110"/>
+          <p:cNvSpPr txBox="true"/>
+          <p:nvPr/>
+        </p:nvSpPr>
+        <p:spPr>
+          <a:xfrm>
+            <a:off x="660400" y="5118473"/>
+            <a:ext cx="3548621" cy="111601"/>
+          </a:xfrm>
+          <a:prstGeom prst="rect">
+            <a:avLst/>
+          </a:prstGeom>
+        </p:spPr>
+        <p:txBody>
+          <a:bodyPr anchor="t" rtlCol="false" wrap="none" tIns="0" rIns="0" bIns="0" lIns="0">
+            <a:noAutofit/>
+          </a:bodyPr>
+          <a:lstStyle/>
+          <a:p>
+            <a:pPr algn="l">
+              <a:lnSpc>
+                <a:spcPct val="100000"/>
+              </a:lnSpc>
+              <a:spcBef>
+                <a:spcPct val="0"/>
+              </a:spcBef>
+              <a:spcAft>
+                <a:spcPct val="0"/>
+              </a:spcAft>
+              <a:defRPr/>
+            </a:pPr>
+            <a:r>
+              <a:rPr lang="en-US" sz="950" b="false" i="false" u="none" strike="noStrike" kern="0">
+                <a:solidFill>
+                  <a:srgbClr val="68728E"/>
+                </a:solidFill>
+                <a:latin typeface="Arial"/>
+              </a:rPr>
+              <a:t>proportions survive a change of hardware while the timings do not.</a:t>
+            </a:r>
+            <a:endParaRPr lang="en-US" sz="1100"/>
+          </a:p>
+        </p:txBody>
+      </p:sp>
+    </p:spTree>
+  </p:cSld>
+  <p:clrMapOvr>
+    <a:masterClrMapping/>
+  </p:clrMapOvr>
+</p:sld>
+</file>
+
+<file path=ppt/slides/slide4.xml><?xml version="1.0" encoding="utf-8"?>
+<p:sld xmlns:p="http://schemas.openxmlformats.org/presentationml/2006/main" xmlns:a="http://schemas.openxmlformats.org/drawingml/2006/main">
+  <p:cSld>
+    <p:spTree>
+      <p:nvGrpSpPr>
+        <p:cNvPr id="1" name=""/>
+        <p:cNvGrpSpPr/>
+        <p:nvPr/>
+      </p:nvGrpSpPr>
+      <p:grpSpPr>
+        <a:xfrm>
+          <a:off x="0" y="0"/>
+          <a:ext cx="0" cy="0"/>
+          <a:chOff x="0" y="0"/>
+          <a:chExt cx="0" cy="0"/>
+        </a:xfrm>
+      </p:grpSpPr>
+      <p:sp>
+        <p:nvSpPr>
+          <p:cNvPr name="AutoShape 2" id="2"/>
+          <p:cNvSpPr/>
+          <p:nvPr/>
+        </p:nvSpPr>
+        <p:spPr>
+          <a:xfrm>
+            <a:off x="0" y="0"/>
+            <a:ext cx="12192000" cy="6858000"/>
+          </a:xfrm>
+          <a:prstGeom prst="rect">
+            <a:avLst/>
+          </a:prstGeom>
+          <a:solidFill>
+            <a:srgbClr val="0D1121"/>
+          </a:solidFill>
+          <a:ln>
+            <a:noFill/>
+          </a:ln>
+        </p:spPr>
+      </p:sp>
+      <p:sp>
+        <p:nvSpPr>
+          <p:cNvPr name="GraphCompose Text Line" id="3"/>
+          <p:cNvSpPr txBox="true"/>
+          <p:nvPr/>
+        </p:nvSpPr>
+        <p:spPr>
+          <a:xfrm>
+            <a:off x="660400" y="454168"/>
+            <a:ext cx="588010" cy="109804"/>
+          </a:xfrm>
+          <a:prstGeom prst="rect">
+            <a:avLst/>
+          </a:prstGeom>
+        </p:spPr>
+        <p:txBody>
+          <a:bodyPr anchor="t" rtlCol="false" wrap="none" tIns="0" rIns="0" bIns="0" lIns="0">
+            <a:noAutofit/>
+          </a:bodyPr>
+          <a:lstStyle/>
+          <a:p>
+            <a:pPr algn="l">
+              <a:lnSpc>
+                <a:spcPct val="100000"/>
+              </a:lnSpc>
+              <a:spcBef>
+                <a:spcPct val="0"/>
+              </a:spcBef>
+              <a:spcAft>
+                <a:spcPct val="0"/>
+              </a:spcAft>
+              <a:defRPr/>
+            </a:pPr>
+            <a:r>
+              <a:rPr lang="en-US" sz="1100" b="true" i="false" u="none" strike="noStrike" kern="0">
+                <a:solidFill>
+                  <a:srgbClr val="E9972D"/>
+                </a:solidFill>
+                <a:latin typeface="Courier New"/>
+              </a:rPr>
+              <a:t>SCALING</a:t>
+            </a:r>
+            <a:endParaRPr lang="en-US" sz="1100"/>
+          </a:p>
+        </p:txBody>
+      </p:sp>
+      <p:sp>
+        <p:nvSpPr>
+          <p:cNvPr name="GraphCompose Text Line" id="4"/>
+          <p:cNvSpPr txBox="true"/>
+          <p:nvPr/>
+        </p:nvSpPr>
+        <p:spPr>
+          <a:xfrm>
+            <a:off x="660400" y="597253"/>
+            <a:ext cx="6225667" cy="352425"/>
+          </a:xfrm>
+          <a:prstGeom prst="rect">
+            <a:avLst/>
+          </a:prstGeom>
+        </p:spPr>
+        <p:txBody>
+          <a:bodyPr anchor="t" rtlCol="false" wrap="none" tIns="0" rIns="0" bIns="0" lIns="0">
+            <a:noAutofit/>
+          </a:bodyPr>
+          <a:lstStyle/>
+          <a:p>
+            <a:pPr algn="l">
+              <a:lnSpc>
+                <a:spcPct val="100000"/>
+              </a:lnSpc>
+              <a:spcBef>
+                <a:spcPct val="0"/>
+              </a:spcBef>
+              <a:spcAft>
+                <a:spcPct val="0"/>
+              </a:spcAft>
+              <a:defRPr/>
+            </a:pPr>
+            <a:r>
+              <a:rPr lang="en-US" sz="3000" b="true" i="false" u="none" strike="noStrike" kern="0">
+                <a:solidFill>
+                  <a:srgbClr val="F7F8FC"/>
+                </a:solidFill>
+                <a:latin typeface="Arial"/>
+              </a:rPr>
+              <a:t>What changes as the report grows</a:t>
+            </a:r>
+            <a:endParaRPr lang="en-US" sz="1100"/>
+          </a:p>
+        </p:txBody>
+      </p:sp>
+      <p:sp>
+        <p:nvSpPr>
+          <p:cNvPr name="AutoShape 5" id="5"/>
+          <p:cNvSpPr/>
+          <p:nvPr/>
+        </p:nvSpPr>
+        <p:spPr>
+          <a:xfrm>
+            <a:off x="660400" y="1173429"/>
+            <a:ext cx="1219200" cy="50800"/>
+          </a:xfrm>
+          <a:prstGeom prst="rect">
+            <a:avLst/>
+          </a:prstGeom>
+          <a:solidFill>
+            <a:srgbClr val="E9972D"/>
+          </a:solidFill>
+          <a:ln>
+            <a:noFill/>
+          </a:ln>
+        </p:spPr>
+      </p:sp>
+      <p:sp>
+        <p:nvSpPr>
+          <p:cNvPr name="GraphCompose Text Line" id="6"/>
+          <p:cNvSpPr txBox="true"/>
+          <p:nvPr/>
+        </p:nvSpPr>
+        <p:spPr>
+          <a:xfrm>
+            <a:off x="660400" y="1396510"/>
+            <a:ext cx="10737063" cy="152718"/>
+          </a:xfrm>
+          <a:prstGeom prst="rect">
+            <a:avLst/>
+          </a:prstGeom>
+        </p:spPr>
+        <p:txBody>
+          <a:bodyPr anchor="t" rtlCol="false" wrap="none" tIns="0" rIns="0" bIns="0" lIns="0">
+            <a:noAutofit/>
+          </a:bodyPr>
+          <a:lstStyle/>
+          <a:p>
+            <a:pPr algn="l">
+              <a:lnSpc>
+                <a:spcPct val="100000"/>
+              </a:lnSpc>
+              <a:spcBef>
+                <a:spcPct val="0"/>
+              </a:spcBef>
+              <a:spcAft>
+                <a:spcPct val="0"/>
+              </a:spcAft>
+              <a:defRPr/>
+            </a:pPr>
+            <a:r>
+              <a:rPr lang="en-US" sz="1300" b="false" i="false" u="none" strike="noStrike" kern="0">
+                <a:solidFill>
+                  <a:srgbClr val="CED4E6"/>
+                </a:solidFill>
+                <a:latin typeface="Arial"/>
+              </a:rPr>
+              <a:t>From 40 to 1000 rows the time lead over iText widens; JasperReports closes to roughly the same render time at the top size, while GraphCompose</a:t>
+            </a:r>
+            <a:endParaRPr lang="en-US" sz="1100"/>
+          </a:p>
+        </p:txBody>
+      </p:sp>
+      <p:sp>
+        <p:nvSpPr>
+          <p:cNvPr name="GraphCompose Text Line" id="7"/>
+          <p:cNvSpPr txBox="true"/>
+          <p:nvPr/>
+        </p:nvSpPr>
+        <p:spPr>
+          <a:xfrm>
+            <a:off x="660400" y="1600028"/>
+            <a:ext cx="9388691" cy="152718"/>
+          </a:xfrm>
+          <a:prstGeom prst="rect">
+            <a:avLst/>
+          </a:prstGeom>
+        </p:spPr>
+        <p:txBody>
+          <a:bodyPr anchor="t" rtlCol="false" wrap="none" tIns="0" rIns="0" bIns="0" lIns="0">
+            <a:noAutofit/>
+          </a:bodyPr>
+          <a:lstStyle/>
+          <a:p>
+            <a:pPr algn="l">
+              <a:lnSpc>
+                <a:spcPct val="100000"/>
+              </a:lnSpc>
+              <a:spcBef>
+                <a:spcPct val="0"/>
+              </a:spcBef>
+              <a:spcAft>
+                <a:spcPct val="0"/>
+              </a:spcAft>
+              <a:defRPr/>
+            </a:pPr>
+            <a:r>
+              <a:rPr lang="en-US" sz="1300" b="false" i="false" u="none" strike="noStrike" kern="0">
+                <a:solidFill>
+                  <a:srgbClr val="CED4E6"/>
+                </a:solidFill>
+                <a:latin typeface="Arial"/>
+              </a:rPr>
+              <a:t>stays markedly lighter on memory than both throughout. Every series reads from the same file as the table on the previous page.</a:t>
+            </a:r>
+            <a:endParaRPr lang="en-US" sz="1100"/>
+          </a:p>
+        </p:txBody>
+      </p:sp>
+      <p:sp>
+        <p:nvSpPr>
+          <p:cNvPr name="AutoShape 8" id="8"/>
+          <p:cNvSpPr/>
+          <p:nvPr/>
+        </p:nvSpPr>
+        <p:spPr>
+          <a:xfrm>
+            <a:off x="660400" y="2253564"/>
+            <a:ext cx="5308600" cy="2847657"/>
+          </a:xfrm>
+          <a:prstGeom prst="roundRect">
+            <a:avLst>
+              <a:gd name="adj" fmla="val 4460"/>
+            </a:avLst>
+          </a:prstGeom>
+          <a:solidFill>
+            <a:srgbClr val="141A2F"/>
+          </a:solidFill>
+          <a:ln w="12700">
+            <a:solidFill>
+              <a:srgbClr val="303856"/>
+            </a:solidFill>
+          </a:ln>
+        </p:spPr>
+      </p:sp>
+      <p:sp>
+        <p:nvSpPr>
+          <p:cNvPr name="GraphCompose Text Line" id="9"/>
+          <p:cNvSpPr txBox="true"/>
+          <p:nvPr/>
+        </p:nvSpPr>
+        <p:spPr>
+          <a:xfrm>
+            <a:off x="863600" y="2428224"/>
+            <a:ext cx="2406599" cy="140970"/>
+          </a:xfrm>
+          <a:prstGeom prst="rect">
+            <a:avLst/>
+          </a:prstGeom>
+        </p:spPr>
+        <p:txBody>
+          <a:bodyPr anchor="t" rtlCol="false" wrap="none" tIns="0" rIns="0" bIns="0" lIns="0">
+            <a:noAutofit/>
+          </a:bodyPr>
+          <a:lstStyle/>
+          <a:p>
+            <a:pPr algn="l">
+              <a:lnSpc>
+                <a:spcPct val="100000"/>
+              </a:lnSpc>
+              <a:spcBef>
+                <a:spcPct val="0"/>
+              </a:spcBef>
+              <a:spcAft>
+                <a:spcPct val="0"/>
+              </a:spcAft>
+              <a:defRPr/>
+            </a:pPr>
+            <a:r>
+              <a:rPr lang="en-US" sz="1200" b="true" i="false" u="none" strike="noStrike" kern="0">
+                <a:solidFill>
+                  <a:srgbClr val="F7F8FC"/>
+                </a:solidFill>
+                <a:latin typeface="Arial"/>
+              </a:rPr>
+              <a:t>Render time vs. report size — ms</a:t>
+            </a:r>
+            <a:endParaRPr lang="en-US" sz="1100"/>
+          </a:p>
+        </p:txBody>
+      </p:sp>
+      <p:sp>
+        <p:nvSpPr>
+          <p:cNvPr name="GraphCompose Text Line" id="10"/>
+          <p:cNvSpPr txBox="true"/>
+          <p:nvPr/>
+        </p:nvSpPr>
+        <p:spPr>
+          <a:xfrm>
+            <a:off x="863600" y="2612050"/>
+            <a:ext cx="784606" cy="117475"/>
+          </a:xfrm>
+          <a:prstGeom prst="rect">
+            <a:avLst/>
+          </a:prstGeom>
+        </p:spPr>
+        <p:txBody>
+          <a:bodyPr anchor="t" rtlCol="false" wrap="none" tIns="0" rIns="0" bIns="0" lIns="0">
+            <a:noAutofit/>
+          </a:bodyPr>
+          <a:lstStyle/>
+          <a:p>
+            <a:pPr algn="l">
+              <a:lnSpc>
+                <a:spcPct val="100000"/>
+              </a:lnSpc>
+              <a:spcBef>
+                <a:spcPct val="0"/>
+              </a:spcBef>
+              <a:spcAft>
+                <a:spcPct val="0"/>
+              </a:spcAft>
+              <a:defRPr/>
+            </a:pPr>
+            <a:r>
+              <a:rPr lang="en-US" sz="1000" b="false" i="false" u="none" strike="noStrike" kern="0">
+                <a:solidFill>
+                  <a:srgbClr val="68728E"/>
+                </a:solidFill>
+                <a:latin typeface="Arial"/>
+              </a:rPr>
+              <a:t>lower is faster</a:t>
+            </a:r>
+            <a:endParaRPr lang="en-US" sz="1100"/>
+          </a:p>
+        </p:txBody>
+      </p:sp>
+      <p:cxnSp>
+        <p:nvCxnSpPr>
+          <p:cNvPr name="Connector 11" id="11"/>
+          <p:cNvCxnSpPr/>
+          <p:nvPr/>
+        </p:nvCxnSpPr>
+        <p:spPr>
+          <a:xfrm flipV="false">
+            <a:off x="1108710" y="4605845"/>
+            <a:ext cx="4657090" cy="0"/>
+          </a:xfrm>
+          <a:prstGeom prst="line">
+            <a:avLst/>
+          </a:prstGeom>
+          <a:ln w="7620" cap="flat">
+            <a:solidFill>
+              <a:srgbClr val="303856"/>
+            </a:solidFill>
+          </a:ln>
+        </p:spPr>
+      </p:cxnSp>
+      <p:sp>
+        <p:nvSpPr>
+          <p:cNvPr name="GraphCompose Text Line" id="12"/>
+          <p:cNvSpPr txBox="true"/>
+          <p:nvPr/>
+        </p:nvSpPr>
+        <p:spPr>
+          <a:xfrm>
+            <a:off x="993140" y="4553758"/>
+            <a:ext cx="66040" cy="84849"/>
+          </a:xfrm>
+          <a:prstGeom prst="rect">
+            <a:avLst/>
+          </a:prstGeom>
+        </p:spPr>
+        <p:txBody>
+          <a:bodyPr anchor="t" rtlCol="false" wrap="none" tIns="0" rIns="0" bIns="0" lIns="0">
+            <a:noAutofit/>
+          </a:bodyPr>
+          <a:lstStyle/>
+          <a:p>
+            <a:pPr algn="l">
+              <a:lnSpc>
+                <a:spcPct val="100000"/>
+              </a:lnSpc>
+              <a:spcBef>
+                <a:spcPct val="0"/>
+              </a:spcBef>
+              <a:spcAft>
+                <a:spcPct val="0"/>
+              </a:spcAft>
+              <a:defRPr/>
+            </a:pPr>
+            <a:r>
+              <a:rPr lang="en-US" sz="850" b="false" i="false" u="none" strike="noStrike" kern="0">
+                <a:solidFill>
+                  <a:srgbClr val="8C95AF"/>
+                </a:solidFill>
+                <a:latin typeface="Courier New"/>
+              </a:rPr>
+              <a:t>0</a:t>
+            </a:r>
+            <a:endParaRPr lang="en-US" sz="1100"/>
+          </a:p>
+        </p:txBody>
+      </p:sp>
+      <p:cxnSp>
+        <p:nvCxnSpPr>
+          <p:cNvPr name="Connector 13" id="13"/>
+          <p:cNvCxnSpPr/>
+          <p:nvPr/>
+        </p:nvCxnSpPr>
+        <p:spPr>
+          <a:xfrm flipV="false">
+            <a:off x="1108710" y="4002475"/>
+            <a:ext cx="4657090" cy="0"/>
+          </a:xfrm>
+          <a:prstGeom prst="line">
+            <a:avLst/>
+          </a:prstGeom>
+          <a:ln w="7620" cap="flat">
+            <a:solidFill>
+              <a:srgbClr val="303856"/>
+            </a:solidFill>
+          </a:ln>
+        </p:spPr>
+      </p:cxnSp>
+      <p:sp>
+        <p:nvSpPr>
+          <p:cNvPr name="GraphCompose Text Line" id="14"/>
+          <p:cNvSpPr txBox="true"/>
+          <p:nvPr/>
+        </p:nvSpPr>
+        <p:spPr>
+          <a:xfrm>
+            <a:off x="863600" y="3950387"/>
+            <a:ext cx="195580" cy="84849"/>
+          </a:xfrm>
+          <a:prstGeom prst="rect">
+            <a:avLst/>
+          </a:prstGeom>
+        </p:spPr>
+        <p:txBody>
+          <a:bodyPr anchor="t" rtlCol="false" wrap="none" tIns="0" rIns="0" bIns="0" lIns="0">
+            <a:noAutofit/>
+          </a:bodyPr>
+          <a:lstStyle/>
+          <a:p>
+            <a:pPr algn="l">
+              <a:lnSpc>
+                <a:spcPct val="100000"/>
+              </a:lnSpc>
+              <a:spcBef>
+                <a:spcPct val="0"/>
+              </a:spcBef>
+              <a:spcAft>
+                <a:spcPct val="0"/>
+              </a:spcAft>
+              <a:defRPr/>
+            </a:pPr>
+            <a:r>
+              <a:rPr lang="en-US" sz="850" b="false" i="false" u="none" strike="noStrike" kern="0">
+                <a:solidFill>
+                  <a:srgbClr val="8C95AF"/>
+                </a:solidFill>
+                <a:latin typeface="Courier New"/>
+              </a:rPr>
+              <a:t>100</a:t>
+            </a:r>
+            <a:endParaRPr lang="en-US" sz="1100"/>
+          </a:p>
+        </p:txBody>
+      </p:sp>
+      <p:cxnSp>
+        <p:nvCxnSpPr>
+          <p:cNvPr name="Connector 15" id="15"/>
+          <p:cNvCxnSpPr/>
+          <p:nvPr/>
+        </p:nvCxnSpPr>
+        <p:spPr>
+          <a:xfrm flipV="false">
+            <a:off x="1108710" y="3399104"/>
+            <a:ext cx="4657090" cy="0"/>
+          </a:xfrm>
+          <a:prstGeom prst="line">
+            <a:avLst/>
+          </a:prstGeom>
+          <a:ln w="7620" cap="flat">
+            <a:solidFill>
+              <a:srgbClr val="303856"/>
+            </a:solidFill>
+          </a:ln>
+        </p:spPr>
+      </p:cxnSp>
+      <p:sp>
+        <p:nvSpPr>
+          <p:cNvPr name="GraphCompose Text Line" id="16"/>
+          <p:cNvSpPr txBox="true"/>
+          <p:nvPr/>
+        </p:nvSpPr>
+        <p:spPr>
+          <a:xfrm>
+            <a:off x="863600" y="3347016"/>
+            <a:ext cx="195580" cy="84849"/>
+          </a:xfrm>
+          <a:prstGeom prst="rect">
+            <a:avLst/>
+          </a:prstGeom>
+        </p:spPr>
+        <p:txBody>
+          <a:bodyPr anchor="t" rtlCol="false" wrap="none" tIns="0" rIns="0" bIns="0" lIns="0">
+            <a:noAutofit/>
+          </a:bodyPr>
+          <a:lstStyle/>
+          <a:p>
+            <a:pPr algn="l">
+              <a:lnSpc>
+                <a:spcPct val="100000"/>
+              </a:lnSpc>
+              <a:spcBef>
+                <a:spcPct val="0"/>
+              </a:spcBef>
+              <a:spcAft>
+                <a:spcPct val="0"/>
+              </a:spcAft>
+              <a:defRPr/>
+            </a:pPr>
+            <a:r>
+              <a:rPr lang="en-US" sz="850" b="false" i="false" u="none" strike="noStrike" kern="0">
+                <a:solidFill>
+                  <a:srgbClr val="8C95AF"/>
+                </a:solidFill>
+                <a:latin typeface="Courier New"/>
+              </a:rPr>
+              <a:t>200</a:t>
+            </a:r>
+            <a:endParaRPr lang="en-US" sz="1100"/>
+          </a:p>
+        </p:txBody>
+      </p:sp>
+      <p:cxnSp>
+        <p:nvCxnSpPr>
+          <p:cNvPr name="Connector 17" id="17"/>
+          <p:cNvCxnSpPr/>
+          <p:nvPr/>
+        </p:nvCxnSpPr>
+        <p:spPr>
+          <a:xfrm flipV="false">
+            <a:off x="1108710" y="2795734"/>
+            <a:ext cx="4657090" cy="0"/>
+          </a:xfrm>
+          <a:prstGeom prst="line">
+            <a:avLst/>
+          </a:prstGeom>
+          <a:ln w="7620" cap="flat">
+            <a:solidFill>
+              <a:srgbClr val="303856"/>
+            </a:solidFill>
+          </a:ln>
+        </p:spPr>
+      </p:cxnSp>
+      <p:sp>
+        <p:nvSpPr>
+          <p:cNvPr name="GraphCompose Text Line" id="18"/>
+          <p:cNvSpPr txBox="true"/>
+          <p:nvPr/>
+        </p:nvSpPr>
+        <p:spPr>
+          <a:xfrm>
+            <a:off x="863600" y="2743646"/>
+            <a:ext cx="195580" cy="84849"/>
+          </a:xfrm>
+          <a:prstGeom prst="rect">
+            <a:avLst/>
+          </a:prstGeom>
+        </p:spPr>
+        <p:txBody>
+          <a:bodyPr anchor="t" rtlCol="false" wrap="none" tIns="0" rIns="0" bIns="0" lIns="0">
+            <a:noAutofit/>
+          </a:bodyPr>
+          <a:lstStyle/>
+          <a:p>
+            <a:pPr algn="l">
+              <a:lnSpc>
+                <a:spcPct val="100000"/>
+              </a:lnSpc>
+              <a:spcBef>
+                <a:spcPct val="0"/>
+              </a:spcBef>
+              <a:spcAft>
+                <a:spcPct val="0"/>
+              </a:spcAft>
+              <a:defRPr/>
+            </a:pPr>
+            <a:r>
+              <a:rPr lang="en-US" sz="850" b="false" i="false" u="none" strike="noStrike" kern="0">
+                <a:solidFill>
+                  <a:srgbClr val="8C95AF"/>
+                </a:solidFill>
+                <a:latin typeface="Courier New"/>
+              </a:rPr>
+              <a:t>300</a:t>
+            </a:r>
+            <a:endParaRPr lang="en-US" sz="1100"/>
+          </a:p>
+        </p:txBody>
+      </p:sp>
+      <p:cxnSp>
+        <p:nvCxnSpPr>
+          <p:cNvPr name="Connector 19" id="19"/>
+          <p:cNvCxnSpPr/>
+          <p:nvPr/>
+        </p:nvCxnSpPr>
+        <p:spPr>
+          <a:xfrm flipV="true">
+            <a:off x="1884892" y="4513771"/>
+            <a:ext cx="1552363" cy="57682"/>
+          </a:xfrm>
+          <a:prstGeom prst="line">
+            <a:avLst/>
+          </a:prstGeom>
+          <a:ln w="25400" cap="flat">
+            <a:solidFill>
+              <a:srgbClr val="E9972D"/>
+            </a:solidFill>
+          </a:ln>
+        </p:spPr>
+      </p:cxnSp>
+      <p:cxnSp>
+        <p:nvCxnSpPr>
+          <p:cNvPr name="Connector 20" id="20"/>
+          <p:cNvCxnSpPr/>
+          <p:nvPr/>
+        </p:nvCxnSpPr>
+        <p:spPr>
+          <a:xfrm flipV="true">
+            <a:off x="3437255" y="4219206"/>
+            <a:ext cx="1552363" cy="294566"/>
+          </a:xfrm>
+          <a:prstGeom prst="line">
+            <a:avLst/>
+          </a:prstGeom>
+          <a:ln w="25400" cap="flat">
+            <a:solidFill>
+              <a:srgbClr val="E9972D"/>
+            </a:solidFill>
+          </a:ln>
+        </p:spPr>
+      </p:cxnSp>
+      <p:cxnSp>
+        <p:nvCxnSpPr>
+          <p:cNvPr name="Connector 21" id="21"/>
+          <p:cNvCxnSpPr/>
+          <p:nvPr/>
+        </p:nvCxnSpPr>
+        <p:spPr>
+          <a:xfrm flipV="true">
+            <a:off x="1884892" y="4258485"/>
+            <a:ext cx="1552363" cy="259630"/>
+          </a:xfrm>
+          <a:prstGeom prst="line">
+            <a:avLst/>
+          </a:prstGeom>
+          <a:ln w="25400" cap="flat">
+            <a:solidFill>
+              <a:srgbClr val="7A85A8"/>
+            </a:solidFill>
+          </a:ln>
+        </p:spPr>
+      </p:cxnSp>
+      <p:cxnSp>
+        <p:nvCxnSpPr>
+          <p:cNvPr name="Connector 22" id="22"/>
+          <p:cNvCxnSpPr/>
+          <p:nvPr/>
+        </p:nvCxnSpPr>
+        <p:spPr>
+          <a:xfrm flipV="true">
+            <a:off x="3437255" y="2849856"/>
+            <a:ext cx="1552363" cy="1408629"/>
+          </a:xfrm>
+          <a:prstGeom prst="line">
+            <a:avLst/>
+          </a:prstGeom>
+          <a:ln w="25400" cap="flat">
+            <a:solidFill>
+              <a:srgbClr val="7A85A8"/>
+            </a:solidFill>
+          </a:ln>
+        </p:spPr>
+      </p:cxnSp>
+      <p:cxnSp>
+        <p:nvCxnSpPr>
+          <p:cNvPr name="Connector 23" id="23"/>
+          <p:cNvCxnSpPr/>
+          <p:nvPr/>
+        </p:nvCxnSpPr>
+        <p:spPr>
+          <a:xfrm flipV="true">
+            <a:off x="1884892" y="4478353"/>
+            <a:ext cx="1552363" cy="67819"/>
+          </a:xfrm>
+          <a:prstGeom prst="line">
+            <a:avLst/>
+          </a:prstGeom>
+          <a:ln w="25400" cap="flat">
+            <a:solidFill>
+              <a:srgbClr val="5DC88F"/>
+            </a:solidFill>
+          </a:ln>
+        </p:spPr>
+      </p:cxnSp>
+      <p:cxnSp>
+        <p:nvCxnSpPr>
+          <p:cNvPr name="Connector 24" id="24"/>
+          <p:cNvCxnSpPr/>
+          <p:nvPr/>
+        </p:nvCxnSpPr>
+        <p:spPr>
+          <a:xfrm flipV="true">
+            <a:off x="3437255" y="4215042"/>
+            <a:ext cx="1552363" cy="263311"/>
+          </a:xfrm>
+          <a:prstGeom prst="line">
+            <a:avLst/>
+          </a:prstGeom>
+          <a:ln w="25400" cap="flat">
+            <a:solidFill>
+              <a:srgbClr val="5DC88F"/>
+            </a:solidFill>
+          </a:ln>
+        </p:spPr>
+      </p:cxnSp>
+      <p:sp>
+        <p:nvSpPr>
+          <p:cNvPr name="GraphCompose Text Line" id="25"/>
+          <p:cNvSpPr txBox="true"/>
+          <p:nvPr/>
+        </p:nvSpPr>
+        <p:spPr>
+          <a:xfrm>
+            <a:off x="1820122" y="4634676"/>
+            <a:ext cx="130810" cy="84849"/>
+          </a:xfrm>
+          <a:prstGeom prst="rect">
+            <a:avLst/>
+          </a:prstGeom>
+        </p:spPr>
+        <p:txBody>
+          <a:bodyPr anchor="t" rtlCol="false" wrap="none" tIns="0" rIns="0" bIns="0" lIns="0">
+            <a:noAutofit/>
+          </a:bodyPr>
+          <a:lstStyle/>
+          <a:p>
+            <a:pPr algn="l">
+              <a:lnSpc>
+                <a:spcPct val="100000"/>
+              </a:lnSpc>
+              <a:spcBef>
+                <a:spcPct val="0"/>
+              </a:spcBef>
+              <a:spcAft>
+                <a:spcPct val="0"/>
+              </a:spcAft>
+              <a:defRPr/>
+            </a:pPr>
+            <a:r>
+              <a:rPr lang="en-US" sz="850" b="false" i="false" u="none" strike="noStrike" kern="0">
+                <a:solidFill>
+                  <a:srgbClr val="8C95AF"/>
+                </a:solidFill>
+                <a:latin typeface="Courier New"/>
+              </a:rPr>
+              <a:t>40</a:t>
+            </a:r>
+            <a:endParaRPr lang="en-US" sz="1100"/>
+          </a:p>
+        </p:txBody>
+      </p:sp>
+      <p:sp>
+        <p:nvSpPr>
+          <p:cNvPr name="GraphCompose Text Line" id="26"/>
+          <p:cNvSpPr txBox="true"/>
+          <p:nvPr/>
+        </p:nvSpPr>
+        <p:spPr>
+          <a:xfrm>
+            <a:off x="3340100" y="4634676"/>
+            <a:ext cx="195580" cy="84849"/>
+          </a:xfrm>
+          <a:prstGeom prst="rect">
+            <a:avLst/>
+          </a:prstGeom>
+        </p:spPr>
+        <p:txBody>
+          <a:bodyPr anchor="t" rtlCol="false" wrap="none" tIns="0" rIns="0" bIns="0" lIns="0">
+            <a:noAutofit/>
+          </a:bodyPr>
+          <a:lstStyle/>
+          <a:p>
+            <a:pPr algn="l">
+              <a:lnSpc>
+                <a:spcPct val="100000"/>
+              </a:lnSpc>
+              <a:spcBef>
+                <a:spcPct val="0"/>
+              </a:spcBef>
+              <a:spcAft>
+                <a:spcPct val="0"/>
+              </a:spcAft>
+              <a:defRPr/>
+            </a:pPr>
+            <a:r>
+              <a:rPr lang="en-US" sz="850" b="false" i="false" u="none" strike="noStrike" kern="0">
+                <a:solidFill>
+                  <a:srgbClr val="8C95AF"/>
+                </a:solidFill>
+                <a:latin typeface="Courier New"/>
+              </a:rPr>
+              <a:t>200</a:t>
+            </a:r>
+            <a:endParaRPr lang="en-US" sz="1100"/>
+          </a:p>
+        </p:txBody>
+      </p:sp>
+      <p:sp>
+        <p:nvSpPr>
+          <p:cNvPr name="GraphCompose Text Line" id="27"/>
+          <p:cNvSpPr txBox="true"/>
+          <p:nvPr/>
+        </p:nvSpPr>
+        <p:spPr>
+          <a:xfrm>
+            <a:off x="4860078" y="4634676"/>
+            <a:ext cx="260350" cy="84849"/>
+          </a:xfrm>
+          <a:prstGeom prst="rect">
+            <a:avLst/>
+          </a:prstGeom>
+        </p:spPr>
+        <p:txBody>
+          <a:bodyPr anchor="t" rtlCol="false" wrap="none" tIns="0" rIns="0" bIns="0" lIns="0">
+            <a:noAutofit/>
+          </a:bodyPr>
+          <a:lstStyle/>
+          <a:p>
+            <a:pPr algn="l">
+              <a:lnSpc>
+                <a:spcPct val="100000"/>
+              </a:lnSpc>
+              <a:spcBef>
+                <a:spcPct val="0"/>
+              </a:spcBef>
+              <a:spcAft>
+                <a:spcPct val="0"/>
+              </a:spcAft>
+              <a:defRPr/>
+            </a:pPr>
+            <a:r>
+              <a:rPr lang="en-US" sz="850" b="false" i="false" u="none" strike="noStrike" kern="0">
+                <a:solidFill>
+                  <a:srgbClr val="8C95AF"/>
+                </a:solidFill>
+                <a:latin typeface="Courier New"/>
+              </a:rPr>
+              <a:t>1000</a:t>
+            </a:r>
+            <a:endParaRPr lang="en-US" sz="1100"/>
+          </a:p>
+        </p:txBody>
+      </p:sp>
+      <p:sp>
+        <p:nvSpPr>
+          <p:cNvPr name="AutoShape 28" id="28"/>
+          <p:cNvSpPr/>
+          <p:nvPr/>
+        </p:nvSpPr>
+        <p:spPr>
+          <a:xfrm>
+            <a:off x="1942789" y="4751807"/>
+            <a:ext cx="114300" cy="114300"/>
+          </a:xfrm>
+          <a:prstGeom prst="roundRect">
+            <a:avLst>
+              <a:gd name="adj" fmla="val 16667"/>
+            </a:avLst>
+          </a:prstGeom>
+          <a:solidFill>
+            <a:srgbClr val="E9972D"/>
+          </a:solidFill>
+          <a:ln>
+            <a:noFill/>
+          </a:ln>
+        </p:spPr>
+      </p:sp>
+      <p:sp>
+        <p:nvSpPr>
+          <p:cNvPr name="GraphCompose Text Line" id="29"/>
+          <p:cNvSpPr txBox="true"/>
+          <p:nvPr/>
+        </p:nvSpPr>
+        <p:spPr>
+          <a:xfrm>
+            <a:off x="2107889" y="4745489"/>
+            <a:ext cx="807999" cy="105727"/>
+          </a:xfrm>
+          <a:prstGeom prst="rect">
+            <a:avLst/>
+          </a:prstGeom>
+        </p:spPr>
+        <p:txBody>
+          <a:bodyPr anchor="t" rtlCol="false" wrap="none" tIns="0" rIns="0" bIns="0" lIns="0">
+            <a:noAutofit/>
+          </a:bodyPr>
+          <a:lstStyle/>
+          <a:p>
+            <a:pPr algn="l">
+              <a:lnSpc>
+                <a:spcPct val="100000"/>
+              </a:lnSpc>
+              <a:spcBef>
+                <a:spcPct val="0"/>
+              </a:spcBef>
+              <a:spcAft>
+                <a:spcPct val="0"/>
+              </a:spcAft>
+              <a:defRPr/>
+            </a:pPr>
+            <a:r>
+              <a:rPr lang="en-US" sz="900" b="false" i="false" u="none" strike="noStrike" kern="0">
+                <a:solidFill>
+                  <a:srgbClr val="8C95AF"/>
+                </a:solidFill>
+                <a:latin typeface="Arial"/>
+              </a:rPr>
+              <a:t>GraphCompose</a:t>
+            </a:r>
+            <a:endParaRPr lang="en-US" sz="1100"/>
+          </a:p>
+        </p:txBody>
+      </p:sp>
+      <p:sp>
+        <p:nvSpPr>
+          <p:cNvPr name="AutoShape 30" id="30"/>
+          <p:cNvSpPr/>
+          <p:nvPr/>
+        </p:nvSpPr>
+        <p:spPr>
+          <a:xfrm>
+            <a:off x="3092418" y="4751807"/>
+            <a:ext cx="114300" cy="114300"/>
+          </a:xfrm>
+          <a:prstGeom prst="roundRect">
+            <a:avLst>
+              <a:gd name="adj" fmla="val 16667"/>
+            </a:avLst>
+          </a:prstGeom>
+          <a:solidFill>
+            <a:srgbClr val="7A85A8"/>
+          </a:solidFill>
+          <a:ln>
+            <a:noFill/>
+          </a:ln>
+        </p:spPr>
+      </p:sp>
+      <p:sp>
+        <p:nvSpPr>
+          <p:cNvPr name="GraphCompose Text Line" id="31"/>
+          <p:cNvSpPr txBox="true"/>
+          <p:nvPr/>
+        </p:nvSpPr>
+        <p:spPr>
+          <a:xfrm>
+            <a:off x="3257518" y="4745489"/>
+            <a:ext cx="344284" cy="105727"/>
+          </a:xfrm>
+          <a:prstGeom prst="rect">
+            <a:avLst/>
+          </a:prstGeom>
+        </p:spPr>
+        <p:txBody>
+          <a:bodyPr anchor="t" rtlCol="false" wrap="none" tIns="0" rIns="0" bIns="0" lIns="0">
+            <a:noAutofit/>
+          </a:bodyPr>
+          <a:lstStyle/>
+          <a:p>
+            <a:pPr algn="l">
+              <a:lnSpc>
+                <a:spcPct val="100000"/>
+              </a:lnSpc>
+              <a:spcBef>
+                <a:spcPct val="0"/>
+              </a:spcBef>
+              <a:spcAft>
+                <a:spcPct val="0"/>
+              </a:spcAft>
+              <a:defRPr/>
+            </a:pPr>
+            <a:r>
+              <a:rPr lang="en-US" sz="900" b="false" i="false" u="none" strike="noStrike" kern="0">
+                <a:solidFill>
+                  <a:srgbClr val="8C95AF"/>
+                </a:solidFill>
+                <a:latin typeface="Arial"/>
+              </a:rPr>
+              <a:t>iText 9</a:t>
+            </a:r>
+            <a:endParaRPr lang="en-US" sz="1100"/>
+          </a:p>
+        </p:txBody>
+      </p:sp>
+      <p:sp>
+        <p:nvSpPr>
+          <p:cNvPr name="AutoShape 32" id="32"/>
+          <p:cNvSpPr/>
+          <p:nvPr/>
+        </p:nvSpPr>
+        <p:spPr>
+          <a:xfrm>
+            <a:off x="3778333" y="4751807"/>
+            <a:ext cx="114300" cy="114300"/>
+          </a:xfrm>
+          <a:prstGeom prst="roundRect">
+            <a:avLst>
+              <a:gd name="adj" fmla="val 16667"/>
+            </a:avLst>
+          </a:prstGeom>
+          <a:solidFill>
+            <a:srgbClr val="5DC88F"/>
+          </a:solidFill>
+          <a:ln>
+            <a:noFill/>
+          </a:ln>
+        </p:spPr>
+      </p:sp>
+      <p:sp>
+        <p:nvSpPr>
+          <p:cNvPr name="GraphCompose Text Line" id="33"/>
+          <p:cNvSpPr txBox="true"/>
+          <p:nvPr/>
+        </p:nvSpPr>
+        <p:spPr>
+          <a:xfrm>
+            <a:off x="3943433" y="4745489"/>
+            <a:ext cx="744449" cy="105727"/>
+          </a:xfrm>
+          <a:prstGeom prst="rect">
+            <a:avLst/>
+          </a:prstGeom>
+        </p:spPr>
+        <p:txBody>
+          <a:bodyPr anchor="t" rtlCol="false" wrap="none" tIns="0" rIns="0" bIns="0" lIns="0">
+            <a:noAutofit/>
+          </a:bodyPr>
+          <a:lstStyle/>
+          <a:p>
+            <a:pPr algn="l">
+              <a:lnSpc>
+                <a:spcPct val="100000"/>
+              </a:lnSpc>
+              <a:spcBef>
+                <a:spcPct val="0"/>
+              </a:spcBef>
+              <a:spcAft>
+                <a:spcPct val="0"/>
+              </a:spcAft>
+              <a:defRPr/>
+            </a:pPr>
+            <a:r>
+              <a:rPr lang="en-US" sz="900" b="false" i="false" u="none" strike="noStrike" kern="0">
+                <a:solidFill>
+                  <a:srgbClr val="8C95AF"/>
+                </a:solidFill>
+                <a:latin typeface="Arial"/>
+              </a:rPr>
+              <a:t>JasperReports</a:t>
+            </a:r>
+            <a:endParaRPr lang="en-US" sz="1100"/>
+          </a:p>
+        </p:txBody>
+      </p:sp>
+      <p:sp>
+        <p:nvSpPr>
+          <p:cNvPr name="AutoShape 34" id="34"/>
+          <p:cNvSpPr/>
+          <p:nvPr/>
+        </p:nvSpPr>
+        <p:spPr>
+          <a:xfrm>
+            <a:off x="6223000" y="2253564"/>
+            <a:ext cx="5308600" cy="2847657"/>
+          </a:xfrm>
+          <a:prstGeom prst="roundRect">
+            <a:avLst>
+              <a:gd name="adj" fmla="val 4460"/>
+            </a:avLst>
+          </a:prstGeom>
+          <a:solidFill>
+            <a:srgbClr val="141A2F"/>
+          </a:solidFill>
+          <a:ln w="12700">
+            <a:solidFill>
+              <a:srgbClr val="303856"/>
+            </a:solidFill>
+          </a:ln>
+        </p:spPr>
+      </p:sp>
+      <p:sp>
+        <p:nvSpPr>
+          <p:cNvPr name="GraphCompose Text Line" id="35"/>
+          <p:cNvSpPr txBox="true"/>
+          <p:nvPr/>
+        </p:nvSpPr>
+        <p:spPr>
+          <a:xfrm>
+            <a:off x="6426200" y="2428224"/>
+            <a:ext cx="2296566" cy="140970"/>
+          </a:xfrm>
+          <a:prstGeom prst="rect">
+            <a:avLst/>
+          </a:prstGeom>
+        </p:spPr>
+        <p:txBody>
+          <a:bodyPr anchor="t" rtlCol="false" wrap="none" tIns="0" rIns="0" bIns="0" lIns="0">
+            <a:noAutofit/>
+          </a:bodyPr>
+          <a:lstStyle/>
+          <a:p>
+            <a:pPr algn="l">
+              <a:lnSpc>
+                <a:spcPct val="100000"/>
+              </a:lnSpc>
+              <a:spcBef>
+                <a:spcPct val="0"/>
+              </a:spcBef>
+              <a:spcAft>
+                <a:spcPct val="0"/>
+              </a:spcAft>
+              <a:defRPr/>
+            </a:pPr>
+            <a:r>
+              <a:rPr lang="en-US" sz="1200" b="true" i="false" u="none" strike="noStrike" kern="0">
+                <a:solidFill>
+                  <a:srgbClr val="F7F8FC"/>
+                </a:solidFill>
+                <a:latin typeface="Arial"/>
+              </a:rPr>
+              <a:t>Peak heap vs. report size — MB</a:t>
+            </a:r>
+            <a:endParaRPr lang="en-US" sz="1100"/>
+          </a:p>
+        </p:txBody>
+      </p:sp>
+      <p:sp>
+        <p:nvSpPr>
+          <p:cNvPr name="GraphCompose Text Line" id="36"/>
+          <p:cNvSpPr txBox="true"/>
+          <p:nvPr/>
+        </p:nvSpPr>
+        <p:spPr>
+          <a:xfrm>
+            <a:off x="6426200" y="2612050"/>
+            <a:ext cx="812800" cy="117475"/>
+          </a:xfrm>
+          <a:prstGeom prst="rect">
+            <a:avLst/>
+          </a:prstGeom>
+        </p:spPr>
+        <p:txBody>
+          <a:bodyPr anchor="t" rtlCol="false" wrap="none" tIns="0" rIns="0" bIns="0" lIns="0">
+            <a:noAutofit/>
+          </a:bodyPr>
+          <a:lstStyle/>
+          <a:p>
+            <a:pPr algn="l">
+              <a:lnSpc>
+                <a:spcPct val="100000"/>
+              </a:lnSpc>
+              <a:spcBef>
+                <a:spcPct val="0"/>
+              </a:spcBef>
+              <a:spcAft>
+                <a:spcPct val="0"/>
+              </a:spcAft>
+              <a:defRPr/>
+            </a:pPr>
+            <a:r>
+              <a:rPr lang="en-US" sz="1000" b="false" i="false" u="none" strike="noStrike" kern="0">
+                <a:solidFill>
+                  <a:srgbClr val="68728E"/>
+                </a:solidFill>
+                <a:latin typeface="Arial"/>
+              </a:rPr>
+              <a:t>lower is lighter</a:t>
+            </a:r>
+            <a:endParaRPr lang="en-US" sz="1100"/>
+          </a:p>
+        </p:txBody>
+      </p:sp>
+      <p:cxnSp>
+        <p:nvCxnSpPr>
+          <p:cNvPr name="Connector 37" id="37"/>
+          <p:cNvCxnSpPr/>
+          <p:nvPr/>
+        </p:nvCxnSpPr>
+        <p:spPr>
+          <a:xfrm flipV="false">
+            <a:off x="6606540" y="4605845"/>
+            <a:ext cx="4721860" cy="0"/>
+          </a:xfrm>
+          <a:prstGeom prst="line">
+            <a:avLst/>
+          </a:prstGeom>
+          <a:ln w="7620" cap="flat">
+            <a:solidFill>
+              <a:srgbClr val="303856"/>
+            </a:solidFill>
+          </a:ln>
+        </p:spPr>
+      </p:cxnSp>
+      <p:sp>
+        <p:nvSpPr>
+          <p:cNvPr name="GraphCompose Text Line" id="38"/>
+          <p:cNvSpPr txBox="true"/>
+          <p:nvPr/>
+        </p:nvSpPr>
+        <p:spPr>
+          <a:xfrm>
+            <a:off x="6490970" y="4553758"/>
+            <a:ext cx="66040" cy="84849"/>
+          </a:xfrm>
+          <a:prstGeom prst="rect">
+            <a:avLst/>
+          </a:prstGeom>
+        </p:spPr>
+        <p:txBody>
+          <a:bodyPr anchor="t" rtlCol="false" wrap="none" tIns="0" rIns="0" bIns="0" lIns="0">
+            <a:noAutofit/>
+          </a:bodyPr>
+          <a:lstStyle/>
+          <a:p>
+            <a:pPr algn="l">
+              <a:lnSpc>
+                <a:spcPct val="100000"/>
+              </a:lnSpc>
+              <a:spcBef>
+                <a:spcPct val="0"/>
+              </a:spcBef>
+              <a:spcAft>
+                <a:spcPct val="0"/>
+              </a:spcAft>
+              <a:defRPr/>
+            </a:pPr>
+            <a:r>
+              <a:rPr lang="en-US" sz="850" b="false" i="false" u="none" strike="noStrike" kern="0">
+                <a:solidFill>
+                  <a:srgbClr val="8C95AF"/>
+                </a:solidFill>
+                <a:latin typeface="Courier New"/>
+              </a:rPr>
+              <a:t>0</a:t>
+            </a:r>
+            <a:endParaRPr lang="en-US" sz="1100"/>
+          </a:p>
+        </p:txBody>
+      </p:sp>
+      <p:cxnSp>
+        <p:nvCxnSpPr>
+          <p:cNvPr name="Connector 39" id="39"/>
+          <p:cNvCxnSpPr/>
+          <p:nvPr/>
+        </p:nvCxnSpPr>
+        <p:spPr>
+          <a:xfrm flipV="false">
+            <a:off x="6606540" y="4153318"/>
+            <a:ext cx="4721860" cy="0"/>
+          </a:xfrm>
+          <a:prstGeom prst="line">
+            <a:avLst/>
+          </a:prstGeom>
+          <a:ln w="7620" cap="flat">
+            <a:solidFill>
+              <a:srgbClr val="303856"/>
+            </a:solidFill>
+          </a:ln>
+        </p:spPr>
+      </p:cxnSp>
+      <p:sp>
+        <p:nvSpPr>
+          <p:cNvPr name="GraphCompose Text Line" id="40"/>
+          <p:cNvSpPr txBox="true"/>
+          <p:nvPr/>
+        </p:nvSpPr>
+        <p:spPr>
+          <a:xfrm>
+            <a:off x="6426200" y="4101230"/>
+            <a:ext cx="130810" cy="84849"/>
+          </a:xfrm>
+          <a:prstGeom prst="rect">
+            <a:avLst/>
+          </a:prstGeom>
+        </p:spPr>
+        <p:txBody>
+          <a:bodyPr anchor="t" rtlCol="false" wrap="none" tIns="0" rIns="0" bIns="0" lIns="0">
+            <a:noAutofit/>
+          </a:bodyPr>
+          <a:lstStyle/>
+          <a:p>
+            <a:pPr algn="l">
+              <a:lnSpc>
+                <a:spcPct val="100000"/>
+              </a:lnSpc>
+              <a:spcBef>
+                <a:spcPct val="0"/>
+              </a:spcBef>
+              <a:spcAft>
+                <a:spcPct val="0"/>
+              </a:spcAft>
+              <a:defRPr/>
+            </a:pPr>
+            <a:r>
+              <a:rPr lang="en-US" sz="850" b="false" i="false" u="none" strike="noStrike" kern="0">
+                <a:solidFill>
+                  <a:srgbClr val="8C95AF"/>
+                </a:solidFill>
+                <a:latin typeface="Courier New"/>
+              </a:rPr>
+              <a:t>20</a:t>
+            </a:r>
+            <a:endParaRPr lang="en-US" sz="1100"/>
+          </a:p>
+        </p:txBody>
+      </p:sp>
+      <p:cxnSp>
+        <p:nvCxnSpPr>
+          <p:cNvPr name="Connector 41" id="41"/>
+          <p:cNvCxnSpPr/>
+          <p:nvPr/>
+        </p:nvCxnSpPr>
+        <p:spPr>
+          <a:xfrm flipV="false">
+            <a:off x="6606540" y="3700790"/>
+            <a:ext cx="4721860" cy="0"/>
+          </a:xfrm>
+          <a:prstGeom prst="line">
+            <a:avLst/>
+          </a:prstGeom>
+          <a:ln w="7620" cap="flat">
+            <a:solidFill>
+              <a:srgbClr val="303856"/>
+            </a:solidFill>
+          </a:ln>
+        </p:spPr>
+      </p:cxnSp>
+      <p:sp>
+        <p:nvSpPr>
+          <p:cNvPr name="GraphCompose Text Line" id="42"/>
+          <p:cNvSpPr txBox="true"/>
+          <p:nvPr/>
+        </p:nvSpPr>
+        <p:spPr>
+          <a:xfrm>
+            <a:off x="6426200" y="3648702"/>
+            <a:ext cx="130810" cy="84849"/>
+          </a:xfrm>
+          <a:prstGeom prst="rect">
+            <a:avLst/>
+          </a:prstGeom>
+        </p:spPr>
+        <p:txBody>
+          <a:bodyPr anchor="t" rtlCol="false" wrap="none" tIns="0" rIns="0" bIns="0" lIns="0">
+            <a:noAutofit/>
+          </a:bodyPr>
+          <a:lstStyle/>
+          <a:p>
+            <a:pPr algn="l">
+              <a:lnSpc>
+                <a:spcPct val="100000"/>
+              </a:lnSpc>
+              <a:spcBef>
+                <a:spcPct val="0"/>
+              </a:spcBef>
+              <a:spcAft>
+                <a:spcPct val="0"/>
+              </a:spcAft>
+              <a:defRPr/>
+            </a:pPr>
+            <a:r>
+              <a:rPr lang="en-US" sz="850" b="false" i="false" u="none" strike="noStrike" kern="0">
+                <a:solidFill>
+                  <a:srgbClr val="8C95AF"/>
+                </a:solidFill>
+                <a:latin typeface="Courier New"/>
+              </a:rPr>
+              <a:t>40</a:t>
+            </a:r>
+            <a:endParaRPr lang="en-US" sz="1100"/>
+          </a:p>
+        </p:txBody>
+      </p:sp>
+      <p:cxnSp>
+        <p:nvCxnSpPr>
+          <p:cNvPr name="Connector 43" id="43"/>
+          <p:cNvCxnSpPr/>
+          <p:nvPr/>
+        </p:nvCxnSpPr>
+        <p:spPr>
+          <a:xfrm flipV="false">
+            <a:off x="6606540" y="3248262"/>
+            <a:ext cx="4721860" cy="0"/>
+          </a:xfrm>
+          <a:prstGeom prst="line">
+            <a:avLst/>
+          </a:prstGeom>
+          <a:ln w="7620" cap="flat">
+            <a:solidFill>
+              <a:srgbClr val="303856"/>
+            </a:solidFill>
+          </a:ln>
+        </p:spPr>
+      </p:cxnSp>
+      <p:sp>
+        <p:nvSpPr>
+          <p:cNvPr name="GraphCompose Text Line" id="44"/>
+          <p:cNvSpPr txBox="true"/>
+          <p:nvPr/>
+        </p:nvSpPr>
+        <p:spPr>
+          <a:xfrm>
+            <a:off x="6426200" y="3196174"/>
+            <a:ext cx="130810" cy="84849"/>
+          </a:xfrm>
+          <a:prstGeom prst="rect">
+            <a:avLst/>
+          </a:prstGeom>
+        </p:spPr>
+        <p:txBody>
+          <a:bodyPr anchor="t" rtlCol="false" wrap="none" tIns="0" rIns="0" bIns="0" lIns="0">
+            <a:noAutofit/>
+          </a:bodyPr>
+          <a:lstStyle/>
+          <a:p>
+            <a:pPr algn="l">
+              <a:lnSpc>
+                <a:spcPct val="100000"/>
+              </a:lnSpc>
+              <a:spcBef>
+                <a:spcPct val="0"/>
+              </a:spcBef>
+              <a:spcAft>
+                <a:spcPct val="0"/>
+              </a:spcAft>
+              <a:defRPr/>
+            </a:pPr>
+            <a:r>
+              <a:rPr lang="en-US" sz="850" b="false" i="false" u="none" strike="noStrike" kern="0">
+                <a:solidFill>
+                  <a:srgbClr val="8C95AF"/>
+                </a:solidFill>
+                <a:latin typeface="Courier New"/>
+              </a:rPr>
+              <a:t>60</a:t>
+            </a:r>
+            <a:endParaRPr lang="en-US" sz="1100"/>
+          </a:p>
+        </p:txBody>
+      </p:sp>
+      <p:cxnSp>
+        <p:nvCxnSpPr>
+          <p:cNvPr name="Connector 45" id="45"/>
+          <p:cNvCxnSpPr/>
+          <p:nvPr/>
+        </p:nvCxnSpPr>
+        <p:spPr>
+          <a:xfrm flipV="false">
+            <a:off x="6606540" y="2795734"/>
+            <a:ext cx="4721860" cy="0"/>
+          </a:xfrm>
+          <a:prstGeom prst="line">
+            <a:avLst/>
+          </a:prstGeom>
+          <a:ln w="7620" cap="flat">
+            <a:solidFill>
+              <a:srgbClr val="303856"/>
+            </a:solidFill>
+          </a:ln>
+        </p:spPr>
+      </p:cxnSp>
+      <p:sp>
+        <p:nvSpPr>
+          <p:cNvPr name="GraphCompose Text Line" id="46"/>
+          <p:cNvSpPr txBox="true"/>
+          <p:nvPr/>
+        </p:nvSpPr>
+        <p:spPr>
+          <a:xfrm>
+            <a:off x="6426200" y="2743646"/>
+            <a:ext cx="130810" cy="84849"/>
+          </a:xfrm>
+          <a:prstGeom prst="rect">
+            <a:avLst/>
+          </a:prstGeom>
+        </p:spPr>
+        <p:txBody>
+          <a:bodyPr anchor="t" rtlCol="false" wrap="none" tIns="0" rIns="0" bIns="0" lIns="0">
+            <a:noAutofit/>
+          </a:bodyPr>
+          <a:lstStyle/>
+          <a:p>
+            <a:pPr algn="l">
+              <a:lnSpc>
+                <a:spcPct val="100000"/>
+              </a:lnSpc>
+              <a:spcBef>
+                <a:spcPct val="0"/>
+              </a:spcBef>
+              <a:spcAft>
+                <a:spcPct val="0"/>
+              </a:spcAft>
+              <a:defRPr/>
+            </a:pPr>
+            <a:r>
+              <a:rPr lang="en-US" sz="850" b="false" i="false" u="none" strike="noStrike" kern="0">
+                <a:solidFill>
+                  <a:srgbClr val="8C95AF"/>
+                </a:solidFill>
+                <a:latin typeface="Courier New"/>
+              </a:rPr>
+              <a:t>80</a:t>
+            </a:r>
+            <a:endParaRPr lang="en-US" sz="1100"/>
+          </a:p>
+        </p:txBody>
+      </p:sp>
+      <p:cxnSp>
+        <p:nvCxnSpPr>
+          <p:cNvPr name="Connector 47" id="47"/>
+          <p:cNvCxnSpPr/>
+          <p:nvPr/>
+        </p:nvCxnSpPr>
+        <p:spPr>
+          <a:xfrm flipV="true">
+            <a:off x="7393517" y="4516924"/>
+            <a:ext cx="1573953" cy="66522"/>
+          </a:xfrm>
+          <a:prstGeom prst="line">
+            <a:avLst/>
+          </a:prstGeom>
+          <a:ln w="25400" cap="flat">
+            <a:solidFill>
+              <a:srgbClr val="E9972D"/>
+            </a:solidFill>
+          </a:ln>
+        </p:spPr>
+      </p:cxnSp>
+      <p:cxnSp>
+        <p:nvCxnSpPr>
+          <p:cNvPr name="Connector 48" id="48"/>
+          <p:cNvCxnSpPr/>
+          <p:nvPr/>
+        </p:nvCxnSpPr>
+        <p:spPr>
+          <a:xfrm flipV="true">
+            <a:off x="8967470" y="4172324"/>
+            <a:ext cx="1573953" cy="344600"/>
+          </a:xfrm>
+          <a:prstGeom prst="line">
+            <a:avLst/>
+          </a:prstGeom>
+          <a:ln w="25400" cap="flat">
+            <a:solidFill>
+              <a:srgbClr val="E9972D"/>
+            </a:solidFill>
+          </a:ln>
+        </p:spPr>
+      </p:cxnSp>
+      <p:cxnSp>
+        <p:nvCxnSpPr>
+          <p:cNvPr name="Connector 49" id="49"/>
+          <p:cNvCxnSpPr/>
+          <p:nvPr/>
+        </p:nvCxnSpPr>
+        <p:spPr>
+          <a:xfrm flipV="true">
+            <a:off x="7393517" y="4293375"/>
+            <a:ext cx="1573953" cy="243460"/>
+          </a:xfrm>
+          <a:prstGeom prst="line">
+            <a:avLst/>
+          </a:prstGeom>
+          <a:ln w="25400" cap="flat">
+            <a:solidFill>
+              <a:srgbClr val="7A85A8"/>
+            </a:solidFill>
+          </a:ln>
+        </p:spPr>
+      </p:cxnSp>
+      <p:cxnSp>
+        <p:nvCxnSpPr>
+          <p:cNvPr name="Connector 50" id="50"/>
+          <p:cNvCxnSpPr/>
+          <p:nvPr/>
+        </p:nvCxnSpPr>
+        <p:spPr>
+          <a:xfrm flipV="true">
+            <a:off x="8967470" y="3063630"/>
+            <a:ext cx="1573953" cy="1229745"/>
+          </a:xfrm>
+          <a:prstGeom prst="line">
+            <a:avLst/>
+          </a:prstGeom>
+          <a:ln w="25400" cap="flat">
+            <a:solidFill>
+              <a:srgbClr val="7A85A8"/>
+            </a:solidFill>
+          </a:ln>
+        </p:spPr>
+      </p:cxnSp>
+      <p:cxnSp>
+        <p:nvCxnSpPr>
+          <p:cNvPr name="Connector 51" id="51"/>
+          <p:cNvCxnSpPr/>
+          <p:nvPr/>
+        </p:nvCxnSpPr>
+        <p:spPr>
+          <a:xfrm flipV="true">
+            <a:off x="7393517" y="4361254"/>
+            <a:ext cx="1573953" cy="187347"/>
+          </a:xfrm>
+          <a:prstGeom prst="line">
+            <a:avLst/>
+          </a:prstGeom>
+          <a:ln w="25400" cap="flat">
+            <a:solidFill>
+              <a:srgbClr val="5DC88F"/>
+            </a:solidFill>
+          </a:ln>
+        </p:spPr>
+      </p:cxnSp>
+      <p:cxnSp>
+        <p:nvCxnSpPr>
+          <p:cNvPr name="Connector 52" id="52"/>
+          <p:cNvCxnSpPr/>
+          <p:nvPr/>
+        </p:nvCxnSpPr>
+        <p:spPr>
+          <a:xfrm flipV="true">
+            <a:off x="8967470" y="3417281"/>
+            <a:ext cx="1573953" cy="943973"/>
+          </a:xfrm>
+          <a:prstGeom prst="line">
+            <a:avLst/>
+          </a:prstGeom>
+          <a:ln w="25400" cap="flat">
+            <a:solidFill>
+              <a:srgbClr val="5DC88F"/>
+            </a:solidFill>
+          </a:ln>
+        </p:spPr>
+      </p:cxnSp>
+      <p:sp>
+        <p:nvSpPr>
+          <p:cNvPr name="GraphCompose Text Line" id="53"/>
+          <p:cNvSpPr txBox="true"/>
+          <p:nvPr/>
+        </p:nvSpPr>
+        <p:spPr>
+          <a:xfrm>
+            <a:off x="7328747" y="4634676"/>
+            <a:ext cx="130810" cy="84849"/>
+          </a:xfrm>
+          <a:prstGeom prst="rect">
+            <a:avLst/>
+          </a:prstGeom>
+        </p:spPr>
+        <p:txBody>
+          <a:bodyPr anchor="t" rtlCol="false" wrap="none" tIns="0" rIns="0" bIns="0" lIns="0">
+            <a:noAutofit/>
+          </a:bodyPr>
+          <a:lstStyle/>
+          <a:p>
+            <a:pPr algn="l">
+              <a:lnSpc>
+                <a:spcPct val="100000"/>
+              </a:lnSpc>
+              <a:spcBef>
+                <a:spcPct val="0"/>
+              </a:spcBef>
+              <a:spcAft>
+                <a:spcPct val="0"/>
+              </a:spcAft>
+              <a:defRPr/>
+            </a:pPr>
+            <a:r>
+              <a:rPr lang="en-US" sz="850" b="false" i="false" u="none" strike="noStrike" kern="0">
+                <a:solidFill>
+                  <a:srgbClr val="8C95AF"/>
+                </a:solidFill>
+                <a:latin typeface="Courier New"/>
+              </a:rPr>
+              <a:t>40</a:t>
+            </a:r>
+            <a:endParaRPr lang="en-US" sz="1100"/>
+          </a:p>
+        </p:txBody>
+      </p:sp>
+      <p:sp>
+        <p:nvSpPr>
+          <p:cNvPr name="GraphCompose Text Line" id="54"/>
+          <p:cNvSpPr txBox="true"/>
+          <p:nvPr/>
+        </p:nvSpPr>
+        <p:spPr>
+          <a:xfrm>
+            <a:off x="8870315" y="4634676"/>
+            <a:ext cx="195580" cy="84849"/>
+          </a:xfrm>
+          <a:prstGeom prst="rect">
+            <a:avLst/>
+          </a:prstGeom>
+        </p:spPr>
+        <p:txBody>
+          <a:bodyPr anchor="t" rtlCol="false" wrap="none" tIns="0" rIns="0" bIns="0" lIns="0">
+            <a:noAutofit/>
+          </a:bodyPr>
+          <a:lstStyle/>
+          <a:p>
+            <a:pPr algn="l">
+              <a:lnSpc>
+                <a:spcPct val="100000"/>
+              </a:lnSpc>
+              <a:spcBef>
+                <a:spcPct val="0"/>
+              </a:spcBef>
+              <a:spcAft>
+                <a:spcPct val="0"/>
+              </a:spcAft>
+              <a:defRPr/>
+            </a:pPr>
+            <a:r>
+              <a:rPr lang="en-US" sz="850" b="false" i="false" u="none" strike="noStrike" kern="0">
+                <a:solidFill>
+                  <a:srgbClr val="8C95AF"/>
+                </a:solidFill>
+                <a:latin typeface="Courier New"/>
+              </a:rPr>
+              <a:t>200</a:t>
+            </a:r>
+            <a:endParaRPr lang="en-US" sz="1100"/>
+          </a:p>
+        </p:txBody>
+      </p:sp>
+      <p:sp>
+        <p:nvSpPr>
+          <p:cNvPr name="GraphCompose Text Line" id="55"/>
+          <p:cNvSpPr txBox="true"/>
+          <p:nvPr/>
+        </p:nvSpPr>
+        <p:spPr>
+          <a:xfrm>
+            <a:off x="10411883" y="4634676"/>
+            <a:ext cx="260350" cy="84849"/>
+          </a:xfrm>
+          <a:prstGeom prst="rect">
+            <a:avLst/>
+          </a:prstGeom>
+        </p:spPr>
+        <p:txBody>
+          <a:bodyPr anchor="t" rtlCol="false" wrap="none" tIns="0" rIns="0" bIns="0" lIns="0">
+            <a:noAutofit/>
+          </a:bodyPr>
+          <a:lstStyle/>
+          <a:p>
+            <a:pPr algn="l">
+              <a:lnSpc>
+                <a:spcPct val="100000"/>
+              </a:lnSpc>
+              <a:spcBef>
+                <a:spcPct val="0"/>
+              </a:spcBef>
+              <a:spcAft>
+                <a:spcPct val="0"/>
+              </a:spcAft>
+              <a:defRPr/>
+            </a:pPr>
+            <a:r>
+              <a:rPr lang="en-US" sz="850" b="false" i="false" u="none" strike="noStrike" kern="0">
+                <a:solidFill>
+                  <a:srgbClr val="8C95AF"/>
+                </a:solidFill>
+                <a:latin typeface="Courier New"/>
+              </a:rPr>
+              <a:t>1000</a:t>
+            </a:r>
+            <a:endParaRPr lang="en-US" sz="1100"/>
+          </a:p>
+        </p:txBody>
+      </p:sp>
+      <p:sp>
+        <p:nvSpPr>
+          <p:cNvPr name="AutoShape 56" id="56"/>
+          <p:cNvSpPr/>
+          <p:nvPr/>
+        </p:nvSpPr>
+        <p:spPr>
+          <a:xfrm>
+            <a:off x="7505389" y="4751807"/>
+            <a:ext cx="114300" cy="114300"/>
+          </a:xfrm>
+          <a:prstGeom prst="roundRect">
+            <a:avLst>
+              <a:gd name="adj" fmla="val 16667"/>
+            </a:avLst>
+          </a:prstGeom>
+          <a:solidFill>
+            <a:srgbClr val="E9972D"/>
+          </a:solidFill>
+          <a:ln>
+            <a:noFill/>
+          </a:ln>
+        </p:spPr>
+      </p:sp>
+      <p:sp>
+        <p:nvSpPr>
+          <p:cNvPr name="GraphCompose Text Line" id="57"/>
+          <p:cNvSpPr txBox="true"/>
+          <p:nvPr/>
+        </p:nvSpPr>
+        <p:spPr>
+          <a:xfrm>
+            <a:off x="7670489" y="4745489"/>
+            <a:ext cx="807999" cy="105727"/>
+          </a:xfrm>
+          <a:prstGeom prst="rect">
+            <a:avLst/>
+          </a:prstGeom>
+        </p:spPr>
+        <p:txBody>
+          <a:bodyPr anchor="t" rtlCol="false" wrap="none" tIns="0" rIns="0" bIns="0" lIns="0">
+            <a:noAutofit/>
+          </a:bodyPr>
+          <a:lstStyle/>
+          <a:p>
+            <a:pPr algn="l">
+              <a:lnSpc>
+                <a:spcPct val="100000"/>
+              </a:lnSpc>
+              <a:spcBef>
+                <a:spcPct val="0"/>
+              </a:spcBef>
+              <a:spcAft>
+                <a:spcPct val="0"/>
+              </a:spcAft>
+              <a:defRPr/>
+            </a:pPr>
+            <a:r>
+              <a:rPr lang="en-US" sz="900" b="false" i="false" u="none" strike="noStrike" kern="0">
+                <a:solidFill>
+                  <a:srgbClr val="8C95AF"/>
+                </a:solidFill>
+                <a:latin typeface="Arial"/>
+              </a:rPr>
+              <a:t>GraphCompose</a:t>
+            </a:r>
+            <a:endParaRPr lang="en-US" sz="1100"/>
+          </a:p>
+        </p:txBody>
+      </p:sp>
+      <p:sp>
+        <p:nvSpPr>
+          <p:cNvPr name="AutoShape 58" id="58"/>
+          <p:cNvSpPr/>
+          <p:nvPr/>
+        </p:nvSpPr>
+        <p:spPr>
+          <a:xfrm>
+            <a:off x="8655018" y="4751807"/>
+            <a:ext cx="114300" cy="114300"/>
+          </a:xfrm>
+          <a:prstGeom prst="roundRect">
+            <a:avLst>
+              <a:gd name="adj" fmla="val 16667"/>
+            </a:avLst>
+          </a:prstGeom>
+          <a:solidFill>
+            <a:srgbClr val="7A85A8"/>
+          </a:solidFill>
+          <a:ln>
+            <a:noFill/>
+          </a:ln>
+        </p:spPr>
+      </p:sp>
+      <p:sp>
+        <p:nvSpPr>
+          <p:cNvPr name="GraphCompose Text Line" id="59"/>
+          <p:cNvSpPr txBox="true"/>
+          <p:nvPr/>
+        </p:nvSpPr>
+        <p:spPr>
+          <a:xfrm>
+            <a:off x="8820118" y="4745489"/>
+            <a:ext cx="344284" cy="105727"/>
+          </a:xfrm>
+          <a:prstGeom prst="rect">
+            <a:avLst/>
+          </a:prstGeom>
+        </p:spPr>
+        <p:txBody>
+          <a:bodyPr anchor="t" rtlCol="false" wrap="none" tIns="0" rIns="0" bIns="0" lIns="0">
+            <a:noAutofit/>
+          </a:bodyPr>
+          <a:lstStyle/>
+          <a:p>
+            <a:pPr algn="l">
+              <a:lnSpc>
+                <a:spcPct val="100000"/>
+              </a:lnSpc>
+              <a:spcBef>
+                <a:spcPct val="0"/>
+              </a:spcBef>
+              <a:spcAft>
+                <a:spcPct val="0"/>
+              </a:spcAft>
+              <a:defRPr/>
+            </a:pPr>
+            <a:r>
+              <a:rPr lang="en-US" sz="900" b="false" i="false" u="none" strike="noStrike" kern="0">
+                <a:solidFill>
+                  <a:srgbClr val="8C95AF"/>
+                </a:solidFill>
+                <a:latin typeface="Arial"/>
+              </a:rPr>
+              <a:t>iText 9</a:t>
+            </a:r>
+            <a:endParaRPr lang="en-US" sz="1100"/>
+          </a:p>
+        </p:txBody>
+      </p:sp>
+      <p:sp>
+        <p:nvSpPr>
+          <p:cNvPr name="AutoShape 60" id="60"/>
+          <p:cNvSpPr/>
+          <p:nvPr/>
+        </p:nvSpPr>
+        <p:spPr>
+          <a:xfrm>
+            <a:off x="9340933" y="4751807"/>
+            <a:ext cx="114300" cy="114300"/>
+          </a:xfrm>
+          <a:prstGeom prst="roundRect">
+            <a:avLst>
+              <a:gd name="adj" fmla="val 16667"/>
+            </a:avLst>
+          </a:prstGeom>
+          <a:solidFill>
+            <a:srgbClr val="5DC88F"/>
+          </a:solidFill>
+          <a:ln>
+            <a:noFill/>
+          </a:ln>
+        </p:spPr>
+      </p:sp>
+      <p:sp>
+        <p:nvSpPr>
+          <p:cNvPr name="GraphCompose Text Line" id="61"/>
+          <p:cNvSpPr txBox="true"/>
+          <p:nvPr/>
+        </p:nvSpPr>
+        <p:spPr>
+          <a:xfrm>
+            <a:off x="9506033" y="4745489"/>
+            <a:ext cx="744449" cy="105727"/>
+          </a:xfrm>
+          <a:prstGeom prst="rect">
+            <a:avLst/>
+          </a:prstGeom>
+        </p:spPr>
+        <p:txBody>
+          <a:bodyPr anchor="t" rtlCol="false" wrap="none" tIns="0" rIns="0" bIns="0" lIns="0">
+            <a:noAutofit/>
+          </a:bodyPr>
+          <a:lstStyle/>
+          <a:p>
+            <a:pPr algn="l">
+              <a:lnSpc>
+                <a:spcPct val="100000"/>
+              </a:lnSpc>
+              <a:spcBef>
+                <a:spcPct val="0"/>
+              </a:spcBef>
+              <a:spcAft>
+                <a:spcPct val="0"/>
+              </a:spcAft>
+              <a:defRPr/>
+            </a:pPr>
+            <a:r>
+              <a:rPr lang="en-US" sz="900" b="false" i="false" u="none" strike="noStrike" kern="0">
+                <a:solidFill>
+                  <a:srgbClr val="8C95AF"/>
+                </a:solidFill>
+                <a:latin typeface="Arial"/>
+              </a:rPr>
+              <a:t>JasperReports</a:t>
+            </a:r>
+            <a:endParaRPr lang="en-US" sz="1100"/>
+          </a:p>
+        </p:txBody>
+      </p:sp>
+      <p:sp>
+        <p:nvSpPr>
+          <p:cNvPr name="GraphCompose Text Line" id="62"/>
+          <p:cNvSpPr txBox="true"/>
+          <p:nvPr/>
+        </p:nvSpPr>
+        <p:spPr>
+          <a:xfrm>
+            <a:off x="660400" y="5332627"/>
+            <a:ext cx="10697496" cy="111601"/>
+          </a:xfrm>
+          <a:prstGeom prst="rect">
+            <a:avLst/>
+          </a:prstGeom>
+        </p:spPr>
+        <p:txBody>
+          <a:bodyPr anchor="t" rtlCol="false" wrap="none" tIns="0" rIns="0" bIns="0" lIns="0">
+            <a:noAutofit/>
+          </a:bodyPr>
+          <a:lstStyle/>
+          <a:p>
+            <a:pPr algn="l">
+              <a:lnSpc>
+                <a:spcPct val="100000"/>
+              </a:lnSpc>
+              <a:spcBef>
+                <a:spcPct val="0"/>
+              </a:spcBef>
+              <a:spcAft>
+                <a:spcPct val="0"/>
+              </a:spcAft>
+              <a:defRPr/>
+            </a:pPr>
+            <a:r>
+              <a:rPr lang="en-US" sz="950" b="false" i="false" u="none" strike="noStrike" kern="0">
+                <a:solidFill>
+                  <a:srgbClr val="68728E"/>
+                </a:solidFill>
+                <a:latin typeface="Arial"/>
+              </a:rPr>
+              <a:t>Both charts are native vector output: the engine compiles them to the same shapes, lines and text frames as everything else on the page — no image is embedded, and the numbers come from the file,</a:t>
+            </a:r>
+            <a:endParaRPr lang="en-US" sz="1100"/>
+          </a:p>
+        </p:txBody>
+      </p:sp>
+      <p:sp>
+        <p:nvSpPr>
+          <p:cNvPr name="GraphCompose Text Line" id="63"/>
+          <p:cNvSpPr txBox="true"/>
+          <p:nvPr/>
+        </p:nvSpPr>
+        <p:spPr>
+          <a:xfrm>
+            <a:off x="660400" y="5482328"/>
+            <a:ext cx="826275" cy="111601"/>
+          </a:xfrm>
+          <a:prstGeom prst="rect">
+            <a:avLst/>
+          </a:prstGeom>
+        </p:spPr>
+        <p:txBody>
+          <a:bodyPr anchor="t" rtlCol="false" wrap="none" tIns="0" rIns="0" bIns="0" lIns="0">
+            <a:noAutofit/>
+          </a:bodyPr>
+          <a:lstStyle/>
+          <a:p>
+            <a:pPr algn="l">
+              <a:lnSpc>
+                <a:spcPct val="100000"/>
+              </a:lnSpc>
+              <a:spcBef>
+                <a:spcPct val="0"/>
+              </a:spcBef>
+              <a:spcAft>
+                <a:spcPct val="0"/>
+              </a:spcAft>
+              <a:defRPr/>
+            </a:pPr>
+            <a:r>
+              <a:rPr lang="en-US" sz="950" b="false" i="false" u="none" strike="noStrike" kern="0">
+                <a:solidFill>
+                  <a:srgbClr val="68728E"/>
+                </a:solidFill>
+                <a:latin typeface="Arial"/>
+              </a:rPr>
+              <a:t>not the caption.</a:t>
             </a:r>
             <a:endParaRPr lang="en-US" sz="1100"/>
           </a:p>

--- a/assets/readme/examples/maven-banner.pptx
+++ b/assets/readme/examples/maven-banner.pptx
@@ -12540,7 +12540,7 @@
                 </a:solidFill>
                 <a:latin typeface="Arial"/>
               </a:rPr>
-              <a:t>2.8 ms · 0.2 MB</a:t>
+              <a:t>2.0 ms · 0.2 MB</a:t>
             </a:r>
             <a:endParaRPr lang="en-US" sz="1100"/>
           </a:p>
@@ -12619,7 +12619,7 @@
                 </a:solidFill>
                 <a:latin typeface="Arial"/>
               </a:rPr>
-              <a:t>2.8 ms · 0.2 MB</a:t>
+              <a:t>2.1 ms · 0.2 MB</a:t>
             </a:r>
             <a:endParaRPr lang="en-US" sz="1100"/>
           </a:p>
@@ -12698,7 +12698,7 @@
                 </a:solidFill>
                 <a:latin typeface="Arial"/>
               </a:rPr>
-              <a:t>5.7 ms · 0.2 MB</a:t>
+              <a:t>4.2 ms · 0.2 MB</a:t>
             </a:r>
             <a:endParaRPr lang="en-US" sz="1100"/>
           </a:p>
@@ -12877,7 +12877,7 @@
                 </a:solidFill>
                 <a:latin typeface="Arial"/>
               </a:rPr>
-              <a:t>5.7 ms · 1.0 MB</a:t>
+              <a:t>4.1 ms · 1.0 MB</a:t>
             </a:r>
             <a:endParaRPr lang="en-US" sz="1100"/>
           </a:p>
@@ -12956,7 +12956,7 @@
                 </a:solidFill>
                 <a:latin typeface="Arial"/>
               </a:rPr>
-              <a:t>14.5 ms · 3.1 MB</a:t>
+              <a:t>10.0 ms · 3.0 MB</a:t>
             </a:r>
             <a:endParaRPr lang="en-US" sz="1100"/>
           </a:p>
@@ -13035,7 +13035,7 @@
                 </a:solidFill>
                 <a:latin typeface="Arial"/>
               </a:rPr>
-              <a:t>9.9 ms · 2.5 MB</a:t>
+              <a:t>8.3 ms · 2.5 MB</a:t>
             </a:r>
             <a:endParaRPr lang="en-US" sz="1100"/>
           </a:p>
@@ -13214,7 +13214,7 @@
                 </a:solidFill>
                 <a:latin typeface="Arial"/>
               </a:rPr>
-              <a:t>15.3 ms · 3.9 MB</a:t>
+              <a:t>10.9 ms · 4.0 MB</a:t>
             </a:r>
             <a:endParaRPr lang="en-US" sz="1100"/>
           </a:p>
@@ -13293,7 +13293,7 @@
                 </a:solidFill>
                 <a:latin typeface="Arial"/>
               </a:rPr>
-              <a:t>57.6 ms · 13.8 MB</a:t>
+              <a:t>36.6 ms · 13.6 MB</a:t>
             </a:r>
             <a:endParaRPr lang="en-US" sz="1100"/>
           </a:p>
@@ -13372,7 +13372,7 @@
                 </a:solidFill>
                 <a:latin typeface="Arial"/>
               </a:rPr>
-              <a:t>21.1 ms · 10.8 MB</a:t>
+              <a:t>13.5 ms · 10.8 MB</a:t>
             </a:r>
             <a:endParaRPr lang="en-US" sz="1100"/>
           </a:p>
@@ -13551,7 +13551,7 @@
                 </a:solidFill>
                 <a:latin typeface="Arial"/>
               </a:rPr>
-              <a:t>64.1 ms · 19.2 MB</a:t>
+              <a:t>42.8 ms · 19.3 MB</a:t>
             </a:r>
             <a:endParaRPr lang="en-US" sz="1100"/>
           </a:p>
@@ -13630,7 +13630,7 @@
                 </a:solidFill>
                 <a:latin typeface="Arial"/>
               </a:rPr>
-              <a:t>291.0 ms · 68.2 MB</a:t>
+              <a:t>189.1 ms · 67.3 MB</a:t>
             </a:r>
             <a:endParaRPr lang="en-US" sz="1100"/>
           </a:p>
@@ -13709,7 +13709,7 @@
                 </a:solidFill>
                 <a:latin typeface="Arial"/>
               </a:rPr>
-              <a:t>64.8 ms · 52.5 MB</a:t>
+              <a:t>43.7 ms · 52.5 MB</a:t>
             </a:r>
             <a:endParaRPr lang="en-US" sz="1100"/>
           </a:p>
@@ -13800,7 +13800,7 @@
                 </a:solidFill>
                 <a:latin typeface="Arial"/>
               </a:rPr>
-              <a:t>4.5x</a:t>
+              <a:t>4.4x</a:t>
             </a:r>
             <a:endParaRPr lang="en-US" sz="1100"/>
           </a:p>
@@ -13937,7 +13937,7 @@
                 </a:solidFill>
                 <a:latin typeface="Arial"/>
               </a:rPr>
-              <a:t>3.6x</a:t>
+              <a:t>3.5x</a:t>
             </a:r>
             <a:endParaRPr lang="en-US" sz="1100"/>
           </a:p>
@@ -14166,7 +14166,7 @@
                 </a:solidFill>
                 <a:latin typeface="Arial"/>
               </a:rPr>
-              <a:t>Measured 2026-07-26 23:00:56 · 50 warmup / 100 measurement iterations on one machine. Read the ratios rather than the milliseconds: all three engines are measured in the same run, so their</a:t>
+              <a:t>Measured 2026-08-04 22:16:04 · 50 warmup / 100 measurement iterations on one machine. Read the ratios rather than the milliseconds: all three engines are measured in the same run, so their</a:t>
             </a:r>
             <a:endParaRPr lang="en-US" sz="1100"/>
           </a:p>
@@ -14664,7 +14664,7 @@
         </p:nvCxnSpPr>
         <p:spPr>
           <a:xfrm flipV="false">
-            <a:off x="1108710" y="4002475"/>
+            <a:off x="1108710" y="4153318"/>
             <a:ext cx="4657090" cy="0"/>
           </a:xfrm>
           <a:prstGeom prst="line">
@@ -14685,7 +14685,74 @@
         </p:nvSpPr>
         <p:spPr>
           <a:xfrm>
-            <a:off x="863600" y="3950387"/>
+            <a:off x="928370" y="4101230"/>
+            <a:ext cx="130810" cy="84849"/>
+          </a:xfrm>
+          <a:prstGeom prst="rect">
+            <a:avLst/>
+          </a:prstGeom>
+        </p:spPr>
+        <p:txBody>
+          <a:bodyPr anchor="t" rtlCol="false" wrap="none" tIns="0" rIns="0" bIns="0" lIns="0">
+            <a:noAutofit/>
+          </a:bodyPr>
+          <a:lstStyle/>
+          <a:p>
+            <a:pPr algn="l">
+              <a:lnSpc>
+                <a:spcPct val="100000"/>
+              </a:lnSpc>
+              <a:spcBef>
+                <a:spcPct val="0"/>
+              </a:spcBef>
+              <a:spcAft>
+                <a:spcPct val="0"/>
+              </a:spcAft>
+              <a:defRPr/>
+            </a:pPr>
+            <a:r>
+              <a:rPr lang="en-US" sz="850" b="false" i="false" u="none" strike="noStrike" kern="0">
+                <a:solidFill>
+                  <a:srgbClr val="8C95AF"/>
+                </a:solidFill>
+                <a:latin typeface="Courier New"/>
+              </a:rPr>
+              <a:t>50</a:t>
+            </a:r>
+            <a:endParaRPr lang="en-US" sz="1100"/>
+          </a:p>
+        </p:txBody>
+      </p:sp>
+      <p:cxnSp>
+        <p:nvCxnSpPr>
+          <p:cNvPr name="Connector 15" id="15"/>
+          <p:cNvCxnSpPr/>
+          <p:nvPr/>
+        </p:nvCxnSpPr>
+        <p:spPr>
+          <a:xfrm flipV="false">
+            <a:off x="1108710" y="3700790"/>
+            <a:ext cx="4657090" cy="0"/>
+          </a:xfrm>
+          <a:prstGeom prst="line">
+            <a:avLst/>
+          </a:prstGeom>
+          <a:ln w="7620" cap="flat">
+            <a:solidFill>
+              <a:srgbClr val="303856"/>
+            </a:solidFill>
+          </a:ln>
+        </p:spPr>
+      </p:cxnSp>
+      <p:sp>
+        <p:nvSpPr>
+          <p:cNvPr name="GraphCompose Text Line" id="16"/>
+          <p:cNvSpPr txBox="true"/>
+          <p:nvPr/>
+        </p:nvSpPr>
+        <p:spPr>
+          <a:xfrm>
+            <a:off x="863600" y="3648702"/>
             <a:ext cx="195580" cy="84849"/>
           </a:xfrm>
           <a:prstGeom prst="rect">
@@ -14725,13 +14792,13 @@
       </p:sp>
       <p:cxnSp>
         <p:nvCxnSpPr>
-          <p:cNvPr name="Connector 15" id="15"/>
+          <p:cNvPr name="Connector 17" id="17"/>
           <p:cNvCxnSpPr/>
           <p:nvPr/>
         </p:nvCxnSpPr>
         <p:spPr>
           <a:xfrm flipV="false">
-            <a:off x="1108710" y="3399104"/>
+            <a:off x="1108710" y="3248262"/>
             <a:ext cx="4657090" cy="0"/>
           </a:xfrm>
           <a:prstGeom prst="line">
@@ -14746,13 +14813,80 @@
       </p:cxnSp>
       <p:sp>
         <p:nvSpPr>
-          <p:cNvPr name="GraphCompose Text Line" id="16"/>
+          <p:cNvPr name="GraphCompose Text Line" id="18"/>
           <p:cNvSpPr txBox="true"/>
           <p:nvPr/>
         </p:nvSpPr>
         <p:spPr>
           <a:xfrm>
-            <a:off x="863600" y="3347016"/>
+            <a:off x="863600" y="3196174"/>
+            <a:ext cx="195580" cy="84849"/>
+          </a:xfrm>
+          <a:prstGeom prst="rect">
+            <a:avLst/>
+          </a:prstGeom>
+        </p:spPr>
+        <p:txBody>
+          <a:bodyPr anchor="t" rtlCol="false" wrap="none" tIns="0" rIns="0" bIns="0" lIns="0">
+            <a:noAutofit/>
+          </a:bodyPr>
+          <a:lstStyle/>
+          <a:p>
+            <a:pPr algn="l">
+              <a:lnSpc>
+                <a:spcPct val="100000"/>
+              </a:lnSpc>
+              <a:spcBef>
+                <a:spcPct val="0"/>
+              </a:spcBef>
+              <a:spcAft>
+                <a:spcPct val="0"/>
+              </a:spcAft>
+              <a:defRPr/>
+            </a:pPr>
+            <a:r>
+              <a:rPr lang="en-US" sz="850" b="false" i="false" u="none" strike="noStrike" kern="0">
+                <a:solidFill>
+                  <a:srgbClr val="8C95AF"/>
+                </a:solidFill>
+                <a:latin typeface="Courier New"/>
+              </a:rPr>
+              <a:t>150</a:t>
+            </a:r>
+            <a:endParaRPr lang="en-US" sz="1100"/>
+          </a:p>
+        </p:txBody>
+      </p:sp>
+      <p:cxnSp>
+        <p:nvCxnSpPr>
+          <p:cNvPr name="Connector 19" id="19"/>
+          <p:cNvCxnSpPr/>
+          <p:nvPr/>
+        </p:nvCxnSpPr>
+        <p:spPr>
+          <a:xfrm flipV="false">
+            <a:off x="1108710" y="2795734"/>
+            <a:ext cx="4657090" cy="0"/>
+          </a:xfrm>
+          <a:prstGeom prst="line">
+            <a:avLst/>
+          </a:prstGeom>
+          <a:ln w="7620" cap="flat">
+            <a:solidFill>
+              <a:srgbClr val="303856"/>
+            </a:solidFill>
+          </a:ln>
+        </p:spPr>
+      </p:cxnSp>
+      <p:sp>
+        <p:nvSpPr>
+          <p:cNvPr name="GraphCompose Text Line" id="20"/>
+          <p:cNvSpPr txBox="true"/>
+          <p:nvPr/>
+        </p:nvSpPr>
+        <p:spPr>
+          <a:xfrm>
+            <a:off x="863600" y="2743646"/>
             <a:ext cx="195580" cy="84849"/>
           </a:xfrm>
           <a:prstGeom prst="rect">
@@ -14792,81 +14926,14 @@
       </p:sp>
       <p:cxnSp>
         <p:nvCxnSpPr>
-          <p:cNvPr name="Connector 17" id="17"/>
+          <p:cNvPr name="Connector 21" id="21"/>
           <p:cNvCxnSpPr/>
           <p:nvPr/>
         </p:nvCxnSpPr>
         <p:spPr>
-          <a:xfrm flipV="false">
-            <a:off x="1108710" y="2795734"/>
-            <a:ext cx="4657090" cy="0"/>
-          </a:xfrm>
-          <a:prstGeom prst="line">
-            <a:avLst/>
-          </a:prstGeom>
-          <a:ln w="7620" cap="flat">
-            <a:solidFill>
-              <a:srgbClr val="303856"/>
-            </a:solidFill>
-          </a:ln>
-        </p:spPr>
-      </p:cxnSp>
-      <p:sp>
-        <p:nvSpPr>
-          <p:cNvPr name="GraphCompose Text Line" id="18"/>
-          <p:cNvSpPr txBox="true"/>
-          <p:nvPr/>
-        </p:nvSpPr>
-        <p:spPr>
-          <a:xfrm>
-            <a:off x="863600" y="2743646"/>
-            <a:ext cx="195580" cy="84849"/>
-          </a:xfrm>
-          <a:prstGeom prst="rect">
-            <a:avLst/>
-          </a:prstGeom>
-        </p:spPr>
-        <p:txBody>
-          <a:bodyPr anchor="t" rtlCol="false" wrap="none" tIns="0" rIns="0" bIns="0" lIns="0">
-            <a:noAutofit/>
-          </a:bodyPr>
-          <a:lstStyle/>
-          <a:p>
-            <a:pPr algn="l">
-              <a:lnSpc>
-                <a:spcPct val="100000"/>
-              </a:lnSpc>
-              <a:spcBef>
-                <a:spcPct val="0"/>
-              </a:spcBef>
-              <a:spcAft>
-                <a:spcPct val="0"/>
-              </a:spcAft>
-              <a:defRPr/>
-            </a:pPr>
-            <a:r>
-              <a:rPr lang="en-US" sz="850" b="false" i="false" u="none" strike="noStrike" kern="0">
-                <a:solidFill>
-                  <a:srgbClr val="8C95AF"/>
-                </a:solidFill>
-                <a:latin typeface="Courier New"/>
-              </a:rPr>
-              <a:t>300</a:t>
-            </a:r>
-            <a:endParaRPr lang="en-US" sz="1100"/>
-          </a:p>
-        </p:txBody>
-      </p:sp>
-      <p:cxnSp>
-        <p:nvCxnSpPr>
-          <p:cNvPr name="Connector 19" id="19"/>
-          <p:cNvCxnSpPr/>
-          <p:nvPr/>
-        </p:nvCxnSpPr>
-        <p:spPr>
           <a:xfrm flipV="true">
-            <a:off x="1884892" y="4513771"/>
-            <a:ext cx="1552363" cy="57682"/>
+            <a:off x="1884892" y="4507104"/>
+            <a:ext cx="1552363" cy="61815"/>
           </a:xfrm>
           <a:prstGeom prst="line">
             <a:avLst/>
@@ -14874,48 +14941,6 @@
           <a:ln w="25400" cap="flat">
             <a:solidFill>
               <a:srgbClr val="E9972D"/>
-            </a:solidFill>
-          </a:ln>
-        </p:spPr>
-      </p:cxnSp>
-      <p:cxnSp>
-        <p:nvCxnSpPr>
-          <p:cNvPr name="Connector 20" id="20"/>
-          <p:cNvCxnSpPr/>
-          <p:nvPr/>
-        </p:nvCxnSpPr>
-        <p:spPr>
-          <a:xfrm flipV="true">
-            <a:off x="3437255" y="4219206"/>
-            <a:ext cx="1552363" cy="294566"/>
-          </a:xfrm>
-          <a:prstGeom prst="line">
-            <a:avLst/>
-          </a:prstGeom>
-          <a:ln w="25400" cap="flat">
-            <a:solidFill>
-              <a:srgbClr val="E9972D"/>
-            </a:solidFill>
-          </a:ln>
-        </p:spPr>
-      </p:cxnSp>
-      <p:cxnSp>
-        <p:nvCxnSpPr>
-          <p:cNvPr name="Connector 21" id="21"/>
-          <p:cNvCxnSpPr/>
-          <p:nvPr/>
-        </p:nvCxnSpPr>
-        <p:spPr>
-          <a:xfrm flipV="true">
-            <a:off x="1884892" y="4258485"/>
-            <a:ext cx="1552363" cy="259630"/>
-          </a:xfrm>
-          <a:prstGeom prst="line">
-            <a:avLst/>
-          </a:prstGeom>
-          <a:ln w="25400" cap="flat">
-            <a:solidFill>
-              <a:srgbClr val="7A85A8"/>
             </a:solidFill>
           </a:ln>
         </p:spPr>
@@ -14928,15 +14953,15 @@
         </p:nvCxnSpPr>
         <p:spPr>
           <a:xfrm flipV="true">
-            <a:off x="3437255" y="2849856"/>
-            <a:ext cx="1552363" cy="1408629"/>
+            <a:off x="3437255" y="4218844"/>
+            <a:ext cx="1552363" cy="288260"/>
           </a:xfrm>
           <a:prstGeom prst="line">
             <a:avLst/>
           </a:prstGeom>
           <a:ln w="25400" cap="flat">
             <a:solidFill>
-              <a:srgbClr val="7A85A8"/>
+              <a:srgbClr val="E9972D"/>
             </a:solidFill>
           </a:ln>
         </p:spPr>
@@ -14949,15 +14974,15 @@
         </p:nvCxnSpPr>
         <p:spPr>
           <a:xfrm flipV="true">
-            <a:off x="1884892" y="4478353"/>
-            <a:ext cx="1552363" cy="67819"/>
+            <a:off x="1884892" y="4274867"/>
+            <a:ext cx="1552363" cy="240835"/>
           </a:xfrm>
           <a:prstGeom prst="line">
             <a:avLst/>
           </a:prstGeom>
           <a:ln w="25400" cap="flat">
             <a:solidFill>
-              <a:srgbClr val="5DC88F"/>
+              <a:srgbClr val="7A85A8"/>
             </a:solidFill>
           </a:ln>
         </p:spPr>
@@ -14970,8 +14995,29 @@
         </p:nvCxnSpPr>
         <p:spPr>
           <a:xfrm flipV="true">
-            <a:off x="3437255" y="4215042"/>
-            <a:ext cx="1552363" cy="263311"/>
+            <a:off x="3437255" y="2894204"/>
+            <a:ext cx="1552363" cy="1380663"/>
+          </a:xfrm>
+          <a:prstGeom prst="line">
+            <a:avLst/>
+          </a:prstGeom>
+          <a:ln w="25400" cap="flat">
+            <a:solidFill>
+              <a:srgbClr val="7A85A8"/>
+            </a:solidFill>
+          </a:ln>
+        </p:spPr>
+      </p:cxnSp>
+      <p:cxnSp>
+        <p:nvCxnSpPr>
+          <p:cNvPr name="Connector 25" id="25"/>
+          <p:cNvCxnSpPr/>
+          <p:nvPr/>
+        </p:nvCxnSpPr>
+        <p:spPr>
+          <a:xfrm flipV="true">
+            <a:off x="1884892" y="4484025"/>
+            <a:ext cx="1552363" cy="47063"/>
           </a:xfrm>
           <a:prstGeom prst="line">
             <a:avLst/>
@@ -14983,9 +15029,30 @@
           </a:ln>
         </p:spPr>
       </p:cxnSp>
-      <p:sp>
-        <p:nvSpPr>
-          <p:cNvPr name="GraphCompose Text Line" id="25"/>
+      <p:cxnSp>
+        <p:nvCxnSpPr>
+          <p:cNvPr name="Connector 26" id="26"/>
+          <p:cNvCxnSpPr/>
+          <p:nvPr/>
+        </p:nvCxnSpPr>
+        <p:spPr>
+          <a:xfrm flipV="true">
+            <a:off x="3437255" y="4210517"/>
+            <a:ext cx="1552363" cy="273508"/>
+          </a:xfrm>
+          <a:prstGeom prst="line">
+            <a:avLst/>
+          </a:prstGeom>
+          <a:ln w="25400" cap="flat">
+            <a:solidFill>
+              <a:srgbClr val="5DC88F"/>
+            </a:solidFill>
+          </a:ln>
+        </p:spPr>
+      </p:cxnSp>
+      <p:sp>
+        <p:nvSpPr>
+          <p:cNvPr name="GraphCompose Text Line" id="27"/>
           <p:cNvSpPr txBox="true"/>
           <p:nvPr/>
         </p:nvSpPr>
@@ -15031,7 +15098,7 @@
       </p:sp>
       <p:sp>
         <p:nvSpPr>
-          <p:cNvPr name="GraphCompose Text Line" id="26"/>
+          <p:cNvPr name="GraphCompose Text Line" id="28"/>
           <p:cNvSpPr txBox="true"/>
           <p:nvPr/>
         </p:nvSpPr>
@@ -15077,7 +15144,7 @@
       </p:sp>
       <p:sp>
         <p:nvSpPr>
-          <p:cNvPr name="GraphCompose Text Line" id="27"/>
+          <p:cNvPr name="GraphCompose Text Line" id="29"/>
           <p:cNvSpPr txBox="true"/>
           <p:nvPr/>
         </p:nvSpPr>
@@ -15123,7 +15190,7 @@
       </p:sp>
       <p:sp>
         <p:nvSpPr>
-          <p:cNvPr name="AutoShape 28" id="28"/>
+          <p:cNvPr name="AutoShape 30" id="30"/>
           <p:cNvSpPr/>
           <p:nvPr/>
         </p:nvSpPr>
@@ -15147,7 +15214,7 @@
       </p:sp>
       <p:sp>
         <p:nvSpPr>
-          <p:cNvPr name="GraphCompose Text Line" id="29"/>
+          <p:cNvPr name="GraphCompose Text Line" id="31"/>
           <p:cNvSpPr txBox="true"/>
           <p:nvPr/>
         </p:nvSpPr>
@@ -15193,7 +15260,7 @@
       </p:sp>
       <p:sp>
         <p:nvSpPr>
-          <p:cNvPr name="AutoShape 30" id="30"/>
+          <p:cNvPr name="AutoShape 32" id="32"/>
           <p:cNvSpPr/>
           <p:nvPr/>
         </p:nvSpPr>
@@ -15217,7 +15284,7 @@
       </p:sp>
       <p:sp>
         <p:nvSpPr>
-          <p:cNvPr name="GraphCompose Text Line" id="31"/>
+          <p:cNvPr name="GraphCompose Text Line" id="33"/>
           <p:cNvSpPr txBox="true"/>
           <p:nvPr/>
         </p:nvSpPr>
@@ -15263,7 +15330,7 @@
       </p:sp>
       <p:sp>
         <p:nvSpPr>
-          <p:cNvPr name="AutoShape 32" id="32"/>
+          <p:cNvPr name="AutoShape 34" id="34"/>
           <p:cNvSpPr/>
           <p:nvPr/>
         </p:nvSpPr>
@@ -15287,7 +15354,7 @@
       </p:sp>
       <p:sp>
         <p:nvSpPr>
-          <p:cNvPr name="GraphCompose Text Line" id="33"/>
+          <p:cNvPr name="GraphCompose Text Line" id="35"/>
           <p:cNvSpPr txBox="true"/>
           <p:nvPr/>
         </p:nvSpPr>
@@ -15333,7 +15400,7 @@
       </p:sp>
       <p:sp>
         <p:nvSpPr>
-          <p:cNvPr name="AutoShape 34" id="34"/>
+          <p:cNvPr name="AutoShape 36" id="36"/>
           <p:cNvSpPr/>
           <p:nvPr/>
         </p:nvSpPr>
@@ -15359,7 +15426,7 @@
       </p:sp>
       <p:sp>
         <p:nvSpPr>
-          <p:cNvPr name="GraphCompose Text Line" id="35"/>
+          <p:cNvPr name="GraphCompose Text Line" id="37"/>
           <p:cNvSpPr txBox="true"/>
           <p:nvPr/>
         </p:nvSpPr>
@@ -15405,7 +15472,7 @@
       </p:sp>
       <p:sp>
         <p:nvSpPr>
-          <p:cNvPr name="GraphCompose Text Line" id="36"/>
+          <p:cNvPr name="GraphCompose Text Line" id="38"/>
           <p:cNvSpPr txBox="true"/>
           <p:nvPr/>
         </p:nvSpPr>
@@ -15451,7 +15518,7 @@
       </p:sp>
       <p:cxnSp>
         <p:nvCxnSpPr>
-          <p:cNvPr name="Connector 37" id="37"/>
+          <p:cNvPr name="Connector 39" id="39"/>
           <p:cNvCxnSpPr/>
           <p:nvPr/>
         </p:nvCxnSpPr>
@@ -15472,7 +15539,7 @@
       </p:cxnSp>
       <p:sp>
         <p:nvSpPr>
-          <p:cNvPr name="GraphCompose Text Line" id="38"/>
+          <p:cNvPr name="GraphCompose Text Line" id="40"/>
           <p:cNvSpPr txBox="true"/>
           <p:nvPr/>
         </p:nvSpPr>
@@ -15518,7 +15585,7 @@
       </p:sp>
       <p:cxnSp>
         <p:nvCxnSpPr>
-          <p:cNvPr name="Connector 39" id="39"/>
+          <p:cNvPr name="Connector 41" id="41"/>
           <p:cNvCxnSpPr/>
           <p:nvPr/>
         </p:nvCxnSpPr>
@@ -15539,7 +15606,7 @@
       </p:cxnSp>
       <p:sp>
         <p:nvSpPr>
-          <p:cNvPr name="GraphCompose Text Line" id="40"/>
+          <p:cNvPr name="GraphCompose Text Line" id="42"/>
           <p:cNvSpPr txBox="true"/>
           <p:nvPr/>
         </p:nvSpPr>
@@ -15585,7 +15652,7 @@
       </p:sp>
       <p:cxnSp>
         <p:nvCxnSpPr>
-          <p:cNvPr name="Connector 41" id="41"/>
+          <p:cNvPr name="Connector 43" id="43"/>
           <p:cNvCxnSpPr/>
           <p:nvPr/>
         </p:nvCxnSpPr>
@@ -15606,7 +15673,7 @@
       </p:cxnSp>
       <p:sp>
         <p:nvSpPr>
-          <p:cNvPr name="GraphCompose Text Line" id="42"/>
+          <p:cNvPr name="GraphCompose Text Line" id="44"/>
           <p:cNvSpPr txBox="true"/>
           <p:nvPr/>
         </p:nvSpPr>
@@ -15652,7 +15719,7 @@
       </p:sp>
       <p:cxnSp>
         <p:nvCxnSpPr>
-          <p:cNvPr name="Connector 43" id="43"/>
+          <p:cNvPr name="Connector 45" id="45"/>
           <p:cNvCxnSpPr/>
           <p:nvPr/>
         </p:nvCxnSpPr>
@@ -15673,7 +15740,7 @@
       </p:cxnSp>
       <p:sp>
         <p:nvSpPr>
-          <p:cNvPr name="GraphCompose Text Line" id="44"/>
+          <p:cNvPr name="GraphCompose Text Line" id="46"/>
           <p:cNvSpPr txBox="true"/>
           <p:nvPr/>
         </p:nvSpPr>
@@ -15719,7 +15786,7 @@
       </p:sp>
       <p:cxnSp>
         <p:nvCxnSpPr>
-          <p:cNvPr name="Connector 45" id="45"/>
+          <p:cNvPr name="Connector 47" id="47"/>
           <p:cNvCxnSpPr/>
           <p:nvPr/>
         </p:nvCxnSpPr>
@@ -15740,7 +15807,7 @@
       </p:cxnSp>
       <p:sp>
         <p:nvSpPr>
-          <p:cNvPr name="GraphCompose Text Line" id="46"/>
+          <p:cNvPr name="GraphCompose Text Line" id="48"/>
           <p:cNvSpPr txBox="true"/>
           <p:nvPr/>
         </p:nvSpPr>
@@ -15786,14 +15853,14 @@
       </p:sp>
       <p:cxnSp>
         <p:nvCxnSpPr>
-          <p:cNvPr name="Connector 47" id="47"/>
+          <p:cNvPr name="Connector 49" id="49"/>
           <p:cNvCxnSpPr/>
           <p:nvPr/>
         </p:nvCxnSpPr>
         <p:spPr>
           <a:xfrm flipV="true">
-            <a:off x="7393517" y="4516924"/>
-            <a:ext cx="1573953" cy="66522"/>
+            <a:off x="7393517" y="4516471"/>
+            <a:ext cx="1573953" cy="66748"/>
           </a:xfrm>
           <a:prstGeom prst="line">
             <a:avLst/>
@@ -15801,48 +15868,6 @@
           <a:ln w="25400" cap="flat">
             <a:solidFill>
               <a:srgbClr val="E9972D"/>
-            </a:solidFill>
-          </a:ln>
-        </p:spPr>
-      </p:cxnSp>
-      <p:cxnSp>
-        <p:nvCxnSpPr>
-          <p:cNvPr name="Connector 48" id="48"/>
-          <p:cNvCxnSpPr/>
-          <p:nvPr/>
-        </p:nvCxnSpPr>
-        <p:spPr>
-          <a:xfrm flipV="true">
-            <a:off x="8967470" y="4172324"/>
-            <a:ext cx="1573953" cy="344600"/>
-          </a:xfrm>
-          <a:prstGeom prst="line">
-            <a:avLst/>
-          </a:prstGeom>
-          <a:ln w="25400" cap="flat">
-            <a:solidFill>
-              <a:srgbClr val="E9972D"/>
-            </a:solidFill>
-          </a:ln>
-        </p:spPr>
-      </p:cxnSp>
-      <p:cxnSp>
-        <p:nvCxnSpPr>
-          <p:cNvPr name="Connector 49" id="49"/>
-          <p:cNvCxnSpPr/>
-          <p:nvPr/>
-        </p:nvCxnSpPr>
-        <p:spPr>
-          <a:xfrm flipV="true">
-            <a:off x="7393517" y="4293375"/>
-            <a:ext cx="1573953" cy="243460"/>
-          </a:xfrm>
-          <a:prstGeom prst="line">
-            <a:avLst/>
-          </a:prstGeom>
-          <a:ln w="25400" cap="flat">
-            <a:solidFill>
-              <a:srgbClr val="7A85A8"/>
             </a:solidFill>
           </a:ln>
         </p:spPr>
@@ -15855,15 +15880,15 @@
         </p:nvCxnSpPr>
         <p:spPr>
           <a:xfrm flipV="true">
-            <a:off x="8967470" y="3063630"/>
-            <a:ext cx="1573953" cy="1229745"/>
+            <a:off x="8967470" y="4168930"/>
+            <a:ext cx="1573953" cy="347541"/>
           </a:xfrm>
           <a:prstGeom prst="line">
             <a:avLst/>
           </a:prstGeom>
           <a:ln w="25400" cap="flat">
             <a:solidFill>
-              <a:srgbClr val="7A85A8"/>
+              <a:srgbClr val="E9972D"/>
             </a:solidFill>
           </a:ln>
         </p:spPr>
@@ -15876,15 +15901,15 @@
         </p:nvCxnSpPr>
         <p:spPr>
           <a:xfrm flipV="true">
-            <a:off x="7393517" y="4361254"/>
-            <a:ext cx="1573953" cy="187347"/>
+            <a:off x="7393517" y="4297221"/>
+            <a:ext cx="1573953" cy="240519"/>
           </a:xfrm>
           <a:prstGeom prst="line">
             <a:avLst/>
           </a:prstGeom>
           <a:ln w="25400" cap="flat">
             <a:solidFill>
-              <a:srgbClr val="5DC88F"/>
+              <a:srgbClr val="7A85A8"/>
             </a:solidFill>
           </a:ln>
         </p:spPr>
@@ -15897,8 +15922,29 @@
         </p:nvCxnSpPr>
         <p:spPr>
           <a:xfrm flipV="true">
-            <a:off x="8967470" y="3417281"/>
-            <a:ext cx="1573953" cy="943973"/>
+            <a:off x="8967470" y="3083315"/>
+            <a:ext cx="1573953" cy="1213906"/>
+          </a:xfrm>
+          <a:prstGeom prst="line">
+            <a:avLst/>
+          </a:prstGeom>
+          <a:ln w="25400" cap="flat">
+            <a:solidFill>
+              <a:srgbClr val="7A85A8"/>
+            </a:solidFill>
+          </a:ln>
+        </p:spPr>
+      </p:cxnSp>
+      <p:cxnSp>
+        <p:nvCxnSpPr>
+          <p:cNvPr name="Connector 53" id="53"/>
+          <p:cNvCxnSpPr/>
+          <p:nvPr/>
+        </p:nvCxnSpPr>
+        <p:spPr>
+          <a:xfrm flipV="true">
+            <a:off x="7393517" y="4361254"/>
+            <a:ext cx="1573953" cy="187347"/>
           </a:xfrm>
           <a:prstGeom prst="line">
             <a:avLst/>
@@ -15910,9 +15956,30 @@
           </a:ln>
         </p:spPr>
       </p:cxnSp>
-      <p:sp>
-        <p:nvSpPr>
-          <p:cNvPr name="GraphCompose Text Line" id="53"/>
+      <p:cxnSp>
+        <p:nvCxnSpPr>
+          <p:cNvPr name="Connector 54" id="54"/>
+          <p:cNvCxnSpPr/>
+          <p:nvPr/>
+        </p:nvCxnSpPr>
+        <p:spPr>
+          <a:xfrm flipV="true">
+            <a:off x="8967470" y="3418638"/>
+            <a:ext cx="1573953" cy="942616"/>
+          </a:xfrm>
+          <a:prstGeom prst="line">
+            <a:avLst/>
+          </a:prstGeom>
+          <a:ln w="25400" cap="flat">
+            <a:solidFill>
+              <a:srgbClr val="5DC88F"/>
+            </a:solidFill>
+          </a:ln>
+        </p:spPr>
+      </p:cxnSp>
+      <p:sp>
+        <p:nvSpPr>
+          <p:cNvPr name="GraphCompose Text Line" id="55"/>
           <p:cNvSpPr txBox="true"/>
           <p:nvPr/>
         </p:nvSpPr>
@@ -15958,7 +16025,7 @@
       </p:sp>
       <p:sp>
         <p:nvSpPr>
-          <p:cNvPr name="GraphCompose Text Line" id="54"/>
+          <p:cNvPr name="GraphCompose Text Line" id="56"/>
           <p:cNvSpPr txBox="true"/>
           <p:nvPr/>
         </p:nvSpPr>
@@ -16004,7 +16071,7 @@
       </p:sp>
       <p:sp>
         <p:nvSpPr>
-          <p:cNvPr name="GraphCompose Text Line" id="55"/>
+          <p:cNvPr name="GraphCompose Text Line" id="57"/>
           <p:cNvSpPr txBox="true"/>
           <p:nvPr/>
         </p:nvSpPr>
@@ -16050,7 +16117,7 @@
       </p:sp>
       <p:sp>
         <p:nvSpPr>
-          <p:cNvPr name="AutoShape 56" id="56"/>
+          <p:cNvPr name="AutoShape 58" id="58"/>
           <p:cNvSpPr/>
           <p:nvPr/>
         </p:nvSpPr>
@@ -16074,7 +16141,7 @@
       </p:sp>
       <p:sp>
         <p:nvSpPr>
-          <p:cNvPr name="GraphCompose Text Line" id="57"/>
+          <p:cNvPr name="GraphCompose Text Line" id="59"/>
           <p:cNvSpPr txBox="true"/>
           <p:nvPr/>
         </p:nvSpPr>
@@ -16120,7 +16187,7 @@
       </p:sp>
       <p:sp>
         <p:nvSpPr>
-          <p:cNvPr name="AutoShape 58" id="58"/>
+          <p:cNvPr name="AutoShape 60" id="60"/>
           <p:cNvSpPr/>
           <p:nvPr/>
         </p:nvSpPr>
@@ -16144,7 +16211,7 @@
       </p:sp>
       <p:sp>
         <p:nvSpPr>
-          <p:cNvPr name="GraphCompose Text Line" id="59"/>
+          <p:cNvPr name="GraphCompose Text Line" id="61"/>
           <p:cNvSpPr txBox="true"/>
           <p:nvPr/>
         </p:nvSpPr>
@@ -16190,7 +16257,7 @@
       </p:sp>
       <p:sp>
         <p:nvSpPr>
-          <p:cNvPr name="AutoShape 60" id="60"/>
+          <p:cNvPr name="AutoShape 62" id="62"/>
           <p:cNvSpPr/>
           <p:nvPr/>
         </p:nvSpPr>
@@ -16214,7 +16281,7 @@
       </p:sp>
       <p:sp>
         <p:nvSpPr>
-          <p:cNvPr name="GraphCompose Text Line" id="61"/>
+          <p:cNvPr name="GraphCompose Text Line" id="63"/>
           <p:cNvSpPr txBox="true"/>
           <p:nvPr/>
         </p:nvSpPr>
@@ -16260,7 +16327,7 @@
       </p:sp>
       <p:sp>
         <p:nvSpPr>
-          <p:cNvPr name="GraphCompose Text Line" id="62"/>
+          <p:cNvPr name="GraphCompose Text Line" id="64"/>
           <p:cNvSpPr txBox="true"/>
           <p:nvPr/>
         </p:nvSpPr>
@@ -16306,7 +16373,7 @@
       </p:sp>
       <p:sp>
         <p:nvSpPr>
-          <p:cNvPr name="GraphCompose Text Line" id="63"/>
+          <p:cNvPr name="GraphCompose Text Line" id="65"/>
           <p:cNvSpPr txBox="true"/>
           <p:nvPr/>
         </p:nvSpPr>

--- a/assets/readme/examples/maven-banner.pptx
+++ b/assets/readme/examples/maven-banner.pptx
@@ -7321,7 +7321,7 @@
                 </a:solidFill>
                 <a:latin typeface="Courier New"/>
               </a:rPr>
-              <a:t>v2.1.0</a:t>
+              <a:t>v2.1.1</a:t>
             </a:r>
             <a:endParaRPr lang="en-US" sz="1100"/>
           </a:p>

--- a/assets/readme/examples/maven-banner.pptx
+++ b/assets/readme/examples/maven-banner.pptx
@@ -1,6 +1,6 @@
 
 <file path=ppt/presentation.xml><?xml version="1.0" encoding="utf-8"?>
-<p:presentation xmlns:a="http://schemas.openxmlformats.org/drawingml/2006/main" xmlns:r="http://schemas.openxmlformats.org/officeDocument/2006/relationships" xmlns:p="http://schemas.openxmlformats.org/presentationml/2006/main" saveSubsetFonts="1">
+<p:presentation xmlns:a="http://schemas.openxmlformats.org/drawingml/2006/main" xmlns:r="http://schemas.openxmlformats.org/officeDocument/2006/relationships" xmlns:p="http://schemas.openxmlformats.org/presentationml/2006/main" saveSubsetFonts="false" embedTrueTypeFonts="true">
   <p:sldMasterIdLst>
     <p:sldMasterId id="2147483648" r:id="rId1"/>
   </p:sldMasterIdLst>
@@ -9,9 +9,32 @@
     <p:sldId id="257" r:id="rId7"/>
     <p:sldId id="258" r:id="rId8"/>
     <p:sldId id="259" r:id="rId9"/>
+    <p:sldId id="260" r:id="rId10"/>
   </p:sldIdLst>
   <p:sldSz cx="12192000" cy="6858000"/>
   <p:notesSz cx="6858000" cy="9144000"/>
+  <p:embeddedFontLst>
+    <p:embeddedFont>
+      <p:font typeface="Amiri"/>
+      <p:regular r:id="rId11"/>
+    </p:embeddedFont>
+    <p:embeddedFont>
+      <p:font typeface="David Libre"/>
+      <p:regular r:id="rId12"/>
+    </p:embeddedFont>
+    <p:embeddedFont>
+      <p:font typeface="Noto Sans Georgian"/>
+      <p:regular r:id="rId13"/>
+    </p:embeddedFont>
+    <p:embeddedFont>
+      <p:font typeface="Noto Sans Armenian"/>
+      <p:regular r:id="rId14"/>
+    </p:embeddedFont>
+    <p:embeddedFont>
+      <p:font typeface="Gothic A1"/>
+      <p:regular r:id="rId15"/>
+    </p:embeddedFont>
+  </p:embeddedFontLst>
   <p:defaultTextStyle>
     <a:defPPr>
       <a:defRPr lang="en-US"/>
@@ -16412,6 +16435,1794 @@
                 <a:latin typeface="Arial"/>
               </a:rPr>
               <a:t>not the caption.</a:t>
+            </a:r>
+            <a:endParaRPr lang="en-US" sz="1100"/>
+          </a:p>
+        </p:txBody>
+      </p:sp>
+    </p:spTree>
+  </p:cSld>
+  <p:clrMapOvr>
+    <a:masterClrMapping/>
+  </p:clrMapOvr>
+</p:sld>
+</file>
+
+<file path=ppt/slides/slide5.xml><?xml version="1.0" encoding="utf-8"?>
+<p:sld xmlns:p="http://schemas.openxmlformats.org/presentationml/2006/main" xmlns:a="http://schemas.openxmlformats.org/drawingml/2006/main">
+  <p:cSld>
+    <p:spTree>
+      <p:nvGrpSpPr>
+        <p:cNvPr id="1" name=""/>
+        <p:cNvGrpSpPr/>
+        <p:nvPr/>
+      </p:nvGrpSpPr>
+      <p:grpSpPr>
+        <a:xfrm>
+          <a:off x="0" y="0"/>
+          <a:ext cx="0" cy="0"/>
+          <a:chOff x="0" y="0"/>
+          <a:chExt cx="0" cy="0"/>
+        </a:xfrm>
+      </p:grpSpPr>
+      <p:sp>
+        <p:nvSpPr>
+          <p:cNvPr name="AutoShape 2" id="2"/>
+          <p:cNvSpPr/>
+          <p:nvPr/>
+        </p:nvSpPr>
+        <p:spPr>
+          <a:xfrm>
+            <a:off x="0" y="0"/>
+            <a:ext cx="12192000" cy="6858000"/>
+          </a:xfrm>
+          <a:prstGeom prst="rect">
+            <a:avLst/>
+          </a:prstGeom>
+          <a:solidFill>
+            <a:srgbClr val="0D1121"/>
+          </a:solidFill>
+          <a:ln>
+            <a:noFill/>
+          </a:ln>
+        </p:spPr>
+      </p:sp>
+      <p:sp>
+        <p:nvSpPr>
+          <p:cNvPr name="GraphCompose Text Line" id="3"/>
+          <p:cNvSpPr txBox="true"/>
+          <p:nvPr/>
+        </p:nvSpPr>
+        <p:spPr>
+          <a:xfrm>
+            <a:off x="660400" y="454168"/>
+            <a:ext cx="1007110" cy="109804"/>
+          </a:xfrm>
+          <a:prstGeom prst="rect">
+            <a:avLst/>
+          </a:prstGeom>
+        </p:spPr>
+        <p:txBody>
+          <a:bodyPr anchor="t" rtlCol="false" wrap="none" tIns="0" rIns="0" bIns="0" lIns="0">
+            <a:noAutofit/>
+          </a:bodyPr>
+          <a:lstStyle/>
+          <a:p>
+            <a:pPr algn="l">
+              <a:lnSpc>
+                <a:spcPct val="100000"/>
+              </a:lnSpc>
+              <a:spcBef>
+                <a:spcPct val="0"/>
+              </a:spcBef>
+              <a:spcAft>
+                <a:spcPct val="0"/>
+              </a:spcAft>
+              <a:defRPr/>
+            </a:pPr>
+            <a:r>
+              <a:rPr lang="en-US" sz="1100" b="true" i="false" u="none" strike="noStrike" kern="0">
+                <a:solidFill>
+                  <a:srgbClr val="E9972D"/>
+                </a:solidFill>
+                <a:latin typeface="Courier New"/>
+              </a:rPr>
+              <a:t>MULTILINGUAL</a:t>
+            </a:r>
+            <a:endParaRPr lang="en-US" sz="1100"/>
+          </a:p>
+        </p:txBody>
+      </p:sp>
+      <p:sp>
+        <p:nvSpPr>
+          <p:cNvPr name="GraphCompose Text Line" id="4"/>
+          <p:cNvSpPr txBox="true"/>
+          <p:nvPr/>
+        </p:nvSpPr>
+        <p:spPr>
+          <a:xfrm>
+            <a:off x="660400" y="597253"/>
+            <a:ext cx="5886196" cy="352425"/>
+          </a:xfrm>
+          <a:prstGeom prst="rect">
+            <a:avLst/>
+          </a:prstGeom>
+        </p:spPr>
+        <p:txBody>
+          <a:bodyPr anchor="t" rtlCol="false" wrap="none" tIns="0" rIns="0" bIns="0" lIns="0">
+            <a:noAutofit/>
+          </a:bodyPr>
+          <a:lstStyle/>
+          <a:p>
+            <a:pPr algn="l">
+              <a:lnSpc>
+                <a:spcPct val="100000"/>
+              </a:lnSpc>
+              <a:spcBef>
+                <a:spcPct val="0"/>
+              </a:spcBef>
+              <a:spcAft>
+                <a:spcPct val="0"/>
+              </a:spcAft>
+              <a:defRPr/>
+            </a:pPr>
+            <a:r>
+              <a:rPr lang="en-US" sz="3000" b="true" i="false" u="none" strike="noStrike" kern="0">
+                <a:solidFill>
+                  <a:srgbClr val="F7F8FC"/>
+                </a:solidFill>
+                <a:latin typeface="Arial"/>
+              </a:rPr>
+              <a:t>Documents that read right to left</a:t>
+            </a:r>
+            <a:endParaRPr lang="en-US" sz="1100"/>
+          </a:p>
+        </p:txBody>
+      </p:sp>
+      <p:sp>
+        <p:nvSpPr>
+          <p:cNvPr name="AutoShape 5" id="5"/>
+          <p:cNvSpPr/>
+          <p:nvPr/>
+        </p:nvSpPr>
+        <p:spPr>
+          <a:xfrm>
+            <a:off x="660400" y="1173429"/>
+            <a:ext cx="1219200" cy="50800"/>
+          </a:xfrm>
+          <a:prstGeom prst="rect">
+            <a:avLst/>
+          </a:prstGeom>
+          <a:solidFill>
+            <a:srgbClr val="E9972D"/>
+          </a:solidFill>
+          <a:ln>
+            <a:noFill/>
+          </a:ln>
+        </p:spPr>
+      </p:sp>
+      <p:sp>
+        <p:nvSpPr>
+          <p:cNvPr name="GraphCompose Text Line" id="6"/>
+          <p:cNvSpPr txBox="true"/>
+          <p:nvPr/>
+        </p:nvSpPr>
+        <p:spPr>
+          <a:xfrm>
+            <a:off x="660400" y="1396510"/>
+            <a:ext cx="10801287" cy="152718"/>
+          </a:xfrm>
+          <a:prstGeom prst="rect">
+            <a:avLst/>
+          </a:prstGeom>
+        </p:spPr>
+        <p:txBody>
+          <a:bodyPr anchor="t" rtlCol="false" wrap="none" tIns="0" rIns="0" bIns="0" lIns="0">
+            <a:noAutofit/>
+          </a:bodyPr>
+          <a:lstStyle/>
+          <a:p>
+            <a:pPr algn="l">
+              <a:lnSpc>
+                <a:spcPct val="100000"/>
+              </a:lnSpc>
+              <a:spcBef>
+                <a:spcPct val="0"/>
+              </a:spcBef>
+              <a:spcAft>
+                <a:spcPct val="0"/>
+              </a:spcAft>
+              <a:defRPr/>
+            </a:pPr>
+            <a:r>
+              <a:rPr lang="en-US" sz="1300" b="false" i="false" u="none" strike="noStrike" kern="0">
+                <a:solidFill>
+                  <a:srgbClr val="CED4E6"/>
+                </a:solidFill>
+                <a:latin typeface="Arial"/>
+              </a:rPr>
+              <a:t>A paragraph — or a table cell — says which way it runs, and Hebrew and Arabic lay out, join and mirror correctly. The PDF is painted, so the engine</a:t>
+            </a:r>
+            <a:endParaRPr lang="en-US" sz="1100"/>
+          </a:p>
+        </p:txBody>
+      </p:sp>
+      <p:sp>
+        <p:nvSpPr>
+          <p:cNvPr name="GraphCompose Text Line" id="7"/>
+          <p:cNvSpPr txBox="true"/>
+          <p:nvPr/>
+        </p:nvSpPr>
+        <p:spPr>
+          <a:xfrm>
+            <a:off x="660400" y="1600028"/>
+            <a:ext cx="10645267" cy="152718"/>
+          </a:xfrm>
+          <a:prstGeom prst="rect">
+            <a:avLst/>
+          </a:prstGeom>
+        </p:spPr>
+        <p:txBody>
+          <a:bodyPr anchor="t" rtlCol="false" wrap="none" tIns="0" rIns="0" bIns="0" lIns="0">
+            <a:noAutofit/>
+          </a:bodyPr>
+          <a:lstStyle/>
+          <a:p>
+            <a:pPr algn="l">
+              <a:lnSpc>
+                <a:spcPct val="100000"/>
+              </a:lnSpc>
+              <a:spcBef>
+                <a:spcPct val="0"/>
+              </a:spcBef>
+              <a:spcAft>
+                <a:spcPct val="0"/>
+              </a:spcAft>
+              <a:defRPr/>
+            </a:pPr>
+            <a:r>
+              <a:rPr lang="en-US" sz="1300" b="false" i="false" u="none" strike="noStrike" kern="0">
+                <a:solidFill>
+                  <a:srgbClr val="CED4E6"/>
+                </a:solidFill>
+                <a:latin typeface="Arial"/>
+              </a:rPr>
+              <a:t>resolves the line itself; Word and PowerPoint order text themselves and are told what each needs instead. Five script families ship with the library.</a:t>
+            </a:r>
+            <a:endParaRPr lang="en-US" sz="1100"/>
+          </a:p>
+        </p:txBody>
+      </p:sp>
+      <p:sp>
+        <p:nvSpPr>
+          <p:cNvPr name="AutoShape 8" id="8"/>
+          <p:cNvSpPr/>
+          <p:nvPr/>
+        </p:nvSpPr>
+        <p:spPr>
+          <a:xfrm>
+            <a:off x="660400" y="2253564"/>
+            <a:ext cx="2032000" cy="1214971"/>
+          </a:xfrm>
+          <a:prstGeom prst="roundRect">
+            <a:avLst>
+              <a:gd name="adj" fmla="val 10453"/>
+            </a:avLst>
+          </a:prstGeom>
+          <a:solidFill>
+            <a:srgbClr val="141A2F"/>
+          </a:solidFill>
+          <a:ln w="12700">
+            <a:solidFill>
+              <a:srgbClr val="303856"/>
+            </a:solidFill>
+          </a:ln>
+        </p:spPr>
+      </p:sp>
+      <p:sp>
+        <p:nvSpPr>
+          <p:cNvPr name="GraphCompose Text Line" id="9"/>
+          <p:cNvSpPr txBox="true"/>
+          <p:nvPr/>
+        </p:nvSpPr>
+        <p:spPr>
+          <a:xfrm>
+            <a:off x="863600" y="2428224"/>
+            <a:ext cx="475539" cy="140970"/>
+          </a:xfrm>
+          <a:prstGeom prst="rect">
+            <a:avLst/>
+          </a:prstGeom>
+        </p:spPr>
+        <p:txBody>
+          <a:bodyPr anchor="t" rtlCol="false" wrap="none" tIns="0" rIns="0" bIns="0" lIns="0">
+            <a:noAutofit/>
+          </a:bodyPr>
+          <a:lstStyle/>
+          <a:p>
+            <a:pPr algn="l">
+              <a:lnSpc>
+                <a:spcPct val="100000"/>
+              </a:lnSpc>
+              <a:spcBef>
+                <a:spcPct val="0"/>
+              </a:spcBef>
+              <a:spcAft>
+                <a:spcPct val="0"/>
+              </a:spcAft>
+              <a:defRPr/>
+            </a:pPr>
+            <a:r>
+              <a:rPr lang="en-US" sz="1200" b="true" i="false" u="none" strike="noStrike" kern="0">
+                <a:solidFill>
+                  <a:srgbClr val="F7F8FC"/>
+                </a:solidFill>
+                <a:latin typeface="Arial"/>
+              </a:rPr>
+              <a:t>Arabic</a:t>
+            </a:r>
+            <a:endParaRPr lang="en-US" sz="1100"/>
+          </a:p>
+        </p:txBody>
+      </p:sp>
+      <p:sp>
+        <p:nvSpPr>
+          <p:cNvPr name="GraphCompose Text Line" id="10"/>
+          <p:cNvSpPr txBox="true"/>
+          <p:nvPr/>
+        </p:nvSpPr>
+        <p:spPr>
+          <a:xfrm>
+            <a:off x="863600" y="2626564"/>
+            <a:ext cx="325120" cy="84849"/>
+          </a:xfrm>
+          <a:prstGeom prst="rect">
+            <a:avLst/>
+          </a:prstGeom>
+        </p:spPr>
+        <p:txBody>
+          <a:bodyPr anchor="t" rtlCol="false" wrap="none" tIns="0" rIns="0" bIns="0" lIns="0">
+            <a:noAutofit/>
+          </a:bodyPr>
+          <a:lstStyle/>
+          <a:p>
+            <a:pPr algn="l">
+              <a:lnSpc>
+                <a:spcPct val="100000"/>
+              </a:lnSpc>
+              <a:spcBef>
+                <a:spcPct val="0"/>
+              </a:spcBef>
+              <a:spcAft>
+                <a:spcPct val="0"/>
+              </a:spcAft>
+              <a:defRPr/>
+            </a:pPr>
+            <a:r>
+              <a:rPr lang="en-US" sz="850" b="false" i="false" u="none" strike="noStrike" kern="0">
+                <a:solidFill>
+                  <a:srgbClr val="8C95AF"/>
+                </a:solidFill>
+                <a:latin typeface="Courier New"/>
+              </a:rPr>
+              <a:t>AMIRI</a:t>
+            </a:r>
+            <a:endParaRPr lang="en-US" sz="1100"/>
+          </a:p>
+        </p:txBody>
+      </p:sp>
+      <p:sp>
+        <p:nvSpPr>
+          <p:cNvPr name="GraphCompose Inline Text Span" id="11"/>
+          <p:cNvSpPr txBox="true"/>
+          <p:nvPr/>
+        </p:nvSpPr>
+        <p:spPr>
+          <a:xfrm>
+            <a:off x="1617396" y="2885783"/>
+            <a:ext cx="873074" cy="379552"/>
+          </a:xfrm>
+          <a:prstGeom prst="rect">
+            <a:avLst/>
+          </a:prstGeom>
+        </p:spPr>
+        <p:txBody>
+          <a:bodyPr anchor="t" rtlCol="false" wrap="none" tIns="0" rIns="0" bIns="0" lIns="0">
+            <a:noAutofit/>
+          </a:bodyPr>
+          <a:lstStyle/>
+          <a:p>
+            <a:pPr algn="l" rtl="true">
+              <a:defRPr/>
+            </a:pPr>
+            <a:r>
+              <a:rPr lang="en-US" sz="1700" b="false" i="false" u="none" strike="noStrike" kern="0">
+                <a:solidFill>
+                  <a:srgbClr val="F2A844"/>
+                </a:solidFill>
+                <a:cs typeface="Amiri"/>
+              </a:rPr>
+              <a:t>مرحبا بالعالم</a:t>
+            </a:r>
+            <a:endParaRPr lang="en-US" sz="1100"/>
+          </a:p>
+        </p:txBody>
+      </p:sp>
+      <p:sp>
+        <p:nvSpPr>
+          <p:cNvPr name="AutoShape 12" id="12"/>
+          <p:cNvSpPr/>
+          <p:nvPr/>
+        </p:nvSpPr>
+        <p:spPr>
+          <a:xfrm>
+            <a:off x="2870200" y="2253564"/>
+            <a:ext cx="2032000" cy="1051319"/>
+          </a:xfrm>
+          <a:prstGeom prst="roundRect">
+            <a:avLst>
+              <a:gd name="adj" fmla="val 12080"/>
+            </a:avLst>
+          </a:prstGeom>
+          <a:solidFill>
+            <a:srgbClr val="141A2F"/>
+          </a:solidFill>
+          <a:ln w="12700">
+            <a:solidFill>
+              <a:srgbClr val="303856"/>
+            </a:solidFill>
+          </a:ln>
+        </p:spPr>
+      </p:sp>
+      <p:sp>
+        <p:nvSpPr>
+          <p:cNvPr name="GraphCompose Text Line" id="13"/>
+          <p:cNvSpPr txBox="true"/>
+          <p:nvPr/>
+        </p:nvSpPr>
+        <p:spPr>
+          <a:xfrm>
+            <a:off x="3073400" y="2428224"/>
+            <a:ext cx="551739" cy="140970"/>
+          </a:xfrm>
+          <a:prstGeom prst="rect">
+            <a:avLst/>
+          </a:prstGeom>
+        </p:spPr>
+        <p:txBody>
+          <a:bodyPr anchor="t" rtlCol="false" wrap="none" tIns="0" rIns="0" bIns="0" lIns="0">
+            <a:noAutofit/>
+          </a:bodyPr>
+          <a:lstStyle/>
+          <a:p>
+            <a:pPr algn="l">
+              <a:lnSpc>
+                <a:spcPct val="100000"/>
+              </a:lnSpc>
+              <a:spcBef>
+                <a:spcPct val="0"/>
+              </a:spcBef>
+              <a:spcAft>
+                <a:spcPct val="0"/>
+              </a:spcAft>
+              <a:defRPr/>
+            </a:pPr>
+            <a:r>
+              <a:rPr lang="en-US" sz="1200" b="true" i="false" u="none" strike="noStrike" kern="0">
+                <a:solidFill>
+                  <a:srgbClr val="F7F8FC"/>
+                </a:solidFill>
+                <a:latin typeface="Arial"/>
+              </a:rPr>
+              <a:t>Hebrew</a:t>
+            </a:r>
+            <a:endParaRPr lang="en-US" sz="1100"/>
+          </a:p>
+        </p:txBody>
+      </p:sp>
+      <p:sp>
+        <p:nvSpPr>
+          <p:cNvPr name="GraphCompose Text Line" id="14"/>
+          <p:cNvSpPr txBox="true"/>
+          <p:nvPr/>
+        </p:nvSpPr>
+        <p:spPr>
+          <a:xfrm>
+            <a:off x="3073400" y="2626564"/>
+            <a:ext cx="713740" cy="84849"/>
+          </a:xfrm>
+          <a:prstGeom prst="rect">
+            <a:avLst/>
+          </a:prstGeom>
+        </p:spPr>
+        <p:txBody>
+          <a:bodyPr anchor="t" rtlCol="false" wrap="none" tIns="0" rIns="0" bIns="0" lIns="0">
+            <a:noAutofit/>
+          </a:bodyPr>
+          <a:lstStyle/>
+          <a:p>
+            <a:pPr algn="l">
+              <a:lnSpc>
+                <a:spcPct val="100000"/>
+              </a:lnSpc>
+              <a:spcBef>
+                <a:spcPct val="0"/>
+              </a:spcBef>
+              <a:spcAft>
+                <a:spcPct val="0"/>
+              </a:spcAft>
+              <a:defRPr/>
+            </a:pPr>
+            <a:r>
+              <a:rPr lang="en-US" sz="850" b="false" i="false" u="none" strike="noStrike" kern="0">
+                <a:solidFill>
+                  <a:srgbClr val="8C95AF"/>
+                </a:solidFill>
+                <a:latin typeface="Courier New"/>
+              </a:rPr>
+              <a:t>DAVID_LIBRE</a:t>
+            </a:r>
+            <a:endParaRPr lang="en-US" sz="1100"/>
+          </a:p>
+        </p:txBody>
+      </p:sp>
+      <p:sp>
+        <p:nvSpPr>
+          <p:cNvPr name="GraphCompose Inline Text Span" id="15"/>
+          <p:cNvSpPr txBox="true"/>
+          <p:nvPr/>
+        </p:nvSpPr>
+        <p:spPr>
+          <a:xfrm>
+            <a:off x="3765448" y="2885783"/>
+            <a:ext cx="934822" cy="215900"/>
+          </a:xfrm>
+          <a:prstGeom prst="rect">
+            <a:avLst/>
+          </a:prstGeom>
+        </p:spPr>
+        <p:txBody>
+          <a:bodyPr anchor="t" rtlCol="false" wrap="none" tIns="0" rIns="0" bIns="0" lIns="0">
+            <a:noAutofit/>
+          </a:bodyPr>
+          <a:lstStyle/>
+          <a:p>
+            <a:pPr algn="l" rtl="true">
+              <a:defRPr/>
+            </a:pPr>
+            <a:r>
+              <a:rPr lang="en-US" sz="1700" b="false" i="false" u="none" strike="noStrike" kern="0">
+                <a:solidFill>
+                  <a:srgbClr val="F2A844"/>
+                </a:solidFill>
+                <a:cs typeface="David Libre"/>
+              </a:rPr>
+              <a:t>שלום עולם</a:t>
+            </a:r>
+            <a:endParaRPr lang="en-US" sz="1100"/>
+          </a:p>
+        </p:txBody>
+      </p:sp>
+      <p:sp>
+        <p:nvSpPr>
+          <p:cNvPr name="AutoShape 16" id="16"/>
+          <p:cNvSpPr/>
+          <p:nvPr/>
+        </p:nvSpPr>
+        <p:spPr>
+          <a:xfrm>
+            <a:off x="5080000" y="2253564"/>
+            <a:ext cx="2032000" cy="1129043"/>
+          </a:xfrm>
+          <a:prstGeom prst="roundRect">
+            <a:avLst>
+              <a:gd name="adj" fmla="val 11248"/>
+            </a:avLst>
+          </a:prstGeom>
+          <a:solidFill>
+            <a:srgbClr val="141A2F"/>
+          </a:solidFill>
+          <a:ln w="12700">
+            <a:solidFill>
+              <a:srgbClr val="303856"/>
+            </a:solidFill>
+          </a:ln>
+        </p:spPr>
+      </p:sp>
+      <p:sp>
+        <p:nvSpPr>
+          <p:cNvPr name="GraphCompose Text Line" id="17"/>
+          <p:cNvSpPr txBox="true"/>
+          <p:nvPr/>
+        </p:nvSpPr>
+        <p:spPr>
+          <a:xfrm>
+            <a:off x="5283200" y="2428224"/>
+            <a:ext cx="670306" cy="140970"/>
+          </a:xfrm>
+          <a:prstGeom prst="rect">
+            <a:avLst/>
+          </a:prstGeom>
+        </p:spPr>
+        <p:txBody>
+          <a:bodyPr anchor="t" rtlCol="false" wrap="none" tIns="0" rIns="0" bIns="0" lIns="0">
+            <a:noAutofit/>
+          </a:bodyPr>
+          <a:lstStyle/>
+          <a:p>
+            <a:pPr algn="l">
+              <a:lnSpc>
+                <a:spcPct val="100000"/>
+              </a:lnSpc>
+              <a:spcBef>
+                <a:spcPct val="0"/>
+              </a:spcBef>
+              <a:spcAft>
+                <a:spcPct val="0"/>
+              </a:spcAft>
+              <a:defRPr/>
+            </a:pPr>
+            <a:r>
+              <a:rPr lang="en-US" sz="1200" b="true" i="false" u="none" strike="noStrike" kern="0">
+                <a:solidFill>
+                  <a:srgbClr val="F7F8FC"/>
+                </a:solidFill>
+                <a:latin typeface="Arial"/>
+              </a:rPr>
+              <a:t>Georgian</a:t>
+            </a:r>
+            <a:endParaRPr lang="en-US" sz="1100"/>
+          </a:p>
+        </p:txBody>
+      </p:sp>
+      <p:sp>
+        <p:nvSpPr>
+          <p:cNvPr name="GraphCompose Text Line" id="18"/>
+          <p:cNvSpPr txBox="true"/>
+          <p:nvPr/>
+        </p:nvSpPr>
+        <p:spPr>
+          <a:xfrm>
+            <a:off x="5283200" y="2626564"/>
+            <a:ext cx="1167130" cy="84849"/>
+          </a:xfrm>
+          <a:prstGeom prst="rect">
+            <a:avLst/>
+          </a:prstGeom>
+        </p:spPr>
+        <p:txBody>
+          <a:bodyPr anchor="t" rtlCol="false" wrap="none" tIns="0" rIns="0" bIns="0" lIns="0">
+            <a:noAutofit/>
+          </a:bodyPr>
+          <a:lstStyle/>
+          <a:p>
+            <a:pPr algn="l">
+              <a:lnSpc>
+                <a:spcPct val="100000"/>
+              </a:lnSpc>
+              <a:spcBef>
+                <a:spcPct val="0"/>
+              </a:spcBef>
+              <a:spcAft>
+                <a:spcPct val="0"/>
+              </a:spcAft>
+              <a:defRPr/>
+            </a:pPr>
+            <a:r>
+              <a:rPr lang="en-US" sz="850" b="false" i="false" u="none" strike="noStrike" kern="0">
+                <a:solidFill>
+                  <a:srgbClr val="8C95AF"/>
+                </a:solidFill>
+                <a:latin typeface="Courier New"/>
+              </a:rPr>
+              <a:t>NOTO_SANS_GEORGIAN</a:t>
+            </a:r>
+            <a:endParaRPr lang="en-US" sz="1100"/>
+          </a:p>
+        </p:txBody>
+      </p:sp>
+      <p:sp>
+        <p:nvSpPr>
+          <p:cNvPr name="GraphCompose Text Line" id="19"/>
+          <p:cNvSpPr txBox="true"/>
+          <p:nvPr/>
+        </p:nvSpPr>
+        <p:spPr>
+          <a:xfrm>
+            <a:off x="5283200" y="2885783"/>
+            <a:ext cx="1216139" cy="293624"/>
+          </a:xfrm>
+          <a:prstGeom prst="rect">
+            <a:avLst/>
+          </a:prstGeom>
+        </p:spPr>
+        <p:txBody>
+          <a:bodyPr anchor="t" rtlCol="false" wrap="none" tIns="0" rIns="0" bIns="0" lIns="0">
+            <a:noAutofit/>
+          </a:bodyPr>
+          <a:lstStyle/>
+          <a:p>
+            <a:pPr algn="l">
+              <a:lnSpc>
+                <a:spcPct val="100000"/>
+              </a:lnSpc>
+              <a:spcBef>
+                <a:spcPct val="0"/>
+              </a:spcBef>
+              <a:spcAft>
+                <a:spcPct val="0"/>
+              </a:spcAft>
+              <a:defRPr/>
+            </a:pPr>
+            <a:r>
+              <a:rPr lang="en-US" sz="1700" b="false" i="false" u="none" strike="noStrike" kern="0">
+                <a:solidFill>
+                  <a:srgbClr val="F2A844"/>
+                </a:solidFill>
+                <a:latin typeface="Noto Sans Georgian"/>
+              </a:rPr>
+              <a:t>გამარჯობა</a:t>
+            </a:r>
+            <a:endParaRPr lang="en-US" sz="1100"/>
+          </a:p>
+        </p:txBody>
+      </p:sp>
+      <p:sp>
+        <p:nvSpPr>
+          <p:cNvPr name="AutoShape 20" id="20"/>
+          <p:cNvSpPr/>
+          <p:nvPr/>
+        </p:nvSpPr>
+        <p:spPr>
+          <a:xfrm>
+            <a:off x="7289800" y="2253564"/>
+            <a:ext cx="2032000" cy="1129043"/>
+          </a:xfrm>
+          <a:prstGeom prst="roundRect">
+            <a:avLst>
+              <a:gd name="adj" fmla="val 11248"/>
+            </a:avLst>
+          </a:prstGeom>
+          <a:solidFill>
+            <a:srgbClr val="141A2F"/>
+          </a:solidFill>
+          <a:ln w="12700">
+            <a:solidFill>
+              <a:srgbClr val="303856"/>
+            </a:solidFill>
+          </a:ln>
+        </p:spPr>
+      </p:sp>
+      <p:sp>
+        <p:nvSpPr>
+          <p:cNvPr name="GraphCompose Text Line" id="21"/>
+          <p:cNvSpPr txBox="true"/>
+          <p:nvPr/>
+        </p:nvSpPr>
+        <p:spPr>
+          <a:xfrm>
+            <a:off x="7493000" y="2428224"/>
+            <a:ext cx="704139" cy="140970"/>
+          </a:xfrm>
+          <a:prstGeom prst="rect">
+            <a:avLst/>
+          </a:prstGeom>
+        </p:spPr>
+        <p:txBody>
+          <a:bodyPr anchor="t" rtlCol="false" wrap="none" tIns="0" rIns="0" bIns="0" lIns="0">
+            <a:noAutofit/>
+          </a:bodyPr>
+          <a:lstStyle/>
+          <a:p>
+            <a:pPr algn="l">
+              <a:lnSpc>
+                <a:spcPct val="100000"/>
+              </a:lnSpc>
+              <a:spcBef>
+                <a:spcPct val="0"/>
+              </a:spcBef>
+              <a:spcAft>
+                <a:spcPct val="0"/>
+              </a:spcAft>
+              <a:defRPr/>
+            </a:pPr>
+            <a:r>
+              <a:rPr lang="en-US" sz="1200" b="true" i="false" u="none" strike="noStrike" kern="0">
+                <a:solidFill>
+                  <a:srgbClr val="F7F8FC"/>
+                </a:solidFill>
+                <a:latin typeface="Arial"/>
+              </a:rPr>
+              <a:t>Armenian</a:t>
+            </a:r>
+            <a:endParaRPr lang="en-US" sz="1100"/>
+          </a:p>
+        </p:txBody>
+      </p:sp>
+      <p:sp>
+        <p:nvSpPr>
+          <p:cNvPr name="GraphCompose Text Line" id="22"/>
+          <p:cNvSpPr txBox="true"/>
+          <p:nvPr/>
+        </p:nvSpPr>
+        <p:spPr>
+          <a:xfrm>
+            <a:off x="7493000" y="2626564"/>
+            <a:ext cx="1167130" cy="84849"/>
+          </a:xfrm>
+          <a:prstGeom prst="rect">
+            <a:avLst/>
+          </a:prstGeom>
+        </p:spPr>
+        <p:txBody>
+          <a:bodyPr anchor="t" rtlCol="false" wrap="none" tIns="0" rIns="0" bIns="0" lIns="0">
+            <a:noAutofit/>
+          </a:bodyPr>
+          <a:lstStyle/>
+          <a:p>
+            <a:pPr algn="l">
+              <a:lnSpc>
+                <a:spcPct val="100000"/>
+              </a:lnSpc>
+              <a:spcBef>
+                <a:spcPct val="0"/>
+              </a:spcBef>
+              <a:spcAft>
+                <a:spcPct val="0"/>
+              </a:spcAft>
+              <a:defRPr/>
+            </a:pPr>
+            <a:r>
+              <a:rPr lang="en-US" sz="850" b="false" i="false" u="none" strike="noStrike" kern="0">
+                <a:solidFill>
+                  <a:srgbClr val="8C95AF"/>
+                </a:solidFill>
+                <a:latin typeface="Courier New"/>
+              </a:rPr>
+              <a:t>NOTO_SANS_ARMENIAN</a:t>
+            </a:r>
+            <a:endParaRPr lang="en-US" sz="1100"/>
+          </a:p>
+        </p:txBody>
+      </p:sp>
+      <p:sp>
+        <p:nvSpPr>
+          <p:cNvPr name="GraphCompose Text Line" id="23"/>
+          <p:cNvSpPr txBox="true"/>
+          <p:nvPr/>
+        </p:nvSpPr>
+        <p:spPr>
+          <a:xfrm>
+            <a:off x="7493000" y="2885783"/>
+            <a:ext cx="1606702" cy="293624"/>
+          </a:xfrm>
+          <a:prstGeom prst="rect">
+            <a:avLst/>
+          </a:prstGeom>
+        </p:spPr>
+        <p:txBody>
+          <a:bodyPr anchor="t" rtlCol="false" wrap="none" tIns="0" rIns="0" bIns="0" lIns="0">
+            <a:noAutofit/>
+          </a:bodyPr>
+          <a:lstStyle/>
+          <a:p>
+            <a:pPr algn="l">
+              <a:lnSpc>
+                <a:spcPct val="100000"/>
+              </a:lnSpc>
+              <a:spcBef>
+                <a:spcPct val="0"/>
+              </a:spcBef>
+              <a:spcAft>
+                <a:spcPct val="0"/>
+              </a:spcAft>
+              <a:defRPr/>
+            </a:pPr>
+            <a:r>
+              <a:rPr lang="en-US" sz="1700" b="false" i="false" u="none" strike="noStrike" kern="0">
+                <a:solidFill>
+                  <a:srgbClr val="F2A844"/>
+                </a:solidFill>
+                <a:latin typeface="Noto Sans Armenian"/>
+              </a:rPr>
+              <a:t>Բարև աշխարհ</a:t>
+            </a:r>
+            <a:endParaRPr lang="en-US" sz="1100"/>
+          </a:p>
+        </p:txBody>
+      </p:sp>
+      <p:sp>
+        <p:nvSpPr>
+          <p:cNvPr name="AutoShape 24" id="24"/>
+          <p:cNvSpPr/>
+          <p:nvPr/>
+        </p:nvSpPr>
+        <p:spPr>
+          <a:xfrm>
+            <a:off x="9499600" y="2253564"/>
+            <a:ext cx="2032000" cy="1051319"/>
+          </a:xfrm>
+          <a:prstGeom prst="roundRect">
+            <a:avLst>
+              <a:gd name="adj" fmla="val 12080"/>
+            </a:avLst>
+          </a:prstGeom>
+          <a:solidFill>
+            <a:srgbClr val="141A2F"/>
+          </a:solidFill>
+          <a:ln w="12700">
+            <a:solidFill>
+              <a:srgbClr val="303856"/>
+            </a:solidFill>
+          </a:ln>
+        </p:spPr>
+      </p:sp>
+      <p:sp>
+        <p:nvSpPr>
+          <p:cNvPr name="GraphCompose Text Line" id="25"/>
+          <p:cNvSpPr txBox="true"/>
+          <p:nvPr/>
+        </p:nvSpPr>
+        <p:spPr>
+          <a:xfrm>
+            <a:off x="9702800" y="2428224"/>
+            <a:ext cx="526288" cy="140970"/>
+          </a:xfrm>
+          <a:prstGeom prst="rect">
+            <a:avLst/>
+          </a:prstGeom>
+        </p:spPr>
+        <p:txBody>
+          <a:bodyPr anchor="t" rtlCol="false" wrap="none" tIns="0" rIns="0" bIns="0" lIns="0">
+            <a:noAutofit/>
+          </a:bodyPr>
+          <a:lstStyle/>
+          <a:p>
+            <a:pPr algn="l">
+              <a:lnSpc>
+                <a:spcPct val="100000"/>
+              </a:lnSpc>
+              <a:spcBef>
+                <a:spcPct val="0"/>
+              </a:spcBef>
+              <a:spcAft>
+                <a:spcPct val="0"/>
+              </a:spcAft>
+              <a:defRPr/>
+            </a:pPr>
+            <a:r>
+              <a:rPr lang="en-US" sz="1200" b="true" i="false" u="none" strike="noStrike" kern="0">
+                <a:solidFill>
+                  <a:srgbClr val="F7F8FC"/>
+                </a:solidFill>
+                <a:latin typeface="Arial"/>
+              </a:rPr>
+              <a:t>Korean</a:t>
+            </a:r>
+            <a:endParaRPr lang="en-US" sz="1100"/>
+          </a:p>
+        </p:txBody>
+      </p:sp>
+      <p:sp>
+        <p:nvSpPr>
+          <p:cNvPr name="GraphCompose Text Line" id="26"/>
+          <p:cNvSpPr txBox="true"/>
+          <p:nvPr/>
+        </p:nvSpPr>
+        <p:spPr>
+          <a:xfrm>
+            <a:off x="9702800" y="2626564"/>
+            <a:ext cx="584200" cy="84849"/>
+          </a:xfrm>
+          <a:prstGeom prst="rect">
+            <a:avLst/>
+          </a:prstGeom>
+        </p:spPr>
+        <p:txBody>
+          <a:bodyPr anchor="t" rtlCol="false" wrap="none" tIns="0" rIns="0" bIns="0" lIns="0">
+            <a:noAutofit/>
+          </a:bodyPr>
+          <a:lstStyle/>
+          <a:p>
+            <a:pPr algn="l">
+              <a:lnSpc>
+                <a:spcPct val="100000"/>
+              </a:lnSpc>
+              <a:spcBef>
+                <a:spcPct val="0"/>
+              </a:spcBef>
+              <a:spcAft>
+                <a:spcPct val="0"/>
+              </a:spcAft>
+              <a:defRPr/>
+            </a:pPr>
+            <a:r>
+              <a:rPr lang="en-US" sz="850" b="false" i="false" u="none" strike="noStrike" kern="0">
+                <a:solidFill>
+                  <a:srgbClr val="8C95AF"/>
+                </a:solidFill>
+                <a:latin typeface="Courier New"/>
+              </a:rPr>
+              <a:t>GOTHIC_A1</a:t>
+            </a:r>
+            <a:endParaRPr lang="en-US" sz="1100"/>
+          </a:p>
+        </p:txBody>
+      </p:sp>
+      <p:sp>
+        <p:nvSpPr>
+          <p:cNvPr name="GraphCompose Text Line" id="27"/>
+          <p:cNvSpPr txBox="true"/>
+          <p:nvPr/>
+        </p:nvSpPr>
+        <p:spPr>
+          <a:xfrm>
+            <a:off x="9702800" y="2885783"/>
+            <a:ext cx="1038670" cy="215900"/>
+          </a:xfrm>
+          <a:prstGeom prst="rect">
+            <a:avLst/>
+          </a:prstGeom>
+        </p:spPr>
+        <p:txBody>
+          <a:bodyPr anchor="t" rtlCol="false" wrap="none" tIns="0" rIns="0" bIns="0" lIns="0">
+            <a:noAutofit/>
+          </a:bodyPr>
+          <a:lstStyle/>
+          <a:p>
+            <a:pPr algn="l">
+              <a:lnSpc>
+                <a:spcPct val="100000"/>
+              </a:lnSpc>
+              <a:spcBef>
+                <a:spcPct val="0"/>
+              </a:spcBef>
+              <a:spcAft>
+                <a:spcPct val="0"/>
+              </a:spcAft>
+              <a:defRPr/>
+            </a:pPr>
+            <a:r>
+              <a:rPr lang="en-US" sz="1700" b="false" i="false" u="none" strike="noStrike" kern="0">
+                <a:solidFill>
+                  <a:srgbClr val="F2A844"/>
+                </a:solidFill>
+                <a:ea typeface="Gothic A1"/>
+              </a:rPr>
+              <a:t>안녕하세요</a:t>
+            </a:r>
+            <a:endParaRPr lang="en-US" sz="1100"/>
+          </a:p>
+        </p:txBody>
+      </p:sp>
+      <p:sp>
+        <p:nvSpPr>
+          <p:cNvPr name="AutoShape 28" id="28"/>
+          <p:cNvSpPr/>
+          <p:nvPr/>
+        </p:nvSpPr>
+        <p:spPr>
+          <a:xfrm>
+            <a:off x="660400" y="3697135"/>
+            <a:ext cx="3505200" cy="1111885"/>
+          </a:xfrm>
+          <a:prstGeom prst="roundRect">
+            <a:avLst>
+              <a:gd name="adj" fmla="val 11422"/>
+            </a:avLst>
+          </a:prstGeom>
+          <a:solidFill>
+            <a:srgbClr val="192038"/>
+          </a:solidFill>
+          <a:ln>
+            <a:noFill/>
+          </a:ln>
+        </p:spPr>
+      </p:sp>
+      <p:cxnSp>
+        <p:nvCxnSpPr>
+          <p:cNvPr name="Connector 29" id="29"/>
+          <p:cNvCxnSpPr/>
+          <p:nvPr/>
+        </p:nvCxnSpPr>
+        <p:spPr>
+          <a:xfrm>
+            <a:off x="660400" y="3697135"/>
+            <a:ext cx="3505200" cy="0"/>
+          </a:xfrm>
+          <a:prstGeom prst="line">
+            <a:avLst/>
+          </a:prstGeom>
+          <a:ln w="38100">
+            <a:solidFill>
+              <a:srgbClr val="E9972D"/>
+            </a:solidFill>
+          </a:ln>
+        </p:spPr>
+      </p:cxnSp>
+      <p:sp>
+        <p:nvSpPr>
+          <p:cNvPr name="GraphCompose Text Line" id="30"/>
+          <p:cNvSpPr txBox="true"/>
+          <p:nvPr/>
+        </p:nvSpPr>
+        <p:spPr>
+          <a:xfrm>
+            <a:off x="863600" y="3869416"/>
+            <a:ext cx="1973720" cy="152718"/>
+          </a:xfrm>
+          <a:prstGeom prst="rect">
+            <a:avLst/>
+          </a:prstGeom>
+        </p:spPr>
+        <p:txBody>
+          <a:bodyPr anchor="t" rtlCol="false" wrap="none" tIns="0" rIns="0" bIns="0" lIns="0">
+            <a:noAutofit/>
+          </a:bodyPr>
+          <a:lstStyle/>
+          <a:p>
+            <a:pPr algn="l">
+              <a:lnSpc>
+                <a:spcPct val="100000"/>
+              </a:lnSpc>
+              <a:spcBef>
+                <a:spcPct val="0"/>
+              </a:spcBef>
+              <a:spcAft>
+                <a:spcPct val="0"/>
+              </a:spcAft>
+              <a:defRPr/>
+            </a:pPr>
+            <a:r>
+              <a:rPr lang="en-US" sz="1300" b="true" i="false" u="none" strike="noStrike" kern="0">
+                <a:solidFill>
+                  <a:srgbClr val="F7F8FC"/>
+                </a:solidFill>
+                <a:latin typeface="Arial"/>
+              </a:rPr>
+              <a:t>Ordered by the algorithm</a:t>
+            </a:r>
+            <a:endParaRPr lang="en-US" sz="1100"/>
+          </a:p>
+        </p:txBody>
+      </p:sp>
+      <p:sp>
+        <p:nvSpPr>
+          <p:cNvPr name="GraphCompose Text Line" id="31"/>
+          <p:cNvSpPr txBox="true"/>
+          <p:nvPr/>
+        </p:nvSpPr>
+        <p:spPr>
+          <a:xfrm>
+            <a:off x="863600" y="4115791"/>
+            <a:ext cx="3045054" cy="129222"/>
+          </a:xfrm>
+          <a:prstGeom prst="rect">
+            <a:avLst/>
+          </a:prstGeom>
+        </p:spPr>
+        <p:txBody>
+          <a:bodyPr anchor="t" rtlCol="false" wrap="none" tIns="0" rIns="0" bIns="0" lIns="0">
+            <a:noAutofit/>
+          </a:bodyPr>
+          <a:lstStyle/>
+          <a:p>
+            <a:pPr algn="l">
+              <a:lnSpc>
+                <a:spcPct val="100000"/>
+              </a:lnSpc>
+              <a:spcBef>
+                <a:spcPct val="0"/>
+              </a:spcBef>
+              <a:spcAft>
+                <a:spcPct val="0"/>
+              </a:spcAft>
+              <a:defRPr/>
+            </a:pPr>
+            <a:r>
+              <a:rPr lang="en-US" sz="1100" b="false" i="false" u="none" strike="noStrike" kern="0">
+                <a:solidFill>
+                  <a:srgbClr val="8C95AF"/>
+                </a:solidFill>
+                <a:latin typeface="Arial"/>
+              </a:rPr>
+              <a:t>Lines resolve through UAX #9, so a Latin word or</a:t>
+            </a:r>
+            <a:endParaRPr lang="en-US" sz="1100"/>
+          </a:p>
+        </p:txBody>
+      </p:sp>
+      <p:sp>
+        <p:nvSpPr>
+          <p:cNvPr name="GraphCompose Text Line" id="32"/>
+          <p:cNvSpPr txBox="true"/>
+          <p:nvPr/>
+        </p:nvSpPr>
+        <p:spPr>
+          <a:xfrm>
+            <a:off x="863600" y="4283113"/>
+            <a:ext cx="3005938" cy="129222"/>
+          </a:xfrm>
+          <a:prstGeom prst="rect">
+            <a:avLst/>
+          </a:prstGeom>
+        </p:spPr>
+        <p:txBody>
+          <a:bodyPr anchor="t" rtlCol="false" wrap="none" tIns="0" rIns="0" bIns="0" lIns="0">
+            <a:noAutofit/>
+          </a:bodyPr>
+          <a:lstStyle/>
+          <a:p>
+            <a:pPr algn="l">
+              <a:lnSpc>
+                <a:spcPct val="100000"/>
+              </a:lnSpc>
+              <a:spcBef>
+                <a:spcPct val="0"/>
+              </a:spcBef>
+              <a:spcAft>
+                <a:spcPct val="0"/>
+              </a:spcAft>
+              <a:defRPr/>
+            </a:pPr>
+            <a:r>
+              <a:rPr lang="en-US" sz="1100" b="false" i="false" u="none" strike="noStrike" kern="0">
+                <a:solidFill>
+                  <a:srgbClr val="8C95AF"/>
+                </a:solidFill>
+                <a:latin typeface="Arial"/>
+              </a:rPr>
+              <a:t>a number inside Hebrew keeps running forwards</a:t>
+            </a:r>
+            <a:endParaRPr lang="en-US" sz="1100"/>
+          </a:p>
+        </p:txBody>
+      </p:sp>
+      <p:sp>
+        <p:nvSpPr>
+          <p:cNvPr name="GraphCompose Text Line" id="33"/>
+          <p:cNvSpPr txBox="true"/>
+          <p:nvPr/>
+        </p:nvSpPr>
+        <p:spPr>
+          <a:xfrm>
+            <a:off x="863600" y="4450436"/>
+            <a:ext cx="2866657" cy="129222"/>
+          </a:xfrm>
+          <a:prstGeom prst="rect">
+            <a:avLst/>
+          </a:prstGeom>
+        </p:spPr>
+        <p:txBody>
+          <a:bodyPr anchor="t" rtlCol="false" wrap="none" tIns="0" rIns="0" bIns="0" lIns="0">
+            <a:noAutofit/>
+          </a:bodyPr>
+          <a:lstStyle/>
+          <a:p>
+            <a:pPr algn="l">
+              <a:lnSpc>
+                <a:spcPct val="100000"/>
+              </a:lnSpc>
+              <a:spcBef>
+                <a:spcPct val="0"/>
+              </a:spcBef>
+              <a:spcAft>
+                <a:spcPct val="0"/>
+              </a:spcAft>
+              <a:defRPr/>
+            </a:pPr>
+            <a:r>
+              <a:rPr lang="en-US" sz="1100" b="false" i="false" u="none" strike="noStrike" kern="0">
+                <a:solidFill>
+                  <a:srgbClr val="8C95AF"/>
+                </a:solidFill>
+                <a:latin typeface="Arial"/>
+              </a:rPr>
+              <a:t>and paired punctuation faces what it encloses.</a:t>
+            </a:r>
+            <a:endParaRPr lang="en-US" sz="1100"/>
+          </a:p>
+        </p:txBody>
+      </p:sp>
+      <p:sp>
+        <p:nvSpPr>
+          <p:cNvPr name="AutoShape 34" id="34"/>
+          <p:cNvSpPr/>
+          <p:nvPr/>
+        </p:nvSpPr>
+        <p:spPr>
+          <a:xfrm>
+            <a:off x="4343400" y="3697135"/>
+            <a:ext cx="3505200" cy="1111885"/>
+          </a:xfrm>
+          <a:prstGeom prst="roundRect">
+            <a:avLst>
+              <a:gd name="adj" fmla="val 11422"/>
+            </a:avLst>
+          </a:prstGeom>
+          <a:solidFill>
+            <a:srgbClr val="192038"/>
+          </a:solidFill>
+          <a:ln>
+            <a:noFill/>
+          </a:ln>
+        </p:spPr>
+      </p:sp>
+      <p:cxnSp>
+        <p:nvCxnSpPr>
+          <p:cNvPr name="Connector 35" id="35"/>
+          <p:cNvCxnSpPr/>
+          <p:nvPr/>
+        </p:nvCxnSpPr>
+        <p:spPr>
+          <a:xfrm>
+            <a:off x="4343400" y="3697135"/>
+            <a:ext cx="3505200" cy="0"/>
+          </a:xfrm>
+          <a:prstGeom prst="line">
+            <a:avLst/>
+          </a:prstGeom>
+          <a:ln w="38100">
+            <a:solidFill>
+              <a:srgbClr val="E9972D"/>
+            </a:solidFill>
+          </a:ln>
+        </p:spPr>
+      </p:cxnSp>
+      <p:sp>
+        <p:nvSpPr>
+          <p:cNvPr name="GraphCompose Text Line" id="36"/>
+          <p:cNvSpPr txBox="true"/>
+          <p:nvPr/>
+        </p:nvSpPr>
+        <p:spPr>
+          <a:xfrm>
+            <a:off x="4546600" y="3869416"/>
+            <a:ext cx="1799539" cy="152718"/>
+          </a:xfrm>
+          <a:prstGeom prst="rect">
+            <a:avLst/>
+          </a:prstGeom>
+        </p:spPr>
+        <p:txBody>
+          <a:bodyPr anchor="t" rtlCol="false" wrap="none" tIns="0" rIns="0" bIns="0" lIns="0">
+            <a:noAutofit/>
+          </a:bodyPr>
+          <a:lstStyle/>
+          <a:p>
+            <a:pPr algn="l">
+              <a:lnSpc>
+                <a:spcPct val="100000"/>
+              </a:lnSpc>
+              <a:spcBef>
+                <a:spcPct val="0"/>
+              </a:spcBef>
+              <a:spcAft>
+                <a:spcPct val="0"/>
+              </a:spcAft>
+              <a:defRPr/>
+            </a:pPr>
+            <a:r>
+              <a:rPr lang="en-US" sz="1300" b="true" i="false" u="none" strike="noStrike" kern="0">
+                <a:solidFill>
+                  <a:srgbClr val="F7F8FC"/>
+                </a:solidFill>
+                <a:latin typeface="Arial"/>
+              </a:rPr>
+              <a:t>Joined, then measured</a:t>
+            </a:r>
+            <a:endParaRPr lang="en-US" sz="1100"/>
+          </a:p>
+        </p:txBody>
+      </p:sp>
+      <p:sp>
+        <p:nvSpPr>
+          <p:cNvPr name="GraphCompose Text Line" id="37"/>
+          <p:cNvSpPr txBox="true"/>
+          <p:nvPr/>
+        </p:nvSpPr>
+        <p:spPr>
+          <a:xfrm>
+            <a:off x="4546600" y="4115791"/>
+            <a:ext cx="2975064" cy="129222"/>
+          </a:xfrm>
+          <a:prstGeom prst="rect">
+            <a:avLst/>
+          </a:prstGeom>
+        </p:spPr>
+        <p:txBody>
+          <a:bodyPr anchor="t" rtlCol="false" wrap="none" tIns="0" rIns="0" bIns="0" lIns="0">
+            <a:noAutofit/>
+          </a:bodyPr>
+          <a:lstStyle/>
+          <a:p>
+            <a:pPr algn="l">
+              <a:lnSpc>
+                <a:spcPct val="100000"/>
+              </a:lnSpc>
+              <a:spcBef>
+                <a:spcPct val="0"/>
+              </a:spcBef>
+              <a:spcAft>
+                <a:spcPct val="0"/>
+              </a:spcAft>
+              <a:defRPr/>
+            </a:pPr>
+            <a:r>
+              <a:rPr lang="en-US" sz="1100" b="false" i="false" u="none" strike="noStrike" kern="0">
+                <a:solidFill>
+                  <a:srgbClr val="8C95AF"/>
+                </a:solidFill>
+                <a:latin typeface="Arial"/>
+              </a:rPr>
+              <a:t>Arabic is shaped into its contextual forms before</a:t>
+            </a:r>
+            <a:endParaRPr lang="en-US" sz="1100"/>
+          </a:p>
+        </p:txBody>
+      </p:sp>
+      <p:sp>
+        <p:nvSpPr>
+          <p:cNvPr name="GraphCompose Text Line" id="38"/>
+          <p:cNvSpPr txBox="true"/>
+          <p:nvPr/>
+        </p:nvSpPr>
+        <p:spPr>
+          <a:xfrm>
+            <a:off x="4546600" y="4283113"/>
+            <a:ext cx="2975064" cy="129222"/>
+          </a:xfrm>
+          <a:prstGeom prst="rect">
+            <a:avLst/>
+          </a:prstGeom>
+        </p:spPr>
+        <p:txBody>
+          <a:bodyPr anchor="t" rtlCol="false" wrap="none" tIns="0" rIns="0" bIns="0" lIns="0">
+            <a:noAutofit/>
+          </a:bodyPr>
+          <a:lstStyle/>
+          <a:p>
+            <a:pPr algn="l">
+              <a:lnSpc>
+                <a:spcPct val="100000"/>
+              </a:lnSpc>
+              <a:spcBef>
+                <a:spcPct val="0"/>
+              </a:spcBef>
+              <a:spcAft>
+                <a:spcPct val="0"/>
+              </a:spcAft>
+              <a:defRPr/>
+            </a:pPr>
+            <a:r>
+              <a:rPr lang="en-US" sz="1100" b="false" i="false" u="none" strike="noStrike" kern="0">
+                <a:solidFill>
+                  <a:srgbClr val="8C95AF"/>
+                </a:solidFill>
+                <a:latin typeface="Arial"/>
+              </a:rPr>
+              <a:t>the line is measured, so a column is sized to the</a:t>
+            </a:r>
+            <a:endParaRPr lang="en-US" sz="1100"/>
+          </a:p>
+        </p:txBody>
+      </p:sp>
+      <p:sp>
+        <p:nvSpPr>
+          <p:cNvPr name="GraphCompose Text Line" id="39"/>
+          <p:cNvSpPr txBox="true"/>
+          <p:nvPr/>
+        </p:nvSpPr>
+        <p:spPr>
+          <a:xfrm>
+            <a:off x="4546600" y="4450436"/>
+            <a:ext cx="1926895" cy="129222"/>
+          </a:xfrm>
+          <a:prstGeom prst="rect">
+            <a:avLst/>
+          </a:prstGeom>
+        </p:spPr>
+        <p:txBody>
+          <a:bodyPr anchor="t" rtlCol="false" wrap="none" tIns="0" rIns="0" bIns="0" lIns="0">
+            <a:noAutofit/>
+          </a:bodyPr>
+          <a:lstStyle/>
+          <a:p>
+            <a:pPr algn="l">
+              <a:lnSpc>
+                <a:spcPct val="100000"/>
+              </a:lnSpc>
+              <a:spcBef>
+                <a:spcPct val="0"/>
+              </a:spcBef>
+              <a:spcAft>
+                <a:spcPct val="0"/>
+              </a:spcAft>
+              <a:defRPr/>
+            </a:pPr>
+            <a:r>
+              <a:rPr lang="en-US" sz="1100" b="false" i="false" u="none" strike="noStrike" kern="0">
+                <a:solidFill>
+                  <a:srgbClr val="8C95AF"/>
+                </a:solidFill>
+                <a:latin typeface="Arial"/>
+              </a:rPr>
+              <a:t>letters the page actually draws.</a:t>
+            </a:r>
+            <a:endParaRPr lang="en-US" sz="1100"/>
+          </a:p>
+        </p:txBody>
+      </p:sp>
+      <p:sp>
+        <p:nvSpPr>
+          <p:cNvPr name="AutoShape 40" id="40"/>
+          <p:cNvSpPr/>
+          <p:nvPr/>
+        </p:nvSpPr>
+        <p:spPr>
+          <a:xfrm>
+            <a:off x="8026400" y="3697135"/>
+            <a:ext cx="3505200" cy="1111885"/>
+          </a:xfrm>
+          <a:prstGeom prst="roundRect">
+            <a:avLst>
+              <a:gd name="adj" fmla="val 11422"/>
+            </a:avLst>
+          </a:prstGeom>
+          <a:solidFill>
+            <a:srgbClr val="192038"/>
+          </a:solidFill>
+          <a:ln>
+            <a:noFill/>
+          </a:ln>
+        </p:spPr>
+      </p:sp>
+      <p:cxnSp>
+        <p:nvCxnSpPr>
+          <p:cNvPr name="Connector 41" id="41"/>
+          <p:cNvCxnSpPr/>
+          <p:nvPr/>
+        </p:nvCxnSpPr>
+        <p:spPr>
+          <a:xfrm>
+            <a:off x="8026400" y="3697135"/>
+            <a:ext cx="3505200" cy="0"/>
+          </a:xfrm>
+          <a:prstGeom prst="line">
+            <a:avLst/>
+          </a:prstGeom>
+          <a:ln w="38100">
+            <a:solidFill>
+              <a:srgbClr val="E9972D"/>
+            </a:solidFill>
+          </a:ln>
+        </p:spPr>
+      </p:cxnSp>
+      <p:sp>
+        <p:nvSpPr>
+          <p:cNvPr name="GraphCompose Text Line" id="42"/>
+          <p:cNvSpPr txBox="true"/>
+          <p:nvPr/>
+        </p:nvSpPr>
+        <p:spPr>
+          <a:xfrm>
+            <a:off x="8229600" y="3869416"/>
+            <a:ext cx="2056435" cy="152718"/>
+          </a:xfrm>
+          <a:prstGeom prst="rect">
+            <a:avLst/>
+          </a:prstGeom>
+        </p:spPr>
+        <p:txBody>
+          <a:bodyPr anchor="t" rtlCol="false" wrap="none" tIns="0" rIns="0" bIns="0" lIns="0">
+            <a:noAutofit/>
+          </a:bodyPr>
+          <a:lstStyle/>
+          <a:p>
+            <a:pPr algn="l">
+              <a:lnSpc>
+                <a:spcPct val="100000"/>
+              </a:lnSpc>
+              <a:spcBef>
+                <a:spcPct val="0"/>
+              </a:spcBef>
+              <a:spcAft>
+                <a:spcPct val="0"/>
+              </a:spcAft>
+              <a:defRPr/>
+            </a:pPr>
+            <a:r>
+              <a:rPr lang="en-US" sz="1300" b="true" i="false" u="none" strike="noStrike" kern="0">
+                <a:solidFill>
+                  <a:srgbClr val="F7F8FC"/>
+                </a:solidFill>
+                <a:latin typeface="Arial"/>
+              </a:rPr>
+              <a:t>The same in three formats</a:t>
+            </a:r>
+            <a:endParaRPr lang="en-US" sz="1100"/>
+          </a:p>
+        </p:txBody>
+      </p:sp>
+      <p:sp>
+        <p:nvSpPr>
+          <p:cNvPr name="GraphCompose Text Line" id="43"/>
+          <p:cNvSpPr txBox="true"/>
+          <p:nvPr/>
+        </p:nvSpPr>
+        <p:spPr>
+          <a:xfrm>
+            <a:off x="8229600" y="4115791"/>
+            <a:ext cx="2936227" cy="129222"/>
+          </a:xfrm>
+          <a:prstGeom prst="rect">
+            <a:avLst/>
+          </a:prstGeom>
+        </p:spPr>
+        <p:txBody>
+          <a:bodyPr anchor="t" rtlCol="false" wrap="none" tIns="0" rIns="0" bIns="0" lIns="0">
+            <a:noAutofit/>
+          </a:bodyPr>
+          <a:lstStyle/>
+          <a:p>
+            <a:pPr algn="l">
+              <a:lnSpc>
+                <a:spcPct val="100000"/>
+              </a:lnSpc>
+              <a:spcBef>
+                <a:spcPct val="0"/>
+              </a:spcBef>
+              <a:spcAft>
+                <a:spcPct val="0"/>
+              </a:spcAft>
+              <a:defRPr/>
+            </a:pPr>
+            <a:r>
+              <a:rPr lang="en-US" sz="1100" b="false" i="false" u="none" strike="noStrike" kern="0">
+                <a:solidFill>
+                  <a:srgbClr val="8C95AF"/>
+                </a:solidFill>
+                <a:latin typeface="Arial"/>
+              </a:rPr>
+              <a:t>PDF, PowerPoint and Word each get what their</a:t>
+            </a:r>
+            <a:endParaRPr lang="en-US" sz="1100"/>
+          </a:p>
+        </p:txBody>
+      </p:sp>
+      <p:sp>
+        <p:nvSpPr>
+          <p:cNvPr name="GraphCompose Text Line" id="44"/>
+          <p:cNvSpPr txBox="true"/>
+          <p:nvPr/>
+        </p:nvSpPr>
+        <p:spPr>
+          <a:xfrm>
+            <a:off x="8229600" y="4283113"/>
+            <a:ext cx="2602624" cy="129222"/>
+          </a:xfrm>
+          <a:prstGeom prst="rect">
+            <a:avLst/>
+          </a:prstGeom>
+        </p:spPr>
+        <p:txBody>
+          <a:bodyPr anchor="t" rtlCol="false" wrap="none" tIns="0" rIns="0" bIns="0" lIns="0">
+            <a:noAutofit/>
+          </a:bodyPr>
+          <a:lstStyle/>
+          <a:p>
+            <a:pPr algn="l">
+              <a:lnSpc>
+                <a:spcPct val="100000"/>
+              </a:lnSpc>
+              <a:spcBef>
+                <a:spcPct val="0"/>
+              </a:spcBef>
+              <a:spcAft>
+                <a:spcPct val="0"/>
+              </a:spcAft>
+              <a:defRPr/>
+            </a:pPr>
+            <a:r>
+              <a:rPr lang="en-US" sz="1100" b="false" i="false" u="none" strike="noStrike" kern="0">
+                <a:solidFill>
+                  <a:srgbClr val="8C95AF"/>
+                </a:solidFill>
+                <a:latin typeface="Arial"/>
+              </a:rPr>
+              <a:t>own text engine needs — the document is</a:t>
+            </a:r>
+            <a:endParaRPr lang="en-US" sz="1100"/>
+          </a:p>
+        </p:txBody>
+      </p:sp>
+      <p:sp>
+        <p:nvSpPr>
+          <p:cNvPr name="GraphCompose Text Line" id="45"/>
+          <p:cNvSpPr txBox="true"/>
+          <p:nvPr/>
+        </p:nvSpPr>
+        <p:spPr>
+          <a:xfrm>
+            <a:off x="8229600" y="4450436"/>
+            <a:ext cx="933209" cy="129222"/>
+          </a:xfrm>
+          <a:prstGeom prst="rect">
+            <a:avLst/>
+          </a:prstGeom>
+        </p:spPr>
+        <p:txBody>
+          <a:bodyPr anchor="t" rtlCol="false" wrap="none" tIns="0" rIns="0" bIns="0" lIns="0">
+            <a:noAutofit/>
+          </a:bodyPr>
+          <a:lstStyle/>
+          <a:p>
+            <a:pPr algn="l">
+              <a:lnSpc>
+                <a:spcPct val="100000"/>
+              </a:lnSpc>
+              <a:spcBef>
+                <a:spcPct val="0"/>
+              </a:spcBef>
+              <a:spcAft>
+                <a:spcPct val="0"/>
+              </a:spcAft>
+              <a:defRPr/>
+            </a:pPr>
+            <a:r>
+              <a:rPr lang="en-US" sz="1100" b="false" i="false" u="none" strike="noStrike" kern="0">
+                <a:solidFill>
+                  <a:srgbClr val="8C95AF"/>
+                </a:solidFill>
+                <a:latin typeface="Arial"/>
+              </a:rPr>
+              <a:t>authored once.</a:t>
+            </a:r>
+            <a:endParaRPr lang="en-US" sz="1100"/>
+          </a:p>
+        </p:txBody>
+      </p:sp>
+      <p:sp>
+        <p:nvSpPr>
+          <p:cNvPr name="GraphCompose Text Line" id="46"/>
+          <p:cNvSpPr txBox="true"/>
+          <p:nvPr/>
+        </p:nvSpPr>
+        <p:spPr>
+          <a:xfrm>
+            <a:off x="660400" y="5040426"/>
+            <a:ext cx="8329981" cy="111601"/>
+          </a:xfrm>
+          <a:prstGeom prst="rect">
+            <a:avLst/>
+          </a:prstGeom>
+        </p:spPr>
+        <p:txBody>
+          <a:bodyPr anchor="t" rtlCol="false" wrap="none" tIns="0" rIns="0" bIns="0" lIns="0">
+            <a:noAutofit/>
+          </a:bodyPr>
+          <a:lstStyle/>
+          <a:p>
+            <a:pPr algn="l">
+              <a:lnSpc>
+                <a:spcPct val="100000"/>
+              </a:lnSpc>
+              <a:spcBef>
+                <a:spcPct val="0"/>
+              </a:spcBef>
+              <a:spcAft>
+                <a:spcPct val="0"/>
+              </a:spcAft>
+              <a:defRPr/>
+            </a:pPr>
+            <a:r>
+              <a:rPr lang="en-US" sz="950" b="false" i="false" u="none" strike="noStrike" kern="0">
+                <a:solidFill>
+                  <a:srgbClr val="68728E"/>
+                </a:solidFill>
+                <a:latin typeface="Arial"/>
+              </a:rPr>
+              <a:t>Each card names its FontName constant. Every word of Hebrew and Arabic above was laid out by the engine that drew this page — no image is embedded.</a:t>
             </a:r>
             <a:endParaRPr lang="en-US" sz="1100"/>
           </a:p>

--- a/assets/readme/examples/maven-banner.pptx
+++ b/assets/readme/examples/maven-banner.pptx
@@ -7344,7 +7344,7 @@
                 </a:solidFill>
                 <a:latin typeface="Courier New"/>
               </a:rPr>
-              <a:t>v2.1.1</a:t>
+              <a:t>v2.2.0</a:t>
             </a:r>
             <a:endParaRPr lang="en-US" sz="1100"/>
           </a:p>

--- a/assets/readme/examples/maven-banner.pptx
+++ b/assets/readme/examples/maven-banner.pptx
@@ -7344,7 +7344,7 @@
                 </a:solidFill>
                 <a:latin typeface="Courier New"/>
               </a:rPr>
-              <a:t>v2.2.0</a:t>
+              <a:t>v2.2.1</a:t>
             </a:r>
             <a:endParaRPr lang="en-US" sz="1100"/>
           </a:p>

--- a/assets/readme/examples/maven-banner.pptx
+++ b/assets/readme/examples/maven-banner.pptx
@@ -7344,7 +7344,7 @@
                 </a:solidFill>
                 <a:latin typeface="Courier New"/>
               </a:rPr>
-              <a:t>v2.2.1</a:t>
+              <a:t>v2.2.2</a:t>
             </a:r>
             <a:endParaRPr lang="en-US" sz="1100"/>
           </a:p>

--- a/assets/readme/examples/maven-banner.pptx
+++ b/assets/readme/examples/maven-banner.pptx
@@ -7344,7 +7344,7 @@
                 </a:solidFill>
                 <a:latin typeface="Courier New"/>
               </a:rPr>
-              <a:t>v2.2.2</a:t>
+              <a:t>v2.3.0</a:t>
             </a:r>
             <a:endParaRPr lang="en-US" sz="1100"/>
           </a:p>
